--- a/presentation.pptx
+++ b/presentation.pptx
@@ -26,6 +26,9 @@
     <p:sldId id="274" r:id="rId25"/>
     <p:sldId id="275" r:id="rId26"/>
     <p:sldId id="276" r:id="rId27"/>
+    <p:sldId id="277" r:id="rId28"/>
+    <p:sldId id="278" r:id="rId29"/>
+    <p:sldId id="279" r:id="rId30"/>
   </p:sldIdLst>
   <p:sldSz cx="12188952" cy="6858000" type="screen4x3"/>
   <p:notesSz cx="6858000" cy="9144000"/>
@@ -6485,7 +6488,7 @@
                   <a:srgbClr val="FFD75E"/>
                 </a:solidFill>
               </a:rPr>
-              <a:t>Example: interpreter  ·  -O3 baseline = 37,918 ns  ·  Greedy policy result: ~27,138 ns  →  +27.7% speedup</a:t>
+              <a:t>Example: interpreter  ·  -O3 baseline = 37,275 ns  ·  Greedy policy result: ~27,183 ns  →  +27.1% speedup</a:t>
             </a:r>
           </a:p>
         </p:txBody>
@@ -8846,7 +8849,7 @@
                   <a:srgbClr val="56D3A0"/>
                 </a:solidFill>
               </a:rPr>
-              <a:t>Compile → benchmark  ·  measured = 27,138 ns  ·  r = (37,918 − 27,138) / 37,918 = +27.7%  ✓</a:t>
+              <a:t>Compile → benchmark  ·  measured = 27,183 ns  ·  r = (37,275 − 27,183) / 37,275 = +27.1%  ✓</a:t>
             </a:r>
           </a:p>
         </p:txBody>
@@ -11266,7 +11269,7 @@
                   <a:srgbClr val="FFA040"/>
                 </a:solidFill>
               </a:rPr>
-              <a:t>EV → 1</a:t>
+              <a:t>EV → 0.69/0.59</a:t>
             </a:r>
           </a:p>
         </p:txBody>
@@ -11300,7 +11303,7 @@
                   <a:srgbClr val="CCD6E8"/>
                 </a:solidFill>
               </a:rPr>
-              <a:t>explained variance convergence confirms tight, calibrated baseline</a:t>
+              <a:t>TFX/GRU episode EV at epoch 100; weighted runs reach 0.87/0.86</a:t>
             </a:r>
           </a:p>
         </p:txBody>
@@ -12898,7 +12901,7 @@
       </p:sp>
       <p:pic>
         <p:nvPicPr>
-          <p:cNvPr id="5" name="Picture 4" descr="train_plots.png"/>
+          <p:cNvPr id="5" name="Picture 4" descr="auto-tfx-episode.png"/>
           <p:cNvPicPr>
             <a:picLocks noChangeAspect="1"/>
           </p:cNvPicPr>
@@ -12913,7 +12916,7 @@
         <p:spPr>
           <a:xfrm>
             <a:off x="411480" y="1097280"/>
-            <a:ext cx="7132320" cy="4509687"/>
+            <a:ext cx="7132320" cy="4486260"/>
           </a:xfrm>
           <a:prstGeom prst="rect">
             <a:avLst/>
@@ -12983,7 +12986,31 @@
                   <a:srgbClr val="FFD75E"/>
                 </a:solidFill>
               </a:rPr>
-              <a:t>+0.149</a:t>
+              <a:t>+0.091</a:t>
+            </a:r>
+            <a:r>
+              <a:rPr sz="1500" b="0" i="0">
+                <a:solidFill>
+                  <a:srgbClr val="CCD6E8"/>
+                </a:solidFill>
+              </a:rPr>
+              <a:t>  (EMA </a:t>
+            </a:r>
+            <a:r>
+              <a:rPr sz="1500" b="0" i="0">
+                <a:solidFill>
+                  <a:srgbClr val="FFD75E"/>
+                </a:solidFill>
+              </a:rPr>
+              <a:t>+0.080</a:t>
+            </a:r>
+            <a:r>
+              <a:rPr sz="1500" b="0" i="0">
+                <a:solidFill>
+                  <a:srgbClr val="CCD6E8"/>
+                </a:solidFill>
+              </a:rPr>
+              <a:t>)</a:t>
             </a:r>
           </a:p>
           <a:p>
@@ -13006,7 +13033,7 @@
                   <a:srgbClr val="CCD6E8"/>
                 </a:solidFill>
               </a:rPr>
-              <a:t>Explained Variance → ≈ </a:t>
+              <a:t>Explained Variance reaches </a:t>
             </a:r>
             <a:r>
               <a:rPr sz="1500" b="0" i="0">
@@ -13014,7 +13041,7 @@
                   <a:srgbClr val="FFD75E"/>
                 </a:solidFill>
               </a:rPr>
-              <a:t>1</a:t>
+              <a:t>0.69</a:t>
             </a:r>
           </a:p>
           <a:p>
@@ -13153,7 +13180,15 @@
                   <a:srgbClr val="CCD6E8"/>
                 </a:solidFill>
               </a:rPr>
-              <a:t>No-op % falls across training</a:t>
+              <a:t>No-op % stabilises ~</a:t>
+            </a:r>
+            <a:r>
+              <a:rPr sz="1500" b="0" i="0">
+                <a:solidFill>
+                  <a:srgbClr val="FFD75E"/>
+                </a:solidFill>
+              </a:rPr>
+              <a:t>30%</a:t>
             </a:r>
           </a:p>
           <a:p>
@@ -13390,7 +13425,7 @@
         <p:spPr>
           <a:xfrm>
             <a:off x="411480" y="1097280"/>
-            <a:ext cx="6858000" cy="3313697"/>
+            <a:ext cx="6858000" cy="3519237"/>
           </a:xfrm>
           <a:prstGeom prst="rect">
             <a:avLst/>
@@ -13716,7 +13751,7 @@
                   <a:srgbClr val="FF6B6B"/>
                 </a:solidFill>
               </a:rPr>
-              <a:t>−0.791</a:t>
+              <a:t>−0.795</a:t>
             </a:r>
           </a:p>
         </p:txBody>
@@ -13750,7 +13785,7 @@
                   <a:srgbClr val="CCD6E8"/>
                 </a:solidFill>
               </a:rPr>
-              <a:t>−0.062</a:t>
+              <a:t>−0.039</a:t>
             </a:r>
           </a:p>
         </p:txBody>
@@ -13784,7 +13819,7 @@
                   <a:srgbClr val="56D3A0"/>
                 </a:solidFill>
               </a:rPr>
-              <a:t>+0.092</a:t>
+              <a:t>+0.075</a:t>
             </a:r>
           </a:p>
         </p:txBody>
@@ -13818,7 +13853,7 @@
                   <a:srgbClr val="56D3A0"/>
                 </a:solidFill>
               </a:rPr>
-              <a:t>+0.104</a:t>
+              <a:t>+0.095</a:t>
             </a:r>
           </a:p>
         </p:txBody>
@@ -13929,7 +13964,7 @@
                   <a:srgbClr val="CCD6E8"/>
                 </a:solidFill>
               </a:rPr>
-              <a:t>−0.082</a:t>
+              <a:t>−0.089</a:t>
             </a:r>
           </a:p>
         </p:txBody>
@@ -13963,7 +13998,7 @@
                   <a:srgbClr val="CCD6E8"/>
                 </a:solidFill>
               </a:rPr>
-              <a:t>+0.082</a:t>
+              <a:t>+0.062</a:t>
             </a:r>
           </a:p>
         </p:txBody>
@@ -13997,7 +14032,7 @@
                   <a:srgbClr val="56D3A0"/>
                 </a:solidFill>
               </a:rPr>
-              <a:t>+0.077</a:t>
+              <a:t>+0.027</a:t>
             </a:r>
           </a:p>
         </p:txBody>
@@ -14031,7 +14066,7 @@
                   <a:srgbClr val="56D3A0"/>
                 </a:solidFill>
               </a:rPr>
-              <a:t>+0.086</a:t>
+              <a:t>+0.066</a:t>
             </a:r>
           </a:p>
         </p:txBody>
@@ -14142,7 +14177,7 @@
                   <a:srgbClr val="FF6B6B"/>
                 </a:solidFill>
               </a:rPr>
-              <a:t>−0.677</a:t>
+              <a:t>−0.547</a:t>
             </a:r>
           </a:p>
         </p:txBody>
@@ -14176,7 +14211,7 @@
                   <a:srgbClr val="CCD6E8"/>
                 </a:solidFill>
               </a:rPr>
-              <a:t>−0.002</a:t>
+              <a:t>−0.033</a:t>
             </a:r>
           </a:p>
         </p:txBody>
@@ -14207,10 +14242,10 @@
             <a:r>
               <a:rPr sz="1200" b="1" i="0">
                 <a:solidFill>
-                  <a:srgbClr val="56D3A0"/>
-                </a:solidFill>
-              </a:rPr>
-              <a:t>+0.063</a:t>
+                  <a:srgbClr val="FF6B6B"/>
+                </a:solidFill>
+              </a:rPr>
+              <a:t>−0.016</a:t>
             </a:r>
           </a:p>
         </p:txBody>
@@ -14244,7 +14279,7 @@
                   <a:srgbClr val="56D3A0"/>
                 </a:solidFill>
               </a:rPr>
-              <a:t>+0.072</a:t>
+              <a:t>+0.037</a:t>
             </a:r>
           </a:p>
         </p:txBody>
@@ -14355,7 +14390,7 @@
                   <a:srgbClr val="CCD6E8"/>
                 </a:solidFill>
               </a:rPr>
-              <a:t>−0.260</a:t>
+              <a:t>−0.252</a:t>
             </a:r>
           </a:p>
         </p:txBody>
@@ -14389,7 +14424,7 @@
                   <a:srgbClr val="CCD6E8"/>
                 </a:solidFill>
               </a:rPr>
-              <a:t>+0.266</a:t>
+              <a:t>+0.010</a:t>
             </a:r>
           </a:p>
         </p:txBody>
@@ -14423,7 +14458,7 @@
                   <a:srgbClr val="56D3A0"/>
                 </a:solidFill>
               </a:rPr>
-              <a:t>+0.277</a:t>
+              <a:t>+0.271</a:t>
             </a:r>
           </a:p>
         </p:txBody>
@@ -14457,7 +14492,7 @@
                   <a:srgbClr val="56D3A0"/>
                 </a:solidFill>
               </a:rPr>
-              <a:t>+0.283</a:t>
+              <a:t>+0.276</a:t>
             </a:r>
           </a:p>
         </p:txBody>
@@ -14568,7 +14603,7 @@
                   <a:srgbClr val="CCD6E8"/>
                 </a:solidFill>
               </a:rPr>
-              <a:t>−0.107</a:t>
+              <a:t>−0.101</a:t>
             </a:r>
           </a:p>
         </p:txBody>
@@ -14602,7 +14637,7 @@
                   <a:srgbClr val="CCD6E8"/>
                 </a:solidFill>
               </a:rPr>
-              <a:t>+0.191</a:t>
+              <a:t>+0.209</a:t>
             </a:r>
           </a:p>
         </p:txBody>
@@ -14636,7 +14671,7 @@
                   <a:srgbClr val="56D3A0"/>
                 </a:solidFill>
               </a:rPr>
-              <a:t>+0.277</a:t>
+              <a:t>+0.237</a:t>
             </a:r>
           </a:p>
         </p:txBody>
@@ -14781,7 +14816,7 @@
                   <a:srgbClr val="CCD6E8"/>
                 </a:solidFill>
               </a:rPr>
-              <a:t>−0.181</a:t>
+              <a:t>−0.261</a:t>
             </a:r>
           </a:p>
         </p:txBody>
@@ -14815,7 +14850,7 @@
                   <a:srgbClr val="CCD6E8"/>
                 </a:solidFill>
               </a:rPr>
-              <a:t>+0.140</a:t>
+              <a:t>+0.120</a:t>
             </a:r>
           </a:p>
         </p:txBody>
@@ -14849,7 +14884,7 @@
                   <a:srgbClr val="56D3A0"/>
                 </a:solidFill>
               </a:rPr>
-              <a:t>+0.144</a:t>
+              <a:t>+0.031</a:t>
             </a:r>
           </a:p>
         </p:txBody>
@@ -14883,7 +14918,7 @@
                   <a:srgbClr val="56D3A0"/>
                 </a:solidFill>
               </a:rPr>
-              <a:t>+0.145</a:t>
+              <a:t>+0.149</a:t>
             </a:r>
           </a:p>
         </p:txBody>
@@ -14960,7 +14995,7 @@
                   <a:srgbClr val="56D3A0"/>
                 </a:solidFill>
               </a:rPr>
-              <a:t>Greedy beats -O3 on all 6 functions  ·  mean +15.5%</a:t>
+              <a:t>Greedy: 5/6 beat -O3 · mean +10.4% · sample-best all 6</a:t>
             </a:r>
           </a:p>
         </p:txBody>
@@ -15106,42 +15141,51 @@
                   <a:srgbClr val="FFFFFF"/>
                 </a:solidFill>
               </a:rPr>
-              <a:t>Benchmarking Harness Rigor</a:t>
-            </a:r>
-          </a:p>
-        </p:txBody>
-      </p:sp>
-      <p:sp>
-        <p:nvSpPr>
-          <p:cNvPr id="5" name="TextBox 4"/>
-          <p:cNvSpPr txBox="1"/>
-          <p:nvPr/>
-        </p:nvSpPr>
-        <p:spPr>
-          <a:xfrm>
-            <a:off x="411480" y="1143000"/>
-            <a:ext cx="5394960" cy="365760"/>
-          </a:xfrm>
-          <a:prstGeom prst="rect">
-            <a:avLst/>
-          </a:prstGeom>
-          <a:noFill/>
-        </p:spPr>
-        <p:txBody>
-          <a:bodyPr wrap="none">
-            <a:spAutoFit/>
-          </a:bodyPr>
-          <a:lstStyle/>
-          <a:p>
-            <a:pPr algn="l"/>
-            <a:r>
-              <a:rPr sz="1700" b="1" i="0">
-                <a:solidFill>
-                  <a:srgbClr val="4A9EFF"/>
-                </a:solidFill>
-              </a:rPr>
-              <a:t>Benchmarking Harness</a:t>
-            </a:r>
+              <a:t>Training Results — GRU Episode &amp; Weighted Returns</a:t>
+            </a:r>
+          </a:p>
+        </p:txBody>
+      </p:sp>
+      <p:sp>
+        <p:nvSpPr>
+          <p:cNvPr id="5" name="Rectangle 4"/>
+          <p:cNvSpPr/>
+          <p:nvPr/>
+        </p:nvSpPr>
+        <p:spPr>
+          <a:xfrm>
+            <a:off x="274320" y="1097280"/>
+            <a:ext cx="5577840" cy="365760"/>
+          </a:xfrm>
+          <a:prstGeom prst="rect">
+            <a:avLst/>
+          </a:prstGeom>
+          <a:solidFill>
+            <a:srgbClr val="56D3A0"/>
+          </a:solidFill>
+          <a:ln>
+            <a:noFill/>
+          </a:ln>
+        </p:spPr>
+        <p:style>
+          <a:lnRef idx="1">
+            <a:schemeClr val="accent1"/>
+          </a:lnRef>
+          <a:fillRef idx="3">
+            <a:schemeClr val="accent1"/>
+          </a:fillRef>
+          <a:effectRef idx="2">
+            <a:schemeClr val="accent1"/>
+          </a:effectRef>
+          <a:fontRef idx="minor">
+            <a:schemeClr val="lt1"/>
+          </a:fontRef>
+        </p:style>
+        <p:txBody>
+          <a:bodyPr rtlCol="0" anchor="ctr"/>
+          <a:lstStyle/>
+          <a:p>
+            <a:pPr algn="ctr"/>
           </a:p>
         </p:txBody>
       </p:sp>
@@ -15153,8 +15197,66 @@
         </p:nvSpPr>
         <p:spPr>
           <a:xfrm>
-            <a:off x="411480" y="1572768"/>
-            <a:ext cx="5394960" cy="2103120"/>
+            <a:off x="310896" y="1133856"/>
+            <a:ext cx="5504688" cy="274320"/>
+          </a:xfrm>
+          <a:prstGeom prst="rect">
+            <a:avLst/>
+          </a:prstGeom>
+          <a:noFill/>
+        </p:spPr>
+        <p:txBody>
+          <a:bodyPr wrap="none">
+            <a:spAutoFit/>
+          </a:bodyPr>
+          <a:lstStyle/>
+          <a:p>
+            <a:pPr algn="ctr"/>
+            <a:r>
+              <a:rPr sz="1300" b="1" i="0">
+                <a:solidFill>
+                  <a:srgbClr val="0F172A"/>
+                </a:solidFill>
+              </a:rPr>
+              <a:t>Auto-GRU  +  Episode Return — Training</a:t>
+            </a:r>
+          </a:p>
+        </p:txBody>
+      </p:sp>
+      <p:pic>
+        <p:nvPicPr>
+          <p:cNvPr id="7" name="Picture 6" descr="auto-gru-episode.png"/>
+          <p:cNvPicPr>
+            <a:picLocks noChangeAspect="1"/>
+          </p:cNvPicPr>
+          <p:nvPr/>
+        </p:nvPicPr>
+        <p:blipFill>
+          <a:blip r:embed="rId2"/>
+          <a:stretch>
+            <a:fillRect/>
+          </a:stretch>
+        </p:blipFill>
+        <p:spPr>
+          <a:xfrm>
+            <a:off x="274320" y="1499616"/>
+            <a:ext cx="5577840" cy="3526807"/>
+          </a:xfrm>
+          <a:prstGeom prst="rect">
+            <a:avLst/>
+          </a:prstGeom>
+        </p:spPr>
+      </p:pic>
+      <p:sp>
+        <p:nvSpPr>
+          <p:cNvPr id="8" name="TextBox 7"/>
+          <p:cNvSpPr txBox="1"/>
+          <p:nvPr/>
+        </p:nvSpPr>
+        <p:spPr>
+          <a:xfrm>
+            <a:off x="320040" y="5074920"/>
+            <a:ext cx="5532120" cy="1417320"/>
           </a:xfrm>
           <a:prstGeom prst="rect">
             <a:avLst/>
@@ -15171,7 +15273,7 @@
               </a:spcAft>
             </a:pPr>
             <a:r>
-              <a:rPr sz="1400">
+              <a:rPr sz="1200">
                 <a:solidFill>
                   <a:srgbClr val="CCD6E8"/>
                 </a:solidFill>
@@ -15179,98 +15281,60 @@
               <a:t>▸ </a:t>
             </a:r>
             <a:r>
-              <a:rPr sz="1400" b="0" i="0">
+              <a:rPr sz="1200" b="0" i="0">
+                <a:solidFill>
+                  <a:srgbClr val="CCD6E8"/>
+                </a:solidFill>
+              </a:rPr>
+              <a:t>Mean speedup −</a:t>
+            </a:r>
+            <a:r>
+              <a:rPr sz="1200" b="0" i="0">
                 <a:solidFill>
                   <a:srgbClr val="FFD75E"/>
                 </a:solidFill>
               </a:rPr>
-              <a:t>201</a:t>
-            </a:r>
-            <a:r>
-              <a:rPr sz="1400" b="0" i="0">
-                <a:solidFill>
-                  <a:srgbClr val="CCD6E8"/>
-                </a:solidFill>
-              </a:rPr>
-              <a:t> timed iterations per measurement</a:t>
-            </a:r>
-          </a:p>
-          <a:p>
-            <a:pPr lvl="1">
-              <a:spcAft>
-                <a:spcPts val="300"/>
-              </a:spcAft>
-            </a:pPr>
-            <a:r>
-              <a:rPr sz="1400">
-                <a:solidFill>
-                  <a:srgbClr val="CCD6E8"/>
-                </a:solidFill>
-              </a:rPr>
-              <a:t>  • </a:t>
-            </a:r>
-            <a:r>
-              <a:rPr sz="1400" b="0" i="0">
+              <a:t>0.44</a:t>
+            </a:r>
+            <a:r>
+              <a:rPr sz="1200" b="0" i="0">
+                <a:solidFill>
+                  <a:srgbClr val="CCD6E8"/>
+                </a:solidFill>
+              </a:rPr>
+              <a:t> → </a:t>
+            </a:r>
+            <a:r>
+              <a:rPr sz="1200" b="0" i="0">
                 <a:solidFill>
                   <a:srgbClr val="FFD75E"/>
                 </a:solidFill>
               </a:rPr>
-              <a:t>10%</a:t>
-            </a:r>
-            <a:r>
-              <a:rPr sz="1400" b="0" i="0">
-                <a:solidFill>
-                  <a:srgbClr val="CCD6E8"/>
-                </a:solidFill>
-              </a:rPr>
-              <a:t> trimmed mean — removes </a:t>
-            </a:r>
-            <a:r>
-              <a:rPr sz="1400" b="0" i="0">
+              <a:t>+0.043</a:t>
+            </a:r>
+            <a:r>
+              <a:rPr sz="1200" b="0" i="0">
+                <a:solidFill>
+                  <a:srgbClr val="CCD6E8"/>
+                </a:solidFill>
+              </a:rPr>
+              <a:t>  (EMA </a:t>
+            </a:r>
+            <a:r>
+              <a:rPr sz="1200" b="0" i="0">
                 <a:solidFill>
                   <a:srgbClr val="FFD75E"/>
                 </a:solidFill>
               </a:rPr>
-              <a:t>10</a:t>
-            </a:r>
-            <a:r>
-              <a:rPr sz="1400" b="0" i="0">
-                <a:solidFill>
-                  <a:srgbClr val="CCD6E8"/>
-                </a:solidFill>
-              </a:rPr>
-              <a:t> outliers each tail</a:t>
-            </a:r>
-          </a:p>
-          <a:p>
-            <a:pPr lvl="1">
-              <a:spcAft>
-                <a:spcPts val="300"/>
-              </a:spcAft>
-            </a:pPr>
-            <a:r>
-              <a:rPr sz="1400">
-                <a:solidFill>
-                  <a:srgbClr val="CCD6E8"/>
-                </a:solidFill>
-              </a:rPr>
-              <a:t>  • </a:t>
-            </a:r>
-            <a:r>
-              <a:rPr sz="1400" b="0" i="0">
-                <a:solidFill>
-                  <a:srgbClr val="FFD75E"/>
-                </a:solidFill>
-              </a:rPr>
-              <a:t>5</a:t>
-            </a:r>
-            <a:r>
-              <a:rPr sz="1400" b="0" i="0">
-                <a:solidFill>
-                  <a:srgbClr val="CCD6E8"/>
-                </a:solidFill>
-              </a:rPr>
-              <a:t> warm-up runs before timing begins</a:t>
+              <a:t>+0.031</a:t>
+            </a:r>
+            <a:r>
+              <a:rPr sz="1200" b="0" i="0">
+                <a:solidFill>
+                  <a:srgbClr val="CCD6E8"/>
+                </a:solidFill>
+              </a:rPr>
+              <a:t>)</a:t>
             </a:r>
           </a:p>
           <a:p>
@@ -15280,7 +15344,7 @@
               </a:spcAft>
             </a:pPr>
             <a:r>
-              <a:rPr sz="1400">
+              <a:rPr sz="1200">
                 <a:solidFill>
                   <a:srgbClr val="CCD6E8"/>
                 </a:solidFill>
@@ -15288,12 +15352,28 @@
               <a:t>▸ </a:t>
             </a:r>
             <a:r>
-              <a:rPr sz="1400" b="0" i="0">
-                <a:solidFill>
-                  <a:srgbClr val="CCD6E8"/>
-                </a:solidFill>
-              </a:rPr>
-              <a:t>CLOCK_MONOTONIC — monotonic wall-clock, nanosecond resolution</a:t>
+              <a:rPr sz="1200" b="0" i="0">
+                <a:solidFill>
+                  <a:srgbClr val="CCD6E8"/>
+                </a:solidFill>
+              </a:rPr>
+              <a:t>EV reaches </a:t>
+            </a:r>
+            <a:r>
+              <a:rPr sz="1200" b="0" i="0">
+                <a:solidFill>
+                  <a:srgbClr val="FFD75E"/>
+                </a:solidFill>
+              </a:rPr>
+              <a:t>0.59</a:t>
+            </a:r>
+            <a:r>
+              <a:rPr sz="1200" b="0" i="0">
+                <a:solidFill>
+                  <a:srgbClr val="CCD6E8"/>
+                </a:solidFill>
+              </a:rPr>
+              <a:t>  (slower than TFX, same qualitative trajectory)</a:t>
             </a:r>
           </a:p>
           <a:p>
@@ -15303,7 +15383,7 @@
               </a:spcAft>
             </a:pPr>
             <a:r>
-              <a:rPr sz="1400">
+              <a:rPr sz="1200">
                 <a:solidFill>
                   <a:srgbClr val="CCD6E8"/>
                 </a:solidFill>
@@ -15311,12 +15391,28 @@
               <a:t>▸ </a:t>
             </a:r>
             <a:r>
-              <a:rPr sz="1400" b="0" i="0">
-                <a:solidFill>
-                  <a:srgbClr val="CCD6E8"/>
-                </a:solidFill>
-              </a:rPr>
-              <a:t>Serial baselines collected once under stable single-threaded conditions</a:t>
+              <a:rPr sz="1200" b="0" i="0">
+                <a:solidFill>
+                  <a:srgbClr val="CCD6E8"/>
+                </a:solidFill>
+              </a:rPr>
+              <a:t>No-op rate ~</a:t>
+            </a:r>
+            <a:r>
+              <a:rPr sz="1200" b="0" i="0">
+                <a:solidFill>
+                  <a:srgbClr val="FFD75E"/>
+                </a:solidFill>
+              </a:rPr>
+              <a:t>31%</a:t>
+            </a:r>
+            <a:r>
+              <a:rPr sz="1200" b="0" i="0">
+                <a:solidFill>
+                  <a:srgbClr val="CCD6E8"/>
+                </a:solidFill>
+              </a:rPr>
+              <a:t> — consistent with episode-return behaviour</a:t>
             </a:r>
           </a:p>
           <a:p>
@@ -15326,7 +15422,7 @@
               </a:spcAft>
             </a:pPr>
             <a:r>
-              <a:rPr sz="1400">
+              <a:rPr sz="1200">
                 <a:solidFill>
                   <a:srgbClr val="CCD6E8"/>
                 </a:solidFill>
@@ -15334,32 +15430,64 @@
               <a:t>▸ </a:t>
             </a:r>
             <a:r>
-              <a:rPr sz="1400" b="0" i="0">
-                <a:solidFill>
-                  <a:srgbClr val="CCD6E8"/>
-                </a:solidFill>
-              </a:rPr>
-              <a:t>Episode collection: parallelised across all CPU cores via Rayon</a:t>
-            </a:r>
-          </a:p>
-        </p:txBody>
-      </p:sp>
-      <p:sp>
-        <p:nvSpPr>
-          <p:cNvPr id="7" name="Rectangle 6"/>
+              <a:rPr sz="1200" b="0" i="0">
+                <a:solidFill>
+                  <a:srgbClr val="CCD6E8"/>
+                </a:solidFill>
+              </a:rPr>
+              <a:t>Greedy eval mean: </a:t>
+            </a:r>
+            <a:r>
+              <a:rPr sz="1200" b="0" i="0">
+                <a:solidFill>
+                  <a:srgbClr val="FFD75E"/>
+                </a:solidFill>
+              </a:rPr>
+              <a:t>+11.4%</a:t>
+            </a:r>
+            <a:r>
+              <a:rPr sz="1200" b="0" i="0">
+                <a:solidFill>
+                  <a:srgbClr val="CCD6E8"/>
+                </a:solidFill>
+              </a:rPr>
+              <a:t> — comparable to Auto-TFX (</a:t>
+            </a:r>
+            <a:r>
+              <a:rPr sz="1200" b="0" i="0">
+                <a:solidFill>
+                  <a:srgbClr val="FFD75E"/>
+                </a:solidFill>
+              </a:rPr>
+              <a:t>+10.4%</a:t>
+            </a:r>
+            <a:r>
+              <a:rPr sz="1200" b="0" i="0">
+                <a:solidFill>
+                  <a:srgbClr val="CCD6E8"/>
+                </a:solidFill>
+              </a:rPr>
+              <a:t>)</a:t>
+            </a:r>
+          </a:p>
+        </p:txBody>
+      </p:sp>
+      <p:sp>
+        <p:nvSpPr>
+          <p:cNvPr id="9" name="Rectangle 8"/>
           <p:cNvSpPr/>
           <p:nvPr/>
         </p:nvSpPr>
         <p:spPr>
           <a:xfrm>
-            <a:off x="411480" y="3749039"/>
-            <a:ext cx="5394960" cy="2423160"/>
+            <a:off x="6126480" y="1097280"/>
+            <a:ext cx="5833872" cy="365760"/>
           </a:xfrm>
           <a:prstGeom prst="rect">
             <a:avLst/>
           </a:prstGeom>
           <a:solidFill>
-            <a:srgbClr val="16243E"/>
+            <a:srgbClr val="FFD75E"/>
           </a:solidFill>
           <a:ln>
             <a:noFill/>
@@ -15389,48 +15517,72 @@
       </p:sp>
       <p:sp>
         <p:nvSpPr>
-          <p:cNvPr id="8" name="TextBox 7"/>
-          <p:cNvSpPr txBox="1"/>
-          <p:nvPr/>
-        </p:nvSpPr>
-        <p:spPr>
-          <a:xfrm>
-            <a:off x="502920" y="3803904"/>
-            <a:ext cx="5212080" cy="329184"/>
-          </a:xfrm>
-          <a:prstGeom prst="rect">
-            <a:avLst/>
-          </a:prstGeom>
-          <a:noFill/>
-        </p:spPr>
-        <p:txBody>
-          <a:bodyPr wrap="none">
-            <a:spAutoFit/>
-          </a:bodyPr>
-          <a:lstStyle/>
-          <a:p>
-            <a:pPr algn="l"/>
-            <a:r>
-              <a:rPr sz="1500" b="1" i="0">
-                <a:solidFill>
-                  <a:srgbClr val="56D3A0"/>
-                </a:solidFill>
-              </a:rPr>
-              <a:t>Parallel Noise Characterisation</a:t>
-            </a:r>
-          </a:p>
-        </p:txBody>
-      </p:sp>
-      <p:sp>
-        <p:nvSpPr>
-          <p:cNvPr id="9" name="TextBox 8"/>
-          <p:cNvSpPr txBox="1"/>
-          <p:nvPr/>
-        </p:nvSpPr>
-        <p:spPr>
-          <a:xfrm>
-            <a:off x="502920" y="4187952"/>
-            <a:ext cx="5212080" cy="1828800"/>
+          <p:cNvPr id="10" name="TextBox 9"/>
+          <p:cNvSpPr txBox="1"/>
+          <p:nvPr/>
+        </p:nvSpPr>
+        <p:spPr>
+          <a:xfrm>
+            <a:off x="6163056" y="1133856"/>
+            <a:ext cx="5760720" cy="274320"/>
+          </a:xfrm>
+          <a:prstGeom prst="rect">
+            <a:avLst/>
+          </a:prstGeom>
+          <a:noFill/>
+        </p:spPr>
+        <p:txBody>
+          <a:bodyPr wrap="none">
+            <a:spAutoFit/>
+          </a:bodyPr>
+          <a:lstStyle/>
+          <a:p>
+            <a:pPr algn="ctr"/>
+            <a:r>
+              <a:rPr sz="1300" b="1" i="0">
+                <a:solidFill>
+                  <a:srgbClr val="0F172A"/>
+                </a:solidFill>
+              </a:rPr>
+              <a:t>Instruction-Weighted Return — Both Architectures</a:t>
+            </a:r>
+          </a:p>
+        </p:txBody>
+      </p:sp>
+      <p:pic>
+        <p:nvPicPr>
+          <p:cNvPr id="11" name="Picture 10" descr="auto-tfx-weighted.png"/>
+          <p:cNvPicPr>
+            <a:picLocks noChangeAspect="1"/>
+          </p:cNvPicPr>
+          <p:nvPr/>
+        </p:nvPicPr>
+        <p:blipFill>
+          <a:blip r:embed="rId3"/>
+          <a:stretch>
+            <a:fillRect/>
+          </a:stretch>
+        </p:blipFill>
+        <p:spPr>
+          <a:xfrm>
+            <a:off x="6126480" y="1499616"/>
+            <a:ext cx="5833872" cy="3688693"/>
+          </a:xfrm>
+          <a:prstGeom prst="rect">
+            <a:avLst/>
+          </a:prstGeom>
+        </p:spPr>
+      </p:pic>
+      <p:sp>
+        <p:nvSpPr>
+          <p:cNvPr id="12" name="TextBox 11"/>
+          <p:cNvSpPr txBox="1"/>
+          <p:nvPr/>
+        </p:nvSpPr>
+        <p:spPr>
+          <a:xfrm>
+            <a:off x="6172200" y="5074920"/>
+            <a:ext cx="5742432" cy="1417320"/>
           </a:xfrm>
           <a:prstGeom prst="rect">
             <a:avLst/>
@@ -15447,7 +15599,7 @@
               </a:spcAft>
             </a:pPr>
             <a:r>
-              <a:rPr sz="1300">
+              <a:rPr sz="1200">
                 <a:solidFill>
                   <a:srgbClr val="CCD6E8"/>
                 </a:solidFill>
@@ -15455,28 +15607,52 @@
               <a:t>▸ </a:t>
             </a:r>
             <a:r>
-              <a:rPr sz="1300" b="0" i="0">
-                <a:solidFill>
-                  <a:srgbClr val="CCD6E8"/>
-                </a:solidFill>
-              </a:rPr>
-              <a:t>bench-noise: run each binary solo then across </a:t>
-            </a:r>
-            <a:r>
-              <a:rPr sz="1300" b="0" i="0">
+              <a:rPr sz="1200" b="0" i="0">
+                <a:solidFill>
+                  <a:srgbClr val="CCD6E8"/>
+                </a:solidFill>
+              </a:rPr>
+              <a:t>TFX weighted: speedup → </a:t>
+            </a:r>
+            <a:r>
+              <a:rPr sz="1200" b="0" i="0">
                 <a:solidFill>
                   <a:srgbClr val="FFD75E"/>
                 </a:solidFill>
               </a:rPr>
-              <a:t>16</a:t>
-            </a:r>
-            <a:r>
-              <a:rPr sz="1300" b="0" i="0">
-                <a:solidFill>
-                  <a:srgbClr val="CCD6E8"/>
-                </a:solidFill>
-              </a:rPr>
-              <a:t> Rayon workers simultaneously</a:t>
+              <a:t>+0.012</a:t>
+            </a:r>
+            <a:r>
+              <a:rPr sz="1200" b="0" i="0">
+                <a:solidFill>
+                  <a:srgbClr val="CCD6E8"/>
+                </a:solidFill>
+              </a:rPr>
+              <a:t> (vs </a:t>
+            </a:r>
+            <a:r>
+              <a:rPr sz="1200" b="0" i="0">
+                <a:solidFill>
+                  <a:srgbClr val="FFD75E"/>
+                </a:solidFill>
+              </a:rPr>
+              <a:t>+0.091</a:t>
+            </a:r>
+            <a:r>
+              <a:rPr sz="1200" b="0" i="0">
+                <a:solidFill>
+                  <a:srgbClr val="CCD6E8"/>
+                </a:solidFill>
+              </a:rPr>
+              <a:t> episode);  EV = </a:t>
+            </a:r>
+            <a:r>
+              <a:rPr sz="1200" b="0" i="0">
+                <a:solidFill>
+                  <a:srgbClr val="FFD75E"/>
+                </a:solidFill>
+              </a:rPr>
+              <a:t>0.87</a:t>
             </a:r>
           </a:p>
           <a:p>
@@ -15486,7 +15662,7 @@
               </a:spcAft>
             </a:pPr>
             <a:r>
-              <a:rPr sz="1300">
+              <a:rPr sz="1200">
                 <a:solidFill>
                   <a:srgbClr val="CCD6E8"/>
                 </a:solidFill>
@@ -15494,28 +15670,52 @@
               <a:t>▸ </a:t>
             </a:r>
             <a:r>
-              <a:rPr sz="1300" b="0" i="0">
-                <a:solidFill>
-                  <a:srgbClr val="CCD6E8"/>
-                </a:solidFill>
-              </a:rPr>
-              <a:t>Parallel overhead: small and consistent across all </a:t>
-            </a:r>
-            <a:r>
-              <a:rPr sz="1300" b="0" i="0">
+              <a:rPr sz="1200" b="0" i="0">
+                <a:solidFill>
+                  <a:srgbClr val="CCD6E8"/>
+                </a:solidFill>
+              </a:rPr>
+              <a:t>GRU weighted: speedup → </a:t>
+            </a:r>
+            <a:r>
+              <a:rPr sz="1200" b="0" i="0">
                 <a:solidFill>
                   <a:srgbClr val="FFD75E"/>
                 </a:solidFill>
               </a:rPr>
-              <a:t>6</a:t>
-            </a:r>
-            <a:r>
-              <a:rPr sz="1300" b="0" i="0">
-                <a:solidFill>
-                  <a:srgbClr val="CCD6E8"/>
-                </a:solidFill>
-              </a:rPr>
-              <a:t> benchmarks</a:t>
+              <a:t>+0.023</a:t>
+            </a:r>
+            <a:r>
+              <a:rPr sz="1200" b="0" i="0">
+                <a:solidFill>
+                  <a:srgbClr val="CCD6E8"/>
+                </a:solidFill>
+              </a:rPr>
+              <a:t> (vs </a:t>
+            </a:r>
+            <a:r>
+              <a:rPr sz="1200" b="0" i="0">
+                <a:solidFill>
+                  <a:srgbClr val="FFD75E"/>
+                </a:solidFill>
+              </a:rPr>
+              <a:t>+0.043</a:t>
+            </a:r>
+            <a:r>
+              <a:rPr sz="1200" b="0" i="0">
+                <a:solidFill>
+                  <a:srgbClr val="CCD6E8"/>
+                </a:solidFill>
+              </a:rPr>
+              <a:t> episode);  EV = </a:t>
+            </a:r>
+            <a:r>
+              <a:rPr sz="1200" b="0" i="0">
+                <a:solidFill>
+                  <a:srgbClr val="FFD75E"/>
+                </a:solidFill>
+              </a:rPr>
+              <a:t>0.86</a:t>
             </a:r>
           </a:p>
           <a:p>
@@ -15525,7 +15725,7 @@
               </a:spcAft>
             </a:pPr>
             <a:r>
-              <a:rPr sz="1300">
+              <a:rPr sz="1200">
                 <a:solidFill>
                   <a:srgbClr val="CCD6E8"/>
                 </a:solidFill>
@@ -15533,83 +15733,12 @@
               <a:t>▸ </a:t>
             </a:r>
             <a:r>
-              <a:rPr sz="1300" b="0" i="0">
-                <a:solidFill>
-                  <a:srgbClr val="CCD6E8"/>
-                </a:solidFill>
-              </a:rPr>
-              <a:t>Noise margin </a:t>
-            </a:r>
-            <a:r>
-              <a:rPr sz="1300" b="0" i="0">
-                <a:solidFill>
-                  <a:srgbClr val="FFD75E"/>
-                </a:solidFill>
-              </a:rPr>
-              <a:t>1.01</a:t>
-            </a:r>
-            <a:r>
-              <a:rPr sz="1300" b="0" i="0">
-                <a:solidFill>
-                  <a:srgbClr val="CCD6E8"/>
-                </a:solidFill>
-              </a:rPr>
-              <a:t> on -O</a:t>
-            </a:r>
-            <a:r>
-              <a:rPr sz="1300" b="0" i="0">
-                <a:solidFill>
-                  <a:srgbClr val="FFD75E"/>
-                </a:solidFill>
-              </a:rPr>
-              <a:t>3</a:t>
-            </a:r>
-            <a:r>
-              <a:rPr sz="1300" b="0" i="0">
-                <a:solidFill>
-                  <a:srgbClr val="CCD6E8"/>
-                </a:solidFill>
-              </a:rPr>
-              <a:t> baseline during training:</a:t>
-            </a:r>
-          </a:p>
-          <a:p>
-            <a:pPr lvl="1">
-              <a:spcAft>
-                <a:spcPts val="300"/>
-              </a:spcAft>
-            </a:pPr>
-            <a:r>
-              <a:rPr sz="1300">
-                <a:solidFill>
-                  <a:srgbClr val="CCD6E8"/>
-                </a:solidFill>
-              </a:rPr>
-              <a:t>  • </a:t>
-            </a:r>
-            <a:r>
-              <a:rPr sz="1300" b="0" i="0">
-                <a:solidFill>
-                  <a:srgbClr val="CCD6E8"/>
-                </a:solidFill>
-              </a:rPr>
-              <a:t>Policy must beat -O</a:t>
-            </a:r>
-            <a:r>
-              <a:rPr sz="1300" b="0" i="0">
-                <a:solidFill>
-                  <a:srgbClr val="FFD75E"/>
-                </a:solidFill>
-              </a:rPr>
-              <a:t>3</a:t>
-            </a:r>
-            <a:r>
-              <a:rPr sz="1300" b="0" i="0">
-                <a:solidFill>
-                  <a:srgbClr val="CCD6E8"/>
-                </a:solidFill>
-              </a:rPr>
-              <a:t> by &gt; noise floor to receive positive reward</a:t>
+              <a:rPr sz="1200" b="0" i="0">
+                <a:solidFill>
+                  <a:srgbClr val="CCD6E8"/>
+                </a:solidFill>
+              </a:rPr>
+              <a:t>Higher EV but lower speedup — proxy misalignment (IR ≠ runtime)</a:t>
             </a:r>
           </a:p>
           <a:p>
@@ -15619,7 +15748,7 @@
               </a:spcAft>
             </a:pPr>
             <a:r>
-              <a:rPr sz="1300">
+              <a:rPr sz="1200">
                 <a:solidFill>
                   <a:srgbClr val="CCD6E8"/>
                 </a:solidFill>
@@ -15627,315 +15756,44 @@
               <a:t>▸ </a:t>
             </a:r>
             <a:r>
-              <a:rPr sz="1300" b="0" i="0">
-                <a:solidFill>
-                  <a:srgbClr val="CCD6E8"/>
-                </a:solidFill>
-              </a:rPr>
-              <a:t>Prevents noise-driven false positives in the reward signal</a:t>
-            </a:r>
-          </a:p>
-        </p:txBody>
-      </p:sp>
-      <p:sp>
-        <p:nvSpPr>
-          <p:cNvPr id="10" name="TextBox 9"/>
-          <p:cNvSpPr txBox="1"/>
-          <p:nvPr/>
-        </p:nvSpPr>
-        <p:spPr>
-          <a:xfrm>
-            <a:off x="6126480" y="1143000"/>
-            <a:ext cx="5669280" cy="365760"/>
-          </a:xfrm>
-          <a:prstGeom prst="rect">
-            <a:avLst/>
-          </a:prstGeom>
-          <a:noFill/>
-        </p:spPr>
-        <p:txBody>
-          <a:bodyPr wrap="none">
-            <a:spAutoFit/>
-          </a:bodyPr>
-          <a:lstStyle/>
-          <a:p>
-            <a:pPr algn="l"/>
-            <a:r>
-              <a:rPr sz="1700" b="1" i="0">
-                <a:solidFill>
-                  <a:srgbClr val="4A9EFF"/>
-                </a:solidFill>
-              </a:rPr>
-              <a:t>Reproducibility Verification  (diagnose)</a:t>
-            </a:r>
-          </a:p>
-        </p:txBody>
-      </p:sp>
-      <p:sp>
-        <p:nvSpPr>
-          <p:cNvPr id="11" name="TextBox 10"/>
-          <p:cNvSpPr txBox="1"/>
-          <p:nvPr/>
-        </p:nvSpPr>
-        <p:spPr>
-          <a:xfrm>
-            <a:off x="6126480" y="1572768"/>
-            <a:ext cx="5669280" cy="2606040"/>
-          </a:xfrm>
-          <a:prstGeom prst="rect">
-            <a:avLst/>
-          </a:prstGeom>
-          <a:noFill/>
-        </p:spPr>
-        <p:txBody>
-          <a:bodyPr wrap="none"/>
-          <a:lstStyle/>
-          <a:p>
-            <a:pPr>
-              <a:spcAft>
-                <a:spcPts val="300"/>
-              </a:spcAft>
-            </a:pPr>
-            <a:r>
-              <a:rPr sz="1400">
-                <a:solidFill>
-                  <a:srgbClr val="CCD6E8"/>
-                </a:solidFill>
-              </a:rPr>
-              <a:t>▸ </a:t>
-            </a:r>
-            <a:r>
-              <a:rPr sz="1400" b="0" i="0">
-                <a:solidFill>
-                  <a:srgbClr val="CCD6E8"/>
-                </a:solidFill>
-              </a:rPr>
-              <a:t>Problem: training speedups collected under parallel timing noise</a:t>
-            </a:r>
-          </a:p>
-          <a:p>
-            <a:pPr>
-              <a:spcAft>
-                <a:spcPts val="300"/>
-              </a:spcAft>
-            </a:pPr>
-            <a:r>
-              <a:rPr sz="1400">
-                <a:solidFill>
-                  <a:srgbClr val="CCD6E8"/>
-                </a:solidFill>
-              </a:rPr>
-              <a:t>▸ </a:t>
-            </a:r>
-            <a:r>
-              <a:rPr sz="1400" b="0" i="0">
-                <a:solidFill>
-                  <a:srgbClr val="CCD6E8"/>
-                </a:solidFill>
-              </a:rPr>
-              <a:t>diagnose re-benchmarks top sequences serially under controlled conditions</a:t>
-            </a:r>
-          </a:p>
-          <a:p>
-            <a:pPr lvl="1">
-              <a:spcAft>
-                <a:spcPts val="300"/>
-              </a:spcAft>
-            </a:pPr>
-            <a:r>
-              <a:rPr sz="1400">
-                <a:solidFill>
-                  <a:srgbClr val="CCD6E8"/>
-                </a:solidFill>
-              </a:rPr>
-              <a:t>  • </a:t>
-            </a:r>
-            <a:r>
-              <a:rPr sz="1400" b="0" i="0">
+              <a:rPr sz="1200" b="0" i="0">
+                <a:solidFill>
+                  <a:srgbClr val="CCD6E8"/>
+                </a:solidFill>
+              </a:rPr>
+              <a:t>No-op rate ~</a:t>
+            </a:r>
+            <a:r>
+              <a:rPr sz="1200" b="0" i="0">
                 <a:solidFill>
                   <a:srgbClr val="FFD75E"/>
                 </a:solidFill>
               </a:rPr>
-              <a:t>20</a:t>
-            </a:r>
-            <a:r>
-              <a:rPr sz="1400" b="0" i="0">
-                <a:solidFill>
-                  <a:srgbClr val="CCD6E8"/>
-                </a:solidFill>
-              </a:rPr>
-              <a:t> independent serial benchmark runs per sequence</a:t>
-            </a:r>
-          </a:p>
-          <a:p>
-            <a:pPr lvl="1">
-              <a:spcAft>
-                <a:spcPts val="300"/>
-              </a:spcAft>
-            </a:pPr>
-            <a:r>
-              <a:rPr sz="1400">
-                <a:solidFill>
-                  <a:srgbClr val="CCD6E8"/>
-                </a:solidFill>
-              </a:rPr>
-              <a:t>  • </a:t>
-            </a:r>
-            <a:r>
-              <a:rPr sz="1400" b="0" i="0">
-                <a:solidFill>
-                  <a:srgbClr val="CCD6E8"/>
-                </a:solidFill>
-              </a:rPr>
-              <a:t>Reports mean, std, and full distribution</a:t>
-            </a:r>
-          </a:p>
-          <a:p>
-            <a:pPr>
-              <a:spcAft>
-                <a:spcPts val="300"/>
-              </a:spcAft>
-            </a:pPr>
-            <a:r>
-              <a:rPr sz="1400">
-                <a:solidFill>
-                  <a:srgbClr val="CCD6E8"/>
-                </a:solidFill>
-              </a:rPr>
-              <a:t>▸ </a:t>
-            </a:r>
-            <a:r>
-              <a:rPr sz="1400" b="0" i="0">
-                <a:solidFill>
-                  <a:srgbClr val="CCD6E8"/>
-                </a:solidFill>
-              </a:rPr>
-              <a:t>Result: cached training speedups correlate strongly with re-measured values</a:t>
-            </a:r>
-          </a:p>
-          <a:p>
-            <a:pPr>
-              <a:spcAft>
-                <a:spcPts val="300"/>
-              </a:spcAft>
-            </a:pPr>
-            <a:r>
-              <a:rPr sz="1400">
-                <a:solidFill>
-                  <a:srgbClr val="CCD6E8"/>
-                </a:solidFill>
-              </a:rPr>
-              <a:t>▸ </a:t>
-            </a:r>
-            <a:r>
-              <a:rPr sz="1400" b="0" i="0">
-                <a:solidFill>
-                  <a:srgbClr val="CCD6E8"/>
-                </a:solidFill>
-              </a:rPr>
-              <a:t>Per-sequence distributions are tight → reward signal is reproducible</a:t>
-            </a:r>
-          </a:p>
-          <a:p>
-            <a:pPr>
-              <a:spcAft>
-                <a:spcPts val="300"/>
-              </a:spcAft>
-            </a:pPr>
-            <a:r>
-              <a:rPr sz="1400">
-                <a:solidFill>
-                  <a:srgbClr val="CCD6E8"/>
-                </a:solidFill>
-              </a:rPr>
-              <a:t>▸ </a:t>
-            </a:r>
-            <a:r>
-              <a:rPr sz="1400" b="0" i="0">
-                <a:solidFill>
-                  <a:srgbClr val="CCD6E8"/>
-                </a:solidFill>
-              </a:rPr>
-              <a:t>Dominant sequences from interpreter and kmp_search — consistent with EDA ceiling</a:t>
-            </a:r>
-          </a:p>
-        </p:txBody>
-      </p:sp>
-      <p:sp>
-        <p:nvSpPr>
-          <p:cNvPr id="12" name="Rectangle 11"/>
-          <p:cNvSpPr/>
-          <p:nvPr/>
-        </p:nvSpPr>
-        <p:spPr>
-          <a:xfrm>
-            <a:off x="6126480" y="4315968"/>
-            <a:ext cx="5669280" cy="2331720"/>
-          </a:xfrm>
-          <a:prstGeom prst="rect">
-            <a:avLst/>
-          </a:prstGeom>
-          <a:solidFill>
-            <a:srgbClr val="0A101C"/>
-          </a:solidFill>
-          <a:ln>
-            <a:noFill/>
-          </a:ln>
-        </p:spPr>
-        <p:style>
-          <a:lnRef idx="1">
-            <a:schemeClr val="accent1"/>
-          </a:lnRef>
-          <a:fillRef idx="3">
-            <a:schemeClr val="accent1"/>
-          </a:fillRef>
-          <a:effectRef idx="2">
-            <a:schemeClr val="accent1"/>
-          </a:effectRef>
-          <a:fontRef idx="minor">
-            <a:schemeClr val="lt1"/>
-          </a:fontRef>
-        </p:style>
-        <p:txBody>
-          <a:bodyPr rtlCol="0" anchor="ctr"/>
-          <a:lstStyle/>
-          <a:p>
-            <a:pPr algn="ctr"/>
-          </a:p>
-        </p:txBody>
-      </p:sp>
-      <p:sp>
-        <p:nvSpPr>
-          <p:cNvPr id="13" name="TextBox 12"/>
-          <p:cNvSpPr txBox="1"/>
-          <p:nvPr/>
-        </p:nvSpPr>
-        <p:spPr>
-          <a:xfrm>
-            <a:off x="6126480" y="5074920"/>
-            <a:ext cx="5669280" cy="731520"/>
-          </a:xfrm>
-          <a:prstGeom prst="rect">
-            <a:avLst/>
-          </a:prstGeom>
-          <a:noFill/>
-        </p:spPr>
-        <p:txBody>
-          <a:bodyPr wrap="none">
-            <a:spAutoFit/>
-          </a:bodyPr>
-          <a:lstStyle/>
-          <a:p>
-            <a:pPr algn="ctr"/>
-            <a:r>
-              <a:rPr sz="1200" b="0" i="1">
-                <a:solidFill>
-                  <a:srgbClr val="555577"/>
-                </a:solidFill>
-              </a:rPr>
-              <a:t>bench_noise-{fft,kmp}.png · diagnose.png
-[cargo run -- bench-noise  /  cargo run -- plot-diagnose
- --results checkpoints/auto-tfx-episode-diagnose.json]</a:t>
+              <a:t>40</a:t>
+            </a:r>
+            <a:r>
+              <a:rPr sz="1200" b="0" i="0">
+                <a:solidFill>
+                  <a:srgbClr val="CCD6E8"/>
+                </a:solidFill>
+              </a:rPr>
+              <a:t>–</a:t>
+            </a:r>
+            <a:r>
+              <a:rPr sz="1200" b="0" i="0">
+                <a:solidFill>
+                  <a:srgbClr val="FFD75E"/>
+                </a:solidFill>
+              </a:rPr>
+              <a:t>41%</a:t>
+            </a:r>
+            <a:r>
+              <a:rPr sz="1200" b="0" i="0">
+                <a:solidFill>
+                  <a:srgbClr val="CCD6E8"/>
+                </a:solidFill>
+              </a:rPr>
+              <a:t> — elevated vs episode runs</a:t>
             </a:r>
           </a:p>
         </p:txBody>
@@ -16081,374 +15939,243 @@
                   <a:srgbClr val="FFFFFF"/>
                 </a:solidFill>
               </a:rPr>
-              <a:t>Discussion</a:t>
-            </a:r>
-          </a:p>
-        </p:txBody>
-      </p:sp>
-      <p:sp>
-        <p:nvSpPr>
-          <p:cNvPr id="5" name="TextBox 4"/>
-          <p:cNvSpPr txBox="1"/>
-          <p:nvPr/>
-        </p:nvSpPr>
-        <p:spPr>
-          <a:xfrm>
-            <a:off x="411480" y="1143000"/>
-            <a:ext cx="5394960" cy="5303520"/>
-          </a:xfrm>
-          <a:prstGeom prst="rect">
-            <a:avLst/>
-          </a:prstGeom>
-          <a:noFill/>
-        </p:spPr>
-        <p:txBody>
-          <a:bodyPr wrap="none"/>
-          <a:lstStyle/>
-          <a:p>
-            <a:pPr>
-              <a:spcAft>
-                <a:spcPts val="300"/>
-              </a:spcAft>
-            </a:pPr>
-            <a:r>
-              <a:rPr sz="1500">
-                <a:solidFill>
-                  <a:srgbClr val="CCD6E8"/>
-                </a:solidFill>
-              </a:rPr>
-              <a:t>▸ </a:t>
-            </a:r>
-            <a:r>
-              <a:rPr sz="1500" b="0" i="0">
-                <a:solidFill>
-                  <a:srgbClr val="CCD6E8"/>
-                </a:solidFill>
-              </a:rPr>
-              <a:t>Value head (EV ≈ </a:t>
-            </a:r>
-            <a:r>
-              <a:rPr sz="1500" b="0" i="0">
-                <a:solidFill>
-                  <a:srgbClr val="FFD75E"/>
-                </a:solidFill>
-              </a:rPr>
-              <a:t>1</a:t>
-            </a:r>
-            <a:r>
-              <a:rPr sz="1500" b="0" i="0">
-                <a:solidFill>
-                  <a:srgbClr val="CCD6E8"/>
-                </a:solidFill>
-              </a:rPr>
-              <a:t>) validates feature representation</a:t>
-            </a:r>
-          </a:p>
-          <a:p>
-            <a:pPr lvl="1">
-              <a:spcAft>
-                <a:spcPts val="300"/>
-              </a:spcAft>
-            </a:pPr>
-            <a:r>
-              <a:rPr sz="1500">
-                <a:solidFill>
-                  <a:srgbClr val="CCD6E8"/>
-                </a:solidFill>
-              </a:rPr>
-              <a:t>  • </a:t>
-            </a:r>
-            <a:r>
-              <a:rPr sz="1500" b="0" i="0">
-                <a:solidFill>
-                  <a:srgbClr val="FFD75E"/>
-                </a:solidFill>
-              </a:rPr>
-              <a:t>48</a:t>
-            </a:r>
-            <a:r>
-              <a:rPr sz="1500" b="0" i="0">
-                <a:solidFill>
-                  <a:srgbClr val="CCD6E8"/>
-                </a:solidFill>
-              </a:rPr>
-              <a:t>-dim delta features + action history sufficient to predict speedup</a:t>
-            </a:r>
-          </a:p>
-          <a:p>
-            <a:pPr lvl="1">
-              <a:spcAft>
-                <a:spcPts val="300"/>
-              </a:spcAft>
-            </a:pPr>
-            <a:r>
-              <a:rPr sz="1500">
-                <a:solidFill>
-                  <a:srgbClr val="CCD6E8"/>
-                </a:solidFill>
-              </a:rPr>
-              <a:t>  • </a:t>
-            </a:r>
-            <a:r>
-              <a:rPr sz="1500" b="0" i="0">
-                <a:solidFill>
-                  <a:srgbClr val="CCD6E8"/>
-                </a:solidFill>
-              </a:rPr>
-              <a:t>Batch-normalised advantages → ~</a:t>
-            </a:r>
-            <a:r>
-              <a:rPr sz="1500" b="0" i="0">
-                <a:solidFill>
-                  <a:srgbClr val="FFD75E"/>
-                </a:solidFill>
-              </a:rPr>
-              <a:t>50%</a:t>
-            </a:r>
-            <a:r>
-              <a:rPr sz="1500" b="0" i="0">
-                <a:solidFill>
-                  <a:srgbClr val="CCD6E8"/>
-                </a:solidFill>
-              </a:rPr>
-              <a:t> reinforce / ~</a:t>
-            </a:r>
-            <a:r>
-              <a:rPr sz="1500" b="0" i="0">
-                <a:solidFill>
-                  <a:srgbClr val="FFD75E"/>
-                </a:solidFill>
-              </a:rPr>
-              <a:t>50%</a:t>
-            </a:r>
-            <a:r>
-              <a:rPr sz="1500" b="0" i="0">
-                <a:solidFill>
-                  <a:srgbClr val="CCD6E8"/>
-                </a:solidFill>
-              </a:rPr>
-              <a:t> penalise</a:t>
-            </a:r>
-          </a:p>
-          <a:p>
-            <a:pPr>
-              <a:spcAft>
-                <a:spcPts val="300"/>
-              </a:spcAft>
-            </a:pPr>
-            <a:r>
-              <a:rPr sz="1500">
-                <a:solidFill>
-                  <a:srgbClr val="CCD6E8"/>
-                </a:solidFill>
-              </a:rPr>
-              <a:t>▸ </a:t>
-            </a:r>
-            <a:r>
-              <a:rPr sz="1500" b="0" i="0">
-                <a:solidFill>
-                  <a:srgbClr val="CCD6E8"/>
-                </a:solidFill>
-              </a:rPr>
-              <a:t>Episode return is theoretically clean:</a:t>
-            </a:r>
-          </a:p>
-          <a:p>
-            <a:pPr lvl="1">
-              <a:spcAft>
-                <a:spcPts val="300"/>
-              </a:spcAft>
-            </a:pPr>
-            <a:r>
-              <a:rPr sz="1500">
-                <a:solidFill>
-                  <a:srgbClr val="CCD6E8"/>
-                </a:solidFill>
-              </a:rPr>
-              <a:t>  • </a:t>
-            </a:r>
-            <a:r>
-              <a:rPr sz="1500" b="0" i="0">
-                <a:solidFill>
-                  <a:srgbClr val="CCD6E8"/>
-                </a:solidFill>
-              </a:rPr>
-              <a:t>Only externally measured quantity is r; uniform is unbiased</a:t>
-            </a:r>
-          </a:p>
-          <a:p>
-            <a:pPr lvl="1">
-              <a:spcAft>
-                <a:spcPts val="300"/>
-              </a:spcAft>
-            </a:pPr>
-            <a:r>
-              <a:rPr sz="1500">
-                <a:solidFill>
-                  <a:srgbClr val="CCD6E8"/>
-                </a:solidFill>
-              </a:rPr>
-              <a:t>  • </a:t>
-            </a:r>
-            <a:r>
-              <a:rPr sz="1500" b="0" i="0">
-                <a:solidFill>
-                  <a:srgbClr val="CCD6E8"/>
-                </a:solidFill>
-              </a:rPr>
-              <a:t>Value function disentangles per-step credit</a:t>
-            </a:r>
-          </a:p>
-          <a:p>
-            <a:pPr>
-              <a:spcAft>
-                <a:spcPts val="300"/>
-              </a:spcAft>
-            </a:pPr>
-            <a:r>
-              <a:rPr sz="1500">
-                <a:solidFill>
-                  <a:srgbClr val="CCD6E8"/>
-                </a:solidFill>
-              </a:rPr>
-              <a:t>▸ </a:t>
-            </a:r>
-            <a:r>
-              <a:rPr sz="1500" b="0" i="0">
-                <a:solidFill>
-                  <a:srgbClr val="CCD6E8"/>
-                </a:solidFill>
-              </a:rPr>
-              <a:t>Instruction-weighted shaping trades bias for lower variance</a:t>
-            </a:r>
-          </a:p>
-          <a:p>
-            <a:pPr lvl="1">
-              <a:spcAft>
-                <a:spcPts val="300"/>
-              </a:spcAft>
-            </a:pPr>
-            <a:r>
-              <a:rPr sz="1500">
-                <a:solidFill>
-                  <a:srgbClr val="CCD6E8"/>
-                </a:solidFill>
-              </a:rPr>
-              <a:t>  • </a:t>
-            </a:r>
-            <a:r>
-              <a:rPr sz="1500" b="0" i="0">
-                <a:solidFill>
-                  <a:srgbClr val="CCD6E8"/>
-                </a:solidFill>
-              </a:rPr>
-              <a:t>Total reward conserved; only redistribution changes</a:t>
-            </a:r>
-          </a:p>
-          <a:p>
-            <a:pPr lvl="1">
-              <a:spcAft>
-                <a:spcPts val="300"/>
-              </a:spcAft>
-            </a:pPr>
-            <a:r>
-              <a:rPr sz="1500">
-                <a:solidFill>
-                  <a:srgbClr val="CCD6E8"/>
-                </a:solidFill>
-              </a:rPr>
-              <a:t>  • </a:t>
-            </a:r>
-            <a:r>
-              <a:rPr sz="1500" b="0" i="0">
-                <a:solidFill>
-                  <a:srgbClr val="CCD6E8"/>
-                </a:solidFill>
-              </a:rPr>
-              <a:t>Helps value head early when policy makes many no-ops</a:t>
-            </a:r>
-          </a:p>
-          <a:p>
-            <a:pPr>
-              <a:spcAft>
-                <a:spcPts val="300"/>
-              </a:spcAft>
-            </a:pPr>
-            <a:r>
-              <a:rPr sz="1500">
-                <a:solidFill>
-                  <a:srgbClr val="CCD6E8"/>
-                </a:solidFill>
-              </a:rPr>
-              <a:t>▸ </a:t>
-            </a:r>
-            <a:r>
-              <a:rPr sz="1500" b="0" i="0">
-                <a:solidFill>
-                  <a:srgbClr val="CCD6E8"/>
-                </a:solidFill>
-              </a:rPr>
-              <a:t>Transformer vs GRU: complementary memory hypotheses</a:t>
-            </a:r>
-          </a:p>
-          <a:p>
-            <a:pPr lvl="1">
-              <a:spcAft>
-                <a:spcPts val="300"/>
-              </a:spcAft>
-            </a:pPr>
-            <a:r>
-              <a:rPr sz="1500">
-                <a:solidFill>
-                  <a:srgbClr val="CCD6E8"/>
-                </a:solidFill>
-              </a:rPr>
-              <a:t>  • </a:t>
-            </a:r>
-            <a:r>
-              <a:rPr sz="1500" b="0" i="0">
-                <a:solidFill>
-                  <a:srgbClr val="CCD6E8"/>
-                </a:solidFill>
-              </a:rPr>
-              <a:t>GRU: recency bias — free inductive prior, low parameter cost</a:t>
-            </a:r>
-          </a:p>
-          <a:p>
-            <a:pPr lvl="1">
-              <a:spcAft>
-                <a:spcPts val="300"/>
-              </a:spcAft>
-            </a:pPr>
-            <a:r>
-              <a:rPr sz="1500">
-                <a:solidFill>
-                  <a:srgbClr val="CCD6E8"/>
-                </a:solidFill>
-              </a:rPr>
-              <a:t>  • </a:t>
-            </a:r>
-            <a:r>
-              <a:rPr sz="1500" b="0" i="0">
-                <a:solidFill>
-                  <a:srgbClr val="CCD6E8"/>
-                </a:solidFill>
-              </a:rPr>
-              <a:t>TFX: non-local attention — learns which step-pairs matter</a:t>
-            </a:r>
-          </a:p>
-        </p:txBody>
-      </p:sp>
-      <p:sp>
-        <p:nvSpPr>
-          <p:cNvPr id="6" name="Rectangle 5"/>
+              <a:t>Weighted Evaluation &amp; IR-Reduction Correlation</a:t>
+            </a:r>
+          </a:p>
+        </p:txBody>
+      </p:sp>
+      <p:sp>
+        <p:nvSpPr>
+          <p:cNvPr id="5" name="Rectangle 4"/>
           <p:cNvSpPr/>
           <p:nvPr/>
         </p:nvSpPr>
         <p:spPr>
           <a:xfrm>
-            <a:off x="5943600" y="1143000"/>
-            <a:ext cx="5897880" cy="5303520"/>
+            <a:off x="274320" y="1097280"/>
+            <a:ext cx="3520440" cy="320040"/>
+          </a:xfrm>
+          <a:prstGeom prst="rect">
+            <a:avLst/>
+          </a:prstGeom>
+          <a:solidFill>
+            <a:srgbClr val="FFA040"/>
+          </a:solidFill>
+          <a:ln>
+            <a:noFill/>
+          </a:ln>
+        </p:spPr>
+        <p:style>
+          <a:lnRef idx="1">
+            <a:schemeClr val="accent1"/>
+          </a:lnRef>
+          <a:fillRef idx="3">
+            <a:schemeClr val="accent1"/>
+          </a:fillRef>
+          <a:effectRef idx="2">
+            <a:schemeClr val="accent1"/>
+          </a:effectRef>
+          <a:fontRef idx="minor">
+            <a:schemeClr val="lt1"/>
+          </a:fontRef>
+        </p:style>
+        <p:txBody>
+          <a:bodyPr rtlCol="0" anchor="ctr"/>
+          <a:lstStyle/>
+          <a:p>
+            <a:pPr algn="ctr"/>
+          </a:p>
+        </p:txBody>
+      </p:sp>
+      <p:sp>
+        <p:nvSpPr>
+          <p:cNvPr id="6" name="TextBox 5"/>
+          <p:cNvSpPr txBox="1"/>
+          <p:nvPr/>
+        </p:nvSpPr>
+        <p:spPr>
+          <a:xfrm>
+            <a:off x="310896" y="1133856"/>
+            <a:ext cx="3447288" cy="237744"/>
+          </a:xfrm>
+          <a:prstGeom prst="rect">
+            <a:avLst/>
+          </a:prstGeom>
+          <a:noFill/>
+        </p:spPr>
+        <p:txBody>
+          <a:bodyPr wrap="none">
+            <a:spAutoFit/>
+          </a:bodyPr>
+          <a:lstStyle/>
+          <a:p>
+            <a:pPr algn="ctr"/>
+            <a:r>
+              <a:rPr sz="1200" b="1" i="0">
+                <a:solidFill>
+                  <a:srgbClr val="0F172A"/>
+                </a:solidFill>
+              </a:rPr>
+              <a:t>Auto-TFX  Weighted  (mean greedy +6.5%)</a:t>
+            </a:r>
+          </a:p>
+        </p:txBody>
+      </p:sp>
+      <p:sp>
+        <p:nvSpPr>
+          <p:cNvPr id="7" name="Rectangle 6"/>
+          <p:cNvSpPr/>
+          <p:nvPr/>
+        </p:nvSpPr>
+        <p:spPr>
+          <a:xfrm>
+            <a:off x="274320" y="1444752"/>
+            <a:ext cx="3520440" cy="429768"/>
+          </a:xfrm>
+          <a:prstGeom prst="rect">
+            <a:avLst/>
+          </a:prstGeom>
+          <a:solidFill>
+            <a:srgbClr val="4A9EFF"/>
+          </a:solidFill>
+          <a:ln>
+            <a:noFill/>
+          </a:ln>
+        </p:spPr>
+        <p:style>
+          <a:lnRef idx="1">
+            <a:schemeClr val="accent1"/>
+          </a:lnRef>
+          <a:fillRef idx="3">
+            <a:schemeClr val="accent1"/>
+          </a:fillRef>
+          <a:effectRef idx="2">
+            <a:schemeClr val="accent1"/>
+          </a:effectRef>
+          <a:fontRef idx="minor">
+            <a:schemeClr val="lt1"/>
+          </a:fontRef>
+        </p:style>
+        <p:txBody>
+          <a:bodyPr rtlCol="0" anchor="ctr"/>
+          <a:lstStyle/>
+          <a:p>
+            <a:pPr algn="ctr"/>
+          </a:p>
+        </p:txBody>
+      </p:sp>
+      <p:sp>
+        <p:nvSpPr>
+          <p:cNvPr id="8" name="TextBox 7"/>
+          <p:cNvSpPr txBox="1"/>
+          <p:nvPr/>
+        </p:nvSpPr>
+        <p:spPr>
+          <a:xfrm>
+            <a:off x="320040" y="1490472"/>
+            <a:ext cx="1371600" cy="338328"/>
+          </a:xfrm>
+          <a:prstGeom prst="rect">
+            <a:avLst/>
+          </a:prstGeom>
+          <a:noFill/>
+        </p:spPr>
+        <p:txBody>
+          <a:bodyPr wrap="none">
+            <a:spAutoFit/>
+          </a:bodyPr>
+          <a:lstStyle/>
+          <a:p>
+            <a:pPr algn="l"/>
+            <a:r>
+              <a:rPr sz="1100" b="1" i="0">
+                <a:solidFill>
+                  <a:srgbClr val="0F172A"/>
+                </a:solidFill>
+              </a:rPr>
+              <a:t>Function</a:t>
+            </a:r>
+          </a:p>
+        </p:txBody>
+      </p:sp>
+      <p:sp>
+        <p:nvSpPr>
+          <p:cNvPr id="9" name="TextBox 8"/>
+          <p:cNvSpPr txBox="1"/>
+          <p:nvPr/>
+        </p:nvSpPr>
+        <p:spPr>
+          <a:xfrm>
+            <a:off x="1737360" y="1490472"/>
+            <a:ext cx="914400" cy="338328"/>
+          </a:xfrm>
+          <a:prstGeom prst="rect">
+            <a:avLst/>
+          </a:prstGeom>
+          <a:noFill/>
+        </p:spPr>
+        <p:txBody>
+          <a:bodyPr wrap="none">
+            <a:spAutoFit/>
+          </a:bodyPr>
+          <a:lstStyle/>
+          <a:p>
+            <a:pPr algn="ctr"/>
+            <a:r>
+              <a:rPr sz="1100" b="1" i="0">
+                <a:solidFill>
+                  <a:srgbClr val="0F172A"/>
+                </a:solidFill>
+              </a:rPr>
+              <a:t>greedy</a:t>
+            </a:r>
+          </a:p>
+        </p:txBody>
+      </p:sp>
+      <p:sp>
+        <p:nvSpPr>
+          <p:cNvPr id="10" name="TextBox 9"/>
+          <p:cNvSpPr txBox="1"/>
+          <p:nvPr/>
+        </p:nvSpPr>
+        <p:spPr>
+          <a:xfrm>
+            <a:off x="2697479" y="1490472"/>
+            <a:ext cx="914400" cy="338328"/>
+          </a:xfrm>
+          <a:prstGeom prst="rect">
+            <a:avLst/>
+          </a:prstGeom>
+          <a:noFill/>
+        </p:spPr>
+        <p:txBody>
+          <a:bodyPr wrap="none">
+            <a:spAutoFit/>
+          </a:bodyPr>
+          <a:lstStyle/>
+          <a:p>
+            <a:pPr algn="ctr"/>
+            <a:r>
+              <a:rPr sz="1100" b="1" i="0">
+                <a:solidFill>
+                  <a:srgbClr val="0F172A"/>
+                </a:solidFill>
+              </a:rPr>
+              <a:t>samp best</a:t>
+            </a:r>
+          </a:p>
+        </p:txBody>
+      </p:sp>
+      <p:sp>
+        <p:nvSpPr>
+          <p:cNvPr id="11" name="Rectangle 10"/>
+          <p:cNvSpPr/>
+          <p:nvPr/>
+        </p:nvSpPr>
+        <p:spPr>
+          <a:xfrm>
+            <a:off x="274320" y="1901952"/>
+            <a:ext cx="3520440" cy="429768"/>
           </a:xfrm>
           <a:prstGeom prst="rect">
             <a:avLst/>
@@ -16484,14 +16211,14 @@
       </p:sp>
       <p:sp>
         <p:nvSpPr>
-          <p:cNvPr id="7" name="TextBox 6"/>
-          <p:cNvSpPr txBox="1"/>
-          <p:nvPr/>
-        </p:nvSpPr>
-        <p:spPr>
-          <a:xfrm>
-            <a:off x="6035040" y="1188720"/>
-            <a:ext cx="5715000" cy="365760"/>
+          <p:cNvPr id="12" name="TextBox 11"/>
+          <p:cNvSpPr txBox="1"/>
+          <p:nvPr/>
+        </p:nvSpPr>
+        <p:spPr>
+          <a:xfrm>
+            <a:off x="320040" y="1947672"/>
+            <a:ext cx="1371600" cy="338328"/>
           </a:xfrm>
           <a:prstGeom prst="rect">
             <a:avLst/>
@@ -16506,26 +16233,2012 @@
           <a:p>
             <a:pPr algn="l"/>
             <a:r>
-              <a:rPr sz="1700" b="1" i="0">
-                <a:solidFill>
-                  <a:srgbClr val="FFD75E"/>
-                </a:solidFill>
-              </a:rPr>
-              <a:t>Stop-Token Behaviour</a:t>
-            </a:r>
-          </a:p>
-        </p:txBody>
-      </p:sp>
-      <p:sp>
-        <p:nvSpPr>
-          <p:cNvPr id="8" name="TextBox 7"/>
-          <p:cNvSpPr txBox="1"/>
-          <p:nvPr/>
-        </p:nvSpPr>
-        <p:spPr>
-          <a:xfrm>
-            <a:off x="6035040" y="1627632"/>
-            <a:ext cx="5715000" cy="3200400"/>
+              <a:rPr sz="1100" b="0" i="0">
+                <a:solidFill>
+                  <a:srgbClr val="CCD6E8"/>
+                </a:solidFill>
+              </a:rPr>
+              <a:t>array_red.</a:t>
+            </a:r>
+          </a:p>
+        </p:txBody>
+      </p:sp>
+      <p:sp>
+        <p:nvSpPr>
+          <p:cNvPr id="13" name="TextBox 12"/>
+          <p:cNvSpPr txBox="1"/>
+          <p:nvPr/>
+        </p:nvSpPr>
+        <p:spPr>
+          <a:xfrm>
+            <a:off x="1737360" y="1947672"/>
+            <a:ext cx="914400" cy="338328"/>
+          </a:xfrm>
+          <a:prstGeom prst="rect">
+            <a:avLst/>
+          </a:prstGeom>
+          <a:noFill/>
+        </p:spPr>
+        <p:txBody>
+          <a:bodyPr wrap="none">
+            <a:spAutoFit/>
+          </a:bodyPr>
+          <a:lstStyle/>
+          <a:p>
+            <a:pPr algn="ctr"/>
+            <a:r>
+              <a:rPr sz="1100" b="1" i="0">
+                <a:solidFill>
+                  <a:srgbClr val="FF6B6B"/>
+                </a:solidFill>
+              </a:rPr>
+              <a:t>−0.081</a:t>
+            </a:r>
+          </a:p>
+        </p:txBody>
+      </p:sp>
+      <p:sp>
+        <p:nvSpPr>
+          <p:cNvPr id="14" name="TextBox 13"/>
+          <p:cNvSpPr txBox="1"/>
+          <p:nvPr/>
+        </p:nvSpPr>
+        <p:spPr>
+          <a:xfrm>
+            <a:off x="2697479" y="1947672"/>
+            <a:ext cx="914400" cy="338328"/>
+          </a:xfrm>
+          <a:prstGeom prst="rect">
+            <a:avLst/>
+          </a:prstGeom>
+          <a:noFill/>
+        </p:spPr>
+        <p:txBody>
+          <a:bodyPr wrap="none">
+            <a:spAutoFit/>
+          </a:bodyPr>
+          <a:lstStyle/>
+          <a:p>
+            <a:pPr algn="ctr"/>
+            <a:r>
+              <a:rPr sz="1100" b="1" i="0">
+                <a:solidFill>
+                  <a:srgbClr val="FF6B6B"/>
+                </a:solidFill>
+              </a:rPr>
+              <a:t>−0.053</a:t>
+            </a:r>
+          </a:p>
+        </p:txBody>
+      </p:sp>
+      <p:sp>
+        <p:nvSpPr>
+          <p:cNvPr id="15" name="Rectangle 14"/>
+          <p:cNvSpPr/>
+          <p:nvPr/>
+        </p:nvSpPr>
+        <p:spPr>
+          <a:xfrm>
+            <a:off x="274320" y="2359152"/>
+            <a:ext cx="3520440" cy="429768"/>
+          </a:xfrm>
+          <a:prstGeom prst="rect">
+            <a:avLst/>
+          </a:prstGeom>
+          <a:solidFill>
+            <a:srgbClr val="0F172A"/>
+          </a:solidFill>
+          <a:ln>
+            <a:noFill/>
+          </a:ln>
+        </p:spPr>
+        <p:style>
+          <a:lnRef idx="1">
+            <a:schemeClr val="accent1"/>
+          </a:lnRef>
+          <a:fillRef idx="3">
+            <a:schemeClr val="accent1"/>
+          </a:fillRef>
+          <a:effectRef idx="2">
+            <a:schemeClr val="accent1"/>
+          </a:effectRef>
+          <a:fontRef idx="minor">
+            <a:schemeClr val="lt1"/>
+          </a:fontRef>
+        </p:style>
+        <p:txBody>
+          <a:bodyPr rtlCol="0" anchor="ctr"/>
+          <a:lstStyle/>
+          <a:p>
+            <a:pPr algn="ctr"/>
+          </a:p>
+        </p:txBody>
+      </p:sp>
+      <p:sp>
+        <p:nvSpPr>
+          <p:cNvPr id="16" name="TextBox 15"/>
+          <p:cNvSpPr txBox="1"/>
+          <p:nvPr/>
+        </p:nvSpPr>
+        <p:spPr>
+          <a:xfrm>
+            <a:off x="320040" y="2404872"/>
+            <a:ext cx="1371600" cy="338328"/>
+          </a:xfrm>
+          <a:prstGeom prst="rect">
+            <a:avLst/>
+          </a:prstGeom>
+          <a:noFill/>
+        </p:spPr>
+        <p:txBody>
+          <a:bodyPr wrap="none">
+            <a:spAutoFit/>
+          </a:bodyPr>
+          <a:lstStyle/>
+          <a:p>
+            <a:pPr algn="l"/>
+            <a:r>
+              <a:rPr sz="1100" b="0" i="0">
+                <a:solidFill>
+                  <a:srgbClr val="CCD6E8"/>
+                </a:solidFill>
+              </a:rPr>
+              <a:t>binary_tree</a:t>
+            </a:r>
+          </a:p>
+        </p:txBody>
+      </p:sp>
+      <p:sp>
+        <p:nvSpPr>
+          <p:cNvPr id="17" name="TextBox 16"/>
+          <p:cNvSpPr txBox="1"/>
+          <p:nvPr/>
+        </p:nvSpPr>
+        <p:spPr>
+          <a:xfrm>
+            <a:off x="1737360" y="2404872"/>
+            <a:ext cx="914400" cy="338328"/>
+          </a:xfrm>
+          <a:prstGeom prst="rect">
+            <a:avLst/>
+          </a:prstGeom>
+          <a:noFill/>
+        </p:spPr>
+        <p:txBody>
+          <a:bodyPr wrap="none">
+            <a:spAutoFit/>
+          </a:bodyPr>
+          <a:lstStyle/>
+          <a:p>
+            <a:pPr algn="ctr"/>
+            <a:r>
+              <a:rPr sz="1100" b="1" i="0">
+                <a:solidFill>
+                  <a:srgbClr val="56D3A0"/>
+                </a:solidFill>
+              </a:rPr>
+              <a:t>+0.079</a:t>
+            </a:r>
+          </a:p>
+        </p:txBody>
+      </p:sp>
+      <p:sp>
+        <p:nvSpPr>
+          <p:cNvPr id="18" name="TextBox 17"/>
+          <p:cNvSpPr txBox="1"/>
+          <p:nvPr/>
+        </p:nvSpPr>
+        <p:spPr>
+          <a:xfrm>
+            <a:off x="2697479" y="2404872"/>
+            <a:ext cx="914400" cy="338328"/>
+          </a:xfrm>
+          <a:prstGeom prst="rect">
+            <a:avLst/>
+          </a:prstGeom>
+          <a:noFill/>
+        </p:spPr>
+        <p:txBody>
+          <a:bodyPr wrap="none">
+            <a:spAutoFit/>
+          </a:bodyPr>
+          <a:lstStyle/>
+          <a:p>
+            <a:pPr algn="ctr"/>
+            <a:r>
+              <a:rPr sz="1100" b="1" i="0">
+                <a:solidFill>
+                  <a:srgbClr val="56D3A0"/>
+                </a:solidFill>
+              </a:rPr>
+              <a:t>+0.081</a:t>
+            </a:r>
+          </a:p>
+        </p:txBody>
+      </p:sp>
+      <p:sp>
+        <p:nvSpPr>
+          <p:cNvPr id="19" name="Rectangle 18"/>
+          <p:cNvSpPr/>
+          <p:nvPr/>
+        </p:nvSpPr>
+        <p:spPr>
+          <a:xfrm>
+            <a:off x="274320" y="2816352"/>
+            <a:ext cx="3520440" cy="429768"/>
+          </a:xfrm>
+          <a:prstGeom prst="rect">
+            <a:avLst/>
+          </a:prstGeom>
+          <a:solidFill>
+            <a:srgbClr val="16243E"/>
+          </a:solidFill>
+          <a:ln>
+            <a:noFill/>
+          </a:ln>
+        </p:spPr>
+        <p:style>
+          <a:lnRef idx="1">
+            <a:schemeClr val="accent1"/>
+          </a:lnRef>
+          <a:fillRef idx="3">
+            <a:schemeClr val="accent1"/>
+          </a:fillRef>
+          <a:effectRef idx="2">
+            <a:schemeClr val="accent1"/>
+          </a:effectRef>
+          <a:fontRef idx="minor">
+            <a:schemeClr val="lt1"/>
+          </a:fontRef>
+        </p:style>
+        <p:txBody>
+          <a:bodyPr rtlCol="0" anchor="ctr"/>
+          <a:lstStyle/>
+          <a:p>
+            <a:pPr algn="ctr"/>
+          </a:p>
+        </p:txBody>
+      </p:sp>
+      <p:sp>
+        <p:nvSpPr>
+          <p:cNvPr id="20" name="TextBox 19"/>
+          <p:cNvSpPr txBox="1"/>
+          <p:nvPr/>
+        </p:nvSpPr>
+        <p:spPr>
+          <a:xfrm>
+            <a:off x="320040" y="2862072"/>
+            <a:ext cx="1371600" cy="338328"/>
+          </a:xfrm>
+          <a:prstGeom prst="rect">
+            <a:avLst/>
+          </a:prstGeom>
+          <a:noFill/>
+        </p:spPr>
+        <p:txBody>
+          <a:bodyPr wrap="none">
+            <a:spAutoFit/>
+          </a:bodyPr>
+          <a:lstStyle/>
+          <a:p>
+            <a:pPr algn="l"/>
+            <a:r>
+              <a:rPr sz="1100" b="0" i="0">
+                <a:solidFill>
+                  <a:srgbClr val="CCD6E8"/>
+                </a:solidFill>
+              </a:rPr>
+              <a:t>fft</a:t>
+            </a:r>
+          </a:p>
+        </p:txBody>
+      </p:sp>
+      <p:sp>
+        <p:nvSpPr>
+          <p:cNvPr id="21" name="TextBox 20"/>
+          <p:cNvSpPr txBox="1"/>
+          <p:nvPr/>
+        </p:nvSpPr>
+        <p:spPr>
+          <a:xfrm>
+            <a:off x="1737360" y="2862072"/>
+            <a:ext cx="914400" cy="338328"/>
+          </a:xfrm>
+          <a:prstGeom prst="rect">
+            <a:avLst/>
+          </a:prstGeom>
+          <a:noFill/>
+        </p:spPr>
+        <p:txBody>
+          <a:bodyPr wrap="none">
+            <a:spAutoFit/>
+          </a:bodyPr>
+          <a:lstStyle/>
+          <a:p>
+            <a:pPr algn="ctr"/>
+            <a:r>
+              <a:rPr sz="1100" b="1" i="0">
+                <a:solidFill>
+                  <a:srgbClr val="56D3A0"/>
+                </a:solidFill>
+              </a:rPr>
+              <a:t>+0.008</a:t>
+            </a:r>
+          </a:p>
+        </p:txBody>
+      </p:sp>
+      <p:sp>
+        <p:nvSpPr>
+          <p:cNvPr id="22" name="TextBox 21"/>
+          <p:cNvSpPr txBox="1"/>
+          <p:nvPr/>
+        </p:nvSpPr>
+        <p:spPr>
+          <a:xfrm>
+            <a:off x="2697479" y="2862072"/>
+            <a:ext cx="914400" cy="338328"/>
+          </a:xfrm>
+          <a:prstGeom prst="rect">
+            <a:avLst/>
+          </a:prstGeom>
+          <a:noFill/>
+        </p:spPr>
+        <p:txBody>
+          <a:bodyPr wrap="none">
+            <a:spAutoFit/>
+          </a:bodyPr>
+          <a:lstStyle/>
+          <a:p>
+            <a:pPr algn="ctr"/>
+            <a:r>
+              <a:rPr sz="1100" b="1" i="0">
+                <a:solidFill>
+                  <a:srgbClr val="56D3A0"/>
+                </a:solidFill>
+              </a:rPr>
+              <a:t>+0.009</a:t>
+            </a:r>
+          </a:p>
+        </p:txBody>
+      </p:sp>
+      <p:sp>
+        <p:nvSpPr>
+          <p:cNvPr id="23" name="Rectangle 22"/>
+          <p:cNvSpPr/>
+          <p:nvPr/>
+        </p:nvSpPr>
+        <p:spPr>
+          <a:xfrm>
+            <a:off x="274320" y="3273552"/>
+            <a:ext cx="3520440" cy="429768"/>
+          </a:xfrm>
+          <a:prstGeom prst="rect">
+            <a:avLst/>
+          </a:prstGeom>
+          <a:solidFill>
+            <a:srgbClr val="0F172A"/>
+          </a:solidFill>
+          <a:ln>
+            <a:noFill/>
+          </a:ln>
+        </p:spPr>
+        <p:style>
+          <a:lnRef idx="1">
+            <a:schemeClr val="accent1"/>
+          </a:lnRef>
+          <a:fillRef idx="3">
+            <a:schemeClr val="accent1"/>
+          </a:fillRef>
+          <a:effectRef idx="2">
+            <a:schemeClr val="accent1"/>
+          </a:effectRef>
+          <a:fontRef idx="minor">
+            <a:schemeClr val="lt1"/>
+          </a:fontRef>
+        </p:style>
+        <p:txBody>
+          <a:bodyPr rtlCol="0" anchor="ctr"/>
+          <a:lstStyle/>
+          <a:p>
+            <a:pPr algn="ctr"/>
+          </a:p>
+        </p:txBody>
+      </p:sp>
+      <p:sp>
+        <p:nvSpPr>
+          <p:cNvPr id="24" name="TextBox 23"/>
+          <p:cNvSpPr txBox="1"/>
+          <p:nvPr/>
+        </p:nvSpPr>
+        <p:spPr>
+          <a:xfrm>
+            <a:off x="320040" y="3319272"/>
+            <a:ext cx="1371600" cy="338328"/>
+          </a:xfrm>
+          <a:prstGeom prst="rect">
+            <a:avLst/>
+          </a:prstGeom>
+          <a:noFill/>
+        </p:spPr>
+        <p:txBody>
+          <a:bodyPr wrap="none">
+            <a:spAutoFit/>
+          </a:bodyPr>
+          <a:lstStyle/>
+          <a:p>
+            <a:pPr algn="l"/>
+            <a:r>
+              <a:rPr sz="1100" b="0" i="0">
+                <a:solidFill>
+                  <a:srgbClr val="CCD6E8"/>
+                </a:solidFill>
+              </a:rPr>
+              <a:t>interpreter</a:t>
+            </a:r>
+          </a:p>
+        </p:txBody>
+      </p:sp>
+      <p:sp>
+        <p:nvSpPr>
+          <p:cNvPr id="25" name="TextBox 24"/>
+          <p:cNvSpPr txBox="1"/>
+          <p:nvPr/>
+        </p:nvSpPr>
+        <p:spPr>
+          <a:xfrm>
+            <a:off x="1737360" y="3319272"/>
+            <a:ext cx="914400" cy="338328"/>
+          </a:xfrm>
+          <a:prstGeom prst="rect">
+            <a:avLst/>
+          </a:prstGeom>
+          <a:noFill/>
+        </p:spPr>
+        <p:txBody>
+          <a:bodyPr wrap="none">
+            <a:spAutoFit/>
+          </a:bodyPr>
+          <a:lstStyle/>
+          <a:p>
+            <a:pPr algn="ctr"/>
+            <a:r>
+              <a:rPr sz="1100" b="1" i="0">
+                <a:solidFill>
+                  <a:srgbClr val="56D3A0"/>
+                </a:solidFill>
+              </a:rPr>
+              <a:t>+0.307</a:t>
+            </a:r>
+          </a:p>
+        </p:txBody>
+      </p:sp>
+      <p:sp>
+        <p:nvSpPr>
+          <p:cNvPr id="26" name="TextBox 25"/>
+          <p:cNvSpPr txBox="1"/>
+          <p:nvPr/>
+        </p:nvSpPr>
+        <p:spPr>
+          <a:xfrm>
+            <a:off x="2697479" y="3319272"/>
+            <a:ext cx="914400" cy="338328"/>
+          </a:xfrm>
+          <a:prstGeom prst="rect">
+            <a:avLst/>
+          </a:prstGeom>
+          <a:noFill/>
+        </p:spPr>
+        <p:txBody>
+          <a:bodyPr wrap="none">
+            <a:spAutoFit/>
+          </a:bodyPr>
+          <a:lstStyle/>
+          <a:p>
+            <a:pPr algn="ctr"/>
+            <a:r>
+              <a:rPr sz="1100" b="1" i="0">
+                <a:solidFill>
+                  <a:srgbClr val="56D3A0"/>
+                </a:solidFill>
+              </a:rPr>
+              <a:t>+0.308</a:t>
+            </a:r>
+          </a:p>
+        </p:txBody>
+      </p:sp>
+      <p:sp>
+        <p:nvSpPr>
+          <p:cNvPr id="27" name="Rectangle 26"/>
+          <p:cNvSpPr/>
+          <p:nvPr/>
+        </p:nvSpPr>
+        <p:spPr>
+          <a:xfrm>
+            <a:off x="274320" y="3730752"/>
+            <a:ext cx="3520440" cy="429768"/>
+          </a:xfrm>
+          <a:prstGeom prst="rect">
+            <a:avLst/>
+          </a:prstGeom>
+          <a:solidFill>
+            <a:srgbClr val="16243E"/>
+          </a:solidFill>
+          <a:ln>
+            <a:noFill/>
+          </a:ln>
+        </p:spPr>
+        <p:style>
+          <a:lnRef idx="1">
+            <a:schemeClr val="accent1"/>
+          </a:lnRef>
+          <a:fillRef idx="3">
+            <a:schemeClr val="accent1"/>
+          </a:fillRef>
+          <a:effectRef idx="2">
+            <a:schemeClr val="accent1"/>
+          </a:effectRef>
+          <a:fontRef idx="minor">
+            <a:schemeClr val="lt1"/>
+          </a:fontRef>
+        </p:style>
+        <p:txBody>
+          <a:bodyPr rtlCol="0" anchor="ctr"/>
+          <a:lstStyle/>
+          <a:p>
+            <a:pPr algn="ctr"/>
+          </a:p>
+        </p:txBody>
+      </p:sp>
+      <p:sp>
+        <p:nvSpPr>
+          <p:cNvPr id="28" name="TextBox 27"/>
+          <p:cNvSpPr txBox="1"/>
+          <p:nvPr/>
+        </p:nvSpPr>
+        <p:spPr>
+          <a:xfrm>
+            <a:off x="320040" y="3776472"/>
+            <a:ext cx="1371600" cy="338328"/>
+          </a:xfrm>
+          <a:prstGeom prst="rect">
+            <a:avLst/>
+          </a:prstGeom>
+          <a:noFill/>
+        </p:spPr>
+        <p:txBody>
+          <a:bodyPr wrap="none">
+            <a:spAutoFit/>
+          </a:bodyPr>
+          <a:lstStyle/>
+          <a:p>
+            <a:pPr algn="l"/>
+            <a:r>
+              <a:rPr sz="1100" b="0" i="0">
+                <a:solidFill>
+                  <a:srgbClr val="CCD6E8"/>
+                </a:solidFill>
+              </a:rPr>
+              <a:t>kmp_search</a:t>
+            </a:r>
+          </a:p>
+        </p:txBody>
+      </p:sp>
+      <p:sp>
+        <p:nvSpPr>
+          <p:cNvPr id="29" name="TextBox 28"/>
+          <p:cNvSpPr txBox="1"/>
+          <p:nvPr/>
+        </p:nvSpPr>
+        <p:spPr>
+          <a:xfrm>
+            <a:off x="1737360" y="3776472"/>
+            <a:ext cx="914400" cy="338328"/>
+          </a:xfrm>
+          <a:prstGeom prst="rect">
+            <a:avLst/>
+          </a:prstGeom>
+          <a:noFill/>
+        </p:spPr>
+        <p:txBody>
+          <a:bodyPr wrap="none">
+            <a:spAutoFit/>
+          </a:bodyPr>
+          <a:lstStyle/>
+          <a:p>
+            <a:pPr algn="ctr"/>
+            <a:r>
+              <a:rPr sz="1100" b="1" i="0">
+                <a:solidFill>
+                  <a:srgbClr val="56D3A0"/>
+                </a:solidFill>
+              </a:rPr>
+              <a:t>+0.077</a:t>
+            </a:r>
+          </a:p>
+        </p:txBody>
+      </p:sp>
+      <p:sp>
+        <p:nvSpPr>
+          <p:cNvPr id="30" name="TextBox 29"/>
+          <p:cNvSpPr txBox="1"/>
+          <p:nvPr/>
+        </p:nvSpPr>
+        <p:spPr>
+          <a:xfrm>
+            <a:off x="2697479" y="3776472"/>
+            <a:ext cx="914400" cy="338328"/>
+          </a:xfrm>
+          <a:prstGeom prst="rect">
+            <a:avLst/>
+          </a:prstGeom>
+          <a:noFill/>
+        </p:spPr>
+        <p:txBody>
+          <a:bodyPr wrap="none">
+            <a:spAutoFit/>
+          </a:bodyPr>
+          <a:lstStyle/>
+          <a:p>
+            <a:pPr algn="ctr"/>
+            <a:r>
+              <a:rPr sz="1100" b="1" i="0">
+                <a:solidFill>
+                  <a:srgbClr val="56D3A0"/>
+                </a:solidFill>
+              </a:rPr>
+              <a:t>+0.081</a:t>
+            </a:r>
+          </a:p>
+        </p:txBody>
+      </p:sp>
+      <p:sp>
+        <p:nvSpPr>
+          <p:cNvPr id="31" name="Rectangle 30"/>
+          <p:cNvSpPr/>
+          <p:nvPr/>
+        </p:nvSpPr>
+        <p:spPr>
+          <a:xfrm>
+            <a:off x="274320" y="4187952"/>
+            <a:ext cx="3520440" cy="429768"/>
+          </a:xfrm>
+          <a:prstGeom prst="rect">
+            <a:avLst/>
+          </a:prstGeom>
+          <a:solidFill>
+            <a:srgbClr val="0F172A"/>
+          </a:solidFill>
+          <a:ln>
+            <a:noFill/>
+          </a:ln>
+        </p:spPr>
+        <p:style>
+          <a:lnRef idx="1">
+            <a:schemeClr val="accent1"/>
+          </a:lnRef>
+          <a:fillRef idx="3">
+            <a:schemeClr val="accent1"/>
+          </a:fillRef>
+          <a:effectRef idx="2">
+            <a:schemeClr val="accent1"/>
+          </a:effectRef>
+          <a:fontRef idx="minor">
+            <a:schemeClr val="lt1"/>
+          </a:fontRef>
+        </p:style>
+        <p:txBody>
+          <a:bodyPr rtlCol="0" anchor="ctr"/>
+          <a:lstStyle/>
+          <a:p>
+            <a:pPr algn="ctr"/>
+          </a:p>
+        </p:txBody>
+      </p:sp>
+      <p:sp>
+        <p:nvSpPr>
+          <p:cNvPr id="32" name="TextBox 31"/>
+          <p:cNvSpPr txBox="1"/>
+          <p:nvPr/>
+        </p:nvSpPr>
+        <p:spPr>
+          <a:xfrm>
+            <a:off x="320040" y="4233672"/>
+            <a:ext cx="1371600" cy="338328"/>
+          </a:xfrm>
+          <a:prstGeom prst="rect">
+            <a:avLst/>
+          </a:prstGeom>
+          <a:noFill/>
+        </p:spPr>
+        <p:txBody>
+          <a:bodyPr wrap="none">
+            <a:spAutoFit/>
+          </a:bodyPr>
+          <a:lstStyle/>
+          <a:p>
+            <a:pPr algn="l"/>
+            <a:r>
+              <a:rPr sz="1100" b="0" i="0">
+                <a:solidFill>
+                  <a:srgbClr val="CCD6E8"/>
+                </a:solidFill>
+              </a:rPr>
+              <a:t>poly_eval</a:t>
+            </a:r>
+          </a:p>
+        </p:txBody>
+      </p:sp>
+      <p:sp>
+        <p:nvSpPr>
+          <p:cNvPr id="33" name="TextBox 32"/>
+          <p:cNvSpPr txBox="1"/>
+          <p:nvPr/>
+        </p:nvSpPr>
+        <p:spPr>
+          <a:xfrm>
+            <a:off x="1737360" y="4233672"/>
+            <a:ext cx="914400" cy="338328"/>
+          </a:xfrm>
+          <a:prstGeom prst="rect">
+            <a:avLst/>
+          </a:prstGeom>
+          <a:noFill/>
+        </p:spPr>
+        <p:txBody>
+          <a:bodyPr wrap="none">
+            <a:spAutoFit/>
+          </a:bodyPr>
+          <a:lstStyle/>
+          <a:p>
+            <a:pPr algn="ctr"/>
+            <a:r>
+              <a:rPr sz="1100" b="1" i="0">
+                <a:solidFill>
+                  <a:srgbClr val="56D3A0"/>
+                </a:solidFill>
+              </a:rPr>
+              <a:t>+0.002</a:t>
+            </a:r>
+          </a:p>
+        </p:txBody>
+      </p:sp>
+      <p:sp>
+        <p:nvSpPr>
+          <p:cNvPr id="34" name="TextBox 33"/>
+          <p:cNvSpPr txBox="1"/>
+          <p:nvPr/>
+        </p:nvSpPr>
+        <p:spPr>
+          <a:xfrm>
+            <a:off x="2697479" y="4233672"/>
+            <a:ext cx="914400" cy="338328"/>
+          </a:xfrm>
+          <a:prstGeom prst="rect">
+            <a:avLst/>
+          </a:prstGeom>
+          <a:noFill/>
+        </p:spPr>
+        <p:txBody>
+          <a:bodyPr wrap="none">
+            <a:spAutoFit/>
+          </a:bodyPr>
+          <a:lstStyle/>
+          <a:p>
+            <a:pPr algn="ctr"/>
+            <a:r>
+              <a:rPr sz="1100" b="1" i="0">
+                <a:solidFill>
+                  <a:srgbClr val="56D3A0"/>
+                </a:solidFill>
+              </a:rPr>
+              <a:t>+0.036</a:t>
+            </a:r>
+          </a:p>
+        </p:txBody>
+      </p:sp>
+      <p:sp>
+        <p:nvSpPr>
+          <p:cNvPr id="35" name="Rectangle 34"/>
+          <p:cNvSpPr/>
+          <p:nvPr/>
+        </p:nvSpPr>
+        <p:spPr>
+          <a:xfrm>
+            <a:off x="3931920" y="1097280"/>
+            <a:ext cx="3520440" cy="320040"/>
+          </a:xfrm>
+          <a:prstGeom prst="rect">
+            <a:avLst/>
+          </a:prstGeom>
+          <a:solidFill>
+            <a:srgbClr val="FFA040"/>
+          </a:solidFill>
+          <a:ln>
+            <a:noFill/>
+          </a:ln>
+        </p:spPr>
+        <p:style>
+          <a:lnRef idx="1">
+            <a:schemeClr val="accent1"/>
+          </a:lnRef>
+          <a:fillRef idx="3">
+            <a:schemeClr val="accent1"/>
+          </a:fillRef>
+          <a:effectRef idx="2">
+            <a:schemeClr val="accent1"/>
+          </a:effectRef>
+          <a:fontRef idx="minor">
+            <a:schemeClr val="lt1"/>
+          </a:fontRef>
+        </p:style>
+        <p:txBody>
+          <a:bodyPr rtlCol="0" anchor="ctr"/>
+          <a:lstStyle/>
+          <a:p>
+            <a:pPr algn="ctr"/>
+          </a:p>
+        </p:txBody>
+      </p:sp>
+      <p:sp>
+        <p:nvSpPr>
+          <p:cNvPr id="36" name="TextBox 35"/>
+          <p:cNvSpPr txBox="1"/>
+          <p:nvPr/>
+        </p:nvSpPr>
+        <p:spPr>
+          <a:xfrm>
+            <a:off x="3968496" y="1133856"/>
+            <a:ext cx="3447288" cy="237744"/>
+          </a:xfrm>
+          <a:prstGeom prst="rect">
+            <a:avLst/>
+          </a:prstGeom>
+          <a:noFill/>
+        </p:spPr>
+        <p:txBody>
+          <a:bodyPr wrap="none">
+            <a:spAutoFit/>
+          </a:bodyPr>
+          <a:lstStyle/>
+          <a:p>
+            <a:pPr algn="ctr"/>
+            <a:r>
+              <a:rPr sz="1200" b="1" i="0">
+                <a:solidFill>
+                  <a:srgbClr val="0F172A"/>
+                </a:solidFill>
+              </a:rPr>
+              <a:t>Auto-GRU  Weighted  (mean greedy +9.2%)</a:t>
+            </a:r>
+          </a:p>
+        </p:txBody>
+      </p:sp>
+      <p:sp>
+        <p:nvSpPr>
+          <p:cNvPr id="37" name="Rectangle 36"/>
+          <p:cNvSpPr/>
+          <p:nvPr/>
+        </p:nvSpPr>
+        <p:spPr>
+          <a:xfrm>
+            <a:off x="3931920" y="1444752"/>
+            <a:ext cx="3520440" cy="429768"/>
+          </a:xfrm>
+          <a:prstGeom prst="rect">
+            <a:avLst/>
+          </a:prstGeom>
+          <a:solidFill>
+            <a:srgbClr val="4A9EFF"/>
+          </a:solidFill>
+          <a:ln>
+            <a:noFill/>
+          </a:ln>
+        </p:spPr>
+        <p:style>
+          <a:lnRef idx="1">
+            <a:schemeClr val="accent1"/>
+          </a:lnRef>
+          <a:fillRef idx="3">
+            <a:schemeClr val="accent1"/>
+          </a:fillRef>
+          <a:effectRef idx="2">
+            <a:schemeClr val="accent1"/>
+          </a:effectRef>
+          <a:fontRef idx="minor">
+            <a:schemeClr val="lt1"/>
+          </a:fontRef>
+        </p:style>
+        <p:txBody>
+          <a:bodyPr rtlCol="0" anchor="ctr"/>
+          <a:lstStyle/>
+          <a:p>
+            <a:pPr algn="ctr"/>
+          </a:p>
+        </p:txBody>
+      </p:sp>
+      <p:sp>
+        <p:nvSpPr>
+          <p:cNvPr id="38" name="TextBox 37"/>
+          <p:cNvSpPr txBox="1"/>
+          <p:nvPr/>
+        </p:nvSpPr>
+        <p:spPr>
+          <a:xfrm>
+            <a:off x="3977639" y="1490472"/>
+            <a:ext cx="1371600" cy="338328"/>
+          </a:xfrm>
+          <a:prstGeom prst="rect">
+            <a:avLst/>
+          </a:prstGeom>
+          <a:noFill/>
+        </p:spPr>
+        <p:txBody>
+          <a:bodyPr wrap="none">
+            <a:spAutoFit/>
+          </a:bodyPr>
+          <a:lstStyle/>
+          <a:p>
+            <a:pPr algn="l"/>
+            <a:r>
+              <a:rPr sz="1100" b="1" i="0">
+                <a:solidFill>
+                  <a:srgbClr val="0F172A"/>
+                </a:solidFill>
+              </a:rPr>
+              <a:t>Function</a:t>
+            </a:r>
+          </a:p>
+        </p:txBody>
+      </p:sp>
+      <p:sp>
+        <p:nvSpPr>
+          <p:cNvPr id="39" name="TextBox 38"/>
+          <p:cNvSpPr txBox="1"/>
+          <p:nvPr/>
+        </p:nvSpPr>
+        <p:spPr>
+          <a:xfrm>
+            <a:off x="5394960" y="1490472"/>
+            <a:ext cx="914400" cy="338328"/>
+          </a:xfrm>
+          <a:prstGeom prst="rect">
+            <a:avLst/>
+          </a:prstGeom>
+          <a:noFill/>
+        </p:spPr>
+        <p:txBody>
+          <a:bodyPr wrap="none">
+            <a:spAutoFit/>
+          </a:bodyPr>
+          <a:lstStyle/>
+          <a:p>
+            <a:pPr algn="ctr"/>
+            <a:r>
+              <a:rPr sz="1100" b="1" i="0">
+                <a:solidFill>
+                  <a:srgbClr val="0F172A"/>
+                </a:solidFill>
+              </a:rPr>
+              <a:t>greedy</a:t>
+            </a:r>
+          </a:p>
+        </p:txBody>
+      </p:sp>
+      <p:sp>
+        <p:nvSpPr>
+          <p:cNvPr id="40" name="TextBox 39"/>
+          <p:cNvSpPr txBox="1"/>
+          <p:nvPr/>
+        </p:nvSpPr>
+        <p:spPr>
+          <a:xfrm>
+            <a:off x="6355079" y="1490472"/>
+            <a:ext cx="914400" cy="338328"/>
+          </a:xfrm>
+          <a:prstGeom prst="rect">
+            <a:avLst/>
+          </a:prstGeom>
+          <a:noFill/>
+        </p:spPr>
+        <p:txBody>
+          <a:bodyPr wrap="none">
+            <a:spAutoFit/>
+          </a:bodyPr>
+          <a:lstStyle/>
+          <a:p>
+            <a:pPr algn="ctr"/>
+            <a:r>
+              <a:rPr sz="1100" b="1" i="0">
+                <a:solidFill>
+                  <a:srgbClr val="0F172A"/>
+                </a:solidFill>
+              </a:rPr>
+              <a:t>samp best</a:t>
+            </a:r>
+          </a:p>
+        </p:txBody>
+      </p:sp>
+      <p:sp>
+        <p:nvSpPr>
+          <p:cNvPr id="41" name="Rectangle 40"/>
+          <p:cNvSpPr/>
+          <p:nvPr/>
+        </p:nvSpPr>
+        <p:spPr>
+          <a:xfrm>
+            <a:off x="3931920" y="1901952"/>
+            <a:ext cx="3520440" cy="429768"/>
+          </a:xfrm>
+          <a:prstGeom prst="rect">
+            <a:avLst/>
+          </a:prstGeom>
+          <a:solidFill>
+            <a:srgbClr val="16243E"/>
+          </a:solidFill>
+          <a:ln>
+            <a:noFill/>
+          </a:ln>
+        </p:spPr>
+        <p:style>
+          <a:lnRef idx="1">
+            <a:schemeClr val="accent1"/>
+          </a:lnRef>
+          <a:fillRef idx="3">
+            <a:schemeClr val="accent1"/>
+          </a:fillRef>
+          <a:effectRef idx="2">
+            <a:schemeClr val="accent1"/>
+          </a:effectRef>
+          <a:fontRef idx="minor">
+            <a:schemeClr val="lt1"/>
+          </a:fontRef>
+        </p:style>
+        <p:txBody>
+          <a:bodyPr rtlCol="0" anchor="ctr"/>
+          <a:lstStyle/>
+          <a:p>
+            <a:pPr algn="ctr"/>
+          </a:p>
+        </p:txBody>
+      </p:sp>
+      <p:sp>
+        <p:nvSpPr>
+          <p:cNvPr id="42" name="TextBox 41"/>
+          <p:cNvSpPr txBox="1"/>
+          <p:nvPr/>
+        </p:nvSpPr>
+        <p:spPr>
+          <a:xfrm>
+            <a:off x="3977639" y="1947672"/>
+            <a:ext cx="1371600" cy="338328"/>
+          </a:xfrm>
+          <a:prstGeom prst="rect">
+            <a:avLst/>
+          </a:prstGeom>
+          <a:noFill/>
+        </p:spPr>
+        <p:txBody>
+          <a:bodyPr wrap="none">
+            <a:spAutoFit/>
+          </a:bodyPr>
+          <a:lstStyle/>
+          <a:p>
+            <a:pPr algn="l"/>
+            <a:r>
+              <a:rPr sz="1100" b="0" i="0">
+                <a:solidFill>
+                  <a:srgbClr val="CCD6E8"/>
+                </a:solidFill>
+              </a:rPr>
+              <a:t>array_red.</a:t>
+            </a:r>
+          </a:p>
+        </p:txBody>
+      </p:sp>
+      <p:sp>
+        <p:nvSpPr>
+          <p:cNvPr id="43" name="TextBox 42"/>
+          <p:cNvSpPr txBox="1"/>
+          <p:nvPr/>
+        </p:nvSpPr>
+        <p:spPr>
+          <a:xfrm>
+            <a:off x="5394960" y="1947672"/>
+            <a:ext cx="914400" cy="338328"/>
+          </a:xfrm>
+          <a:prstGeom prst="rect">
+            <a:avLst/>
+          </a:prstGeom>
+          <a:noFill/>
+        </p:spPr>
+        <p:txBody>
+          <a:bodyPr wrap="none">
+            <a:spAutoFit/>
+          </a:bodyPr>
+          <a:lstStyle/>
+          <a:p>
+            <a:pPr algn="ctr"/>
+            <a:r>
+              <a:rPr sz="1100" b="1" i="0">
+                <a:solidFill>
+                  <a:srgbClr val="FF6B6B"/>
+                </a:solidFill>
+              </a:rPr>
+              <a:t>−0.039</a:t>
+            </a:r>
+          </a:p>
+        </p:txBody>
+      </p:sp>
+      <p:sp>
+        <p:nvSpPr>
+          <p:cNvPr id="44" name="TextBox 43"/>
+          <p:cNvSpPr txBox="1"/>
+          <p:nvPr/>
+        </p:nvSpPr>
+        <p:spPr>
+          <a:xfrm>
+            <a:off x="6355079" y="1947672"/>
+            <a:ext cx="914400" cy="338328"/>
+          </a:xfrm>
+          <a:prstGeom prst="rect">
+            <a:avLst/>
+          </a:prstGeom>
+          <a:noFill/>
+        </p:spPr>
+        <p:txBody>
+          <a:bodyPr wrap="none">
+            <a:spAutoFit/>
+          </a:bodyPr>
+          <a:lstStyle/>
+          <a:p>
+            <a:pPr algn="ctr"/>
+            <a:r>
+              <a:rPr sz="1100" b="1" i="0">
+                <a:solidFill>
+                  <a:srgbClr val="FF6B6B"/>
+                </a:solidFill>
+              </a:rPr>
+              <a:t>−0.011</a:t>
+            </a:r>
+          </a:p>
+        </p:txBody>
+      </p:sp>
+      <p:sp>
+        <p:nvSpPr>
+          <p:cNvPr id="45" name="Rectangle 44"/>
+          <p:cNvSpPr/>
+          <p:nvPr/>
+        </p:nvSpPr>
+        <p:spPr>
+          <a:xfrm>
+            <a:off x="3931920" y="2359152"/>
+            <a:ext cx="3520440" cy="429768"/>
+          </a:xfrm>
+          <a:prstGeom prst="rect">
+            <a:avLst/>
+          </a:prstGeom>
+          <a:solidFill>
+            <a:srgbClr val="0F172A"/>
+          </a:solidFill>
+          <a:ln>
+            <a:noFill/>
+          </a:ln>
+        </p:spPr>
+        <p:style>
+          <a:lnRef idx="1">
+            <a:schemeClr val="accent1"/>
+          </a:lnRef>
+          <a:fillRef idx="3">
+            <a:schemeClr val="accent1"/>
+          </a:fillRef>
+          <a:effectRef idx="2">
+            <a:schemeClr val="accent1"/>
+          </a:effectRef>
+          <a:fontRef idx="minor">
+            <a:schemeClr val="lt1"/>
+          </a:fontRef>
+        </p:style>
+        <p:txBody>
+          <a:bodyPr rtlCol="0" anchor="ctr"/>
+          <a:lstStyle/>
+          <a:p>
+            <a:pPr algn="ctr"/>
+          </a:p>
+        </p:txBody>
+      </p:sp>
+      <p:sp>
+        <p:nvSpPr>
+          <p:cNvPr id="46" name="TextBox 45"/>
+          <p:cNvSpPr txBox="1"/>
+          <p:nvPr/>
+        </p:nvSpPr>
+        <p:spPr>
+          <a:xfrm>
+            <a:off x="3977639" y="2404872"/>
+            <a:ext cx="1371600" cy="338328"/>
+          </a:xfrm>
+          <a:prstGeom prst="rect">
+            <a:avLst/>
+          </a:prstGeom>
+          <a:noFill/>
+        </p:spPr>
+        <p:txBody>
+          <a:bodyPr wrap="none">
+            <a:spAutoFit/>
+          </a:bodyPr>
+          <a:lstStyle/>
+          <a:p>
+            <a:pPr algn="l"/>
+            <a:r>
+              <a:rPr sz="1100" b="0" i="0">
+                <a:solidFill>
+                  <a:srgbClr val="CCD6E8"/>
+                </a:solidFill>
+              </a:rPr>
+              <a:t>binary_tree</a:t>
+            </a:r>
+          </a:p>
+        </p:txBody>
+      </p:sp>
+      <p:sp>
+        <p:nvSpPr>
+          <p:cNvPr id="47" name="TextBox 46"/>
+          <p:cNvSpPr txBox="1"/>
+          <p:nvPr/>
+        </p:nvSpPr>
+        <p:spPr>
+          <a:xfrm>
+            <a:off x="5394960" y="2404872"/>
+            <a:ext cx="914400" cy="338328"/>
+          </a:xfrm>
+          <a:prstGeom prst="rect">
+            <a:avLst/>
+          </a:prstGeom>
+          <a:noFill/>
+        </p:spPr>
+        <p:txBody>
+          <a:bodyPr wrap="none">
+            <a:spAutoFit/>
+          </a:bodyPr>
+          <a:lstStyle/>
+          <a:p>
+            <a:pPr algn="ctr"/>
+            <a:r>
+              <a:rPr sz="1100" b="1" i="0">
+                <a:solidFill>
+                  <a:srgbClr val="56D3A0"/>
+                </a:solidFill>
+              </a:rPr>
+              <a:t>+0.051</a:t>
+            </a:r>
+          </a:p>
+        </p:txBody>
+      </p:sp>
+      <p:sp>
+        <p:nvSpPr>
+          <p:cNvPr id="48" name="TextBox 47"/>
+          <p:cNvSpPr txBox="1"/>
+          <p:nvPr/>
+        </p:nvSpPr>
+        <p:spPr>
+          <a:xfrm>
+            <a:off x="6355079" y="2404872"/>
+            <a:ext cx="914400" cy="338328"/>
+          </a:xfrm>
+          <a:prstGeom prst="rect">
+            <a:avLst/>
+          </a:prstGeom>
+          <a:noFill/>
+        </p:spPr>
+        <p:txBody>
+          <a:bodyPr wrap="none">
+            <a:spAutoFit/>
+          </a:bodyPr>
+          <a:lstStyle/>
+          <a:p>
+            <a:pPr algn="ctr"/>
+            <a:r>
+              <a:rPr sz="1100" b="1" i="0">
+                <a:solidFill>
+                  <a:srgbClr val="56D3A0"/>
+                </a:solidFill>
+              </a:rPr>
+              <a:t>+0.058</a:t>
+            </a:r>
+          </a:p>
+        </p:txBody>
+      </p:sp>
+      <p:sp>
+        <p:nvSpPr>
+          <p:cNvPr id="49" name="Rectangle 48"/>
+          <p:cNvSpPr/>
+          <p:nvPr/>
+        </p:nvSpPr>
+        <p:spPr>
+          <a:xfrm>
+            <a:off x="3931920" y="2816352"/>
+            <a:ext cx="3520440" cy="429768"/>
+          </a:xfrm>
+          <a:prstGeom prst="rect">
+            <a:avLst/>
+          </a:prstGeom>
+          <a:solidFill>
+            <a:srgbClr val="16243E"/>
+          </a:solidFill>
+          <a:ln>
+            <a:noFill/>
+          </a:ln>
+        </p:spPr>
+        <p:style>
+          <a:lnRef idx="1">
+            <a:schemeClr val="accent1"/>
+          </a:lnRef>
+          <a:fillRef idx="3">
+            <a:schemeClr val="accent1"/>
+          </a:fillRef>
+          <a:effectRef idx="2">
+            <a:schemeClr val="accent1"/>
+          </a:effectRef>
+          <a:fontRef idx="minor">
+            <a:schemeClr val="lt1"/>
+          </a:fontRef>
+        </p:style>
+        <p:txBody>
+          <a:bodyPr rtlCol="0" anchor="ctr"/>
+          <a:lstStyle/>
+          <a:p>
+            <a:pPr algn="ctr"/>
+          </a:p>
+        </p:txBody>
+      </p:sp>
+      <p:sp>
+        <p:nvSpPr>
+          <p:cNvPr id="50" name="TextBox 49"/>
+          <p:cNvSpPr txBox="1"/>
+          <p:nvPr/>
+        </p:nvSpPr>
+        <p:spPr>
+          <a:xfrm>
+            <a:off x="3977639" y="2862072"/>
+            <a:ext cx="1371600" cy="338328"/>
+          </a:xfrm>
+          <a:prstGeom prst="rect">
+            <a:avLst/>
+          </a:prstGeom>
+          <a:noFill/>
+        </p:spPr>
+        <p:txBody>
+          <a:bodyPr wrap="none">
+            <a:spAutoFit/>
+          </a:bodyPr>
+          <a:lstStyle/>
+          <a:p>
+            <a:pPr algn="l"/>
+            <a:r>
+              <a:rPr sz="1100" b="0" i="0">
+                <a:solidFill>
+                  <a:srgbClr val="CCD6E8"/>
+                </a:solidFill>
+              </a:rPr>
+              <a:t>fft</a:t>
+            </a:r>
+          </a:p>
+        </p:txBody>
+      </p:sp>
+      <p:sp>
+        <p:nvSpPr>
+          <p:cNvPr id="51" name="TextBox 50"/>
+          <p:cNvSpPr txBox="1"/>
+          <p:nvPr/>
+        </p:nvSpPr>
+        <p:spPr>
+          <a:xfrm>
+            <a:off x="5394960" y="2862072"/>
+            <a:ext cx="914400" cy="338328"/>
+          </a:xfrm>
+          <a:prstGeom prst="rect">
+            <a:avLst/>
+          </a:prstGeom>
+          <a:noFill/>
+        </p:spPr>
+        <p:txBody>
+          <a:bodyPr wrap="none">
+            <a:spAutoFit/>
+          </a:bodyPr>
+          <a:lstStyle/>
+          <a:p>
+            <a:pPr algn="ctr"/>
+            <a:r>
+              <a:rPr sz="1100" b="1" i="0">
+                <a:solidFill>
+                  <a:srgbClr val="56D3A0"/>
+                </a:solidFill>
+              </a:rPr>
+              <a:t>+0.016</a:t>
+            </a:r>
+          </a:p>
+        </p:txBody>
+      </p:sp>
+      <p:sp>
+        <p:nvSpPr>
+          <p:cNvPr id="52" name="TextBox 51"/>
+          <p:cNvSpPr txBox="1"/>
+          <p:nvPr/>
+        </p:nvSpPr>
+        <p:spPr>
+          <a:xfrm>
+            <a:off x="6355079" y="2862072"/>
+            <a:ext cx="914400" cy="338328"/>
+          </a:xfrm>
+          <a:prstGeom prst="rect">
+            <a:avLst/>
+          </a:prstGeom>
+          <a:noFill/>
+        </p:spPr>
+        <p:txBody>
+          <a:bodyPr wrap="none">
+            <a:spAutoFit/>
+          </a:bodyPr>
+          <a:lstStyle/>
+          <a:p>
+            <a:pPr algn="ctr"/>
+            <a:r>
+              <a:rPr sz="1100" b="1" i="0">
+                <a:solidFill>
+                  <a:srgbClr val="56D3A0"/>
+                </a:solidFill>
+              </a:rPr>
+              <a:t>+0.030</a:t>
+            </a:r>
+          </a:p>
+        </p:txBody>
+      </p:sp>
+      <p:sp>
+        <p:nvSpPr>
+          <p:cNvPr id="53" name="Rectangle 52"/>
+          <p:cNvSpPr/>
+          <p:nvPr/>
+        </p:nvSpPr>
+        <p:spPr>
+          <a:xfrm>
+            <a:off x="3931920" y="3273552"/>
+            <a:ext cx="3520440" cy="429768"/>
+          </a:xfrm>
+          <a:prstGeom prst="rect">
+            <a:avLst/>
+          </a:prstGeom>
+          <a:solidFill>
+            <a:srgbClr val="0F172A"/>
+          </a:solidFill>
+          <a:ln>
+            <a:noFill/>
+          </a:ln>
+        </p:spPr>
+        <p:style>
+          <a:lnRef idx="1">
+            <a:schemeClr val="accent1"/>
+          </a:lnRef>
+          <a:fillRef idx="3">
+            <a:schemeClr val="accent1"/>
+          </a:fillRef>
+          <a:effectRef idx="2">
+            <a:schemeClr val="accent1"/>
+          </a:effectRef>
+          <a:fontRef idx="minor">
+            <a:schemeClr val="lt1"/>
+          </a:fontRef>
+        </p:style>
+        <p:txBody>
+          <a:bodyPr rtlCol="0" anchor="ctr"/>
+          <a:lstStyle/>
+          <a:p>
+            <a:pPr algn="ctr"/>
+          </a:p>
+        </p:txBody>
+      </p:sp>
+      <p:sp>
+        <p:nvSpPr>
+          <p:cNvPr id="54" name="TextBox 53"/>
+          <p:cNvSpPr txBox="1"/>
+          <p:nvPr/>
+        </p:nvSpPr>
+        <p:spPr>
+          <a:xfrm>
+            <a:off x="3977639" y="3319272"/>
+            <a:ext cx="1371600" cy="338328"/>
+          </a:xfrm>
+          <a:prstGeom prst="rect">
+            <a:avLst/>
+          </a:prstGeom>
+          <a:noFill/>
+        </p:spPr>
+        <p:txBody>
+          <a:bodyPr wrap="none">
+            <a:spAutoFit/>
+          </a:bodyPr>
+          <a:lstStyle/>
+          <a:p>
+            <a:pPr algn="l"/>
+            <a:r>
+              <a:rPr sz="1100" b="0" i="0">
+                <a:solidFill>
+                  <a:srgbClr val="CCD6E8"/>
+                </a:solidFill>
+              </a:rPr>
+              <a:t>interpreter</a:t>
+            </a:r>
+          </a:p>
+        </p:txBody>
+      </p:sp>
+      <p:sp>
+        <p:nvSpPr>
+          <p:cNvPr id="55" name="TextBox 54"/>
+          <p:cNvSpPr txBox="1"/>
+          <p:nvPr/>
+        </p:nvSpPr>
+        <p:spPr>
+          <a:xfrm>
+            <a:off x="5394960" y="3319272"/>
+            <a:ext cx="914400" cy="338328"/>
+          </a:xfrm>
+          <a:prstGeom prst="rect">
+            <a:avLst/>
+          </a:prstGeom>
+          <a:noFill/>
+        </p:spPr>
+        <p:txBody>
+          <a:bodyPr wrap="none">
+            <a:spAutoFit/>
+          </a:bodyPr>
+          <a:lstStyle/>
+          <a:p>
+            <a:pPr algn="ctr"/>
+            <a:r>
+              <a:rPr sz="1100" b="1" i="0">
+                <a:solidFill>
+                  <a:srgbClr val="56D3A0"/>
+                </a:solidFill>
+              </a:rPr>
+              <a:t>+0.306</a:t>
+            </a:r>
+          </a:p>
+        </p:txBody>
+      </p:sp>
+      <p:sp>
+        <p:nvSpPr>
+          <p:cNvPr id="56" name="TextBox 55"/>
+          <p:cNvSpPr txBox="1"/>
+          <p:nvPr/>
+        </p:nvSpPr>
+        <p:spPr>
+          <a:xfrm>
+            <a:off x="6355079" y="3319272"/>
+            <a:ext cx="914400" cy="338328"/>
+          </a:xfrm>
+          <a:prstGeom prst="rect">
+            <a:avLst/>
+          </a:prstGeom>
+          <a:noFill/>
+        </p:spPr>
+        <p:txBody>
+          <a:bodyPr wrap="none">
+            <a:spAutoFit/>
+          </a:bodyPr>
+          <a:lstStyle/>
+          <a:p>
+            <a:pPr algn="ctr"/>
+            <a:r>
+              <a:rPr sz="1100" b="1" i="0">
+                <a:solidFill>
+                  <a:srgbClr val="56D3A0"/>
+                </a:solidFill>
+              </a:rPr>
+              <a:t>+0.306</a:t>
+            </a:r>
+          </a:p>
+        </p:txBody>
+      </p:sp>
+      <p:sp>
+        <p:nvSpPr>
+          <p:cNvPr id="57" name="Rectangle 56"/>
+          <p:cNvSpPr/>
+          <p:nvPr/>
+        </p:nvSpPr>
+        <p:spPr>
+          <a:xfrm>
+            <a:off x="3931920" y="3730752"/>
+            <a:ext cx="3520440" cy="429768"/>
+          </a:xfrm>
+          <a:prstGeom prst="rect">
+            <a:avLst/>
+          </a:prstGeom>
+          <a:solidFill>
+            <a:srgbClr val="16243E"/>
+          </a:solidFill>
+          <a:ln>
+            <a:noFill/>
+          </a:ln>
+        </p:spPr>
+        <p:style>
+          <a:lnRef idx="1">
+            <a:schemeClr val="accent1"/>
+          </a:lnRef>
+          <a:fillRef idx="3">
+            <a:schemeClr val="accent1"/>
+          </a:fillRef>
+          <a:effectRef idx="2">
+            <a:schemeClr val="accent1"/>
+          </a:effectRef>
+          <a:fontRef idx="minor">
+            <a:schemeClr val="lt1"/>
+          </a:fontRef>
+        </p:style>
+        <p:txBody>
+          <a:bodyPr rtlCol="0" anchor="ctr"/>
+          <a:lstStyle/>
+          <a:p>
+            <a:pPr algn="ctr"/>
+          </a:p>
+        </p:txBody>
+      </p:sp>
+      <p:sp>
+        <p:nvSpPr>
+          <p:cNvPr id="58" name="TextBox 57"/>
+          <p:cNvSpPr txBox="1"/>
+          <p:nvPr/>
+        </p:nvSpPr>
+        <p:spPr>
+          <a:xfrm>
+            <a:off x="3977639" y="3776472"/>
+            <a:ext cx="1371600" cy="338328"/>
+          </a:xfrm>
+          <a:prstGeom prst="rect">
+            <a:avLst/>
+          </a:prstGeom>
+          <a:noFill/>
+        </p:spPr>
+        <p:txBody>
+          <a:bodyPr wrap="none">
+            <a:spAutoFit/>
+          </a:bodyPr>
+          <a:lstStyle/>
+          <a:p>
+            <a:pPr algn="l"/>
+            <a:r>
+              <a:rPr sz="1100" b="0" i="0">
+                <a:solidFill>
+                  <a:srgbClr val="CCD6E8"/>
+                </a:solidFill>
+              </a:rPr>
+              <a:t>kmp_search</a:t>
+            </a:r>
+          </a:p>
+        </p:txBody>
+      </p:sp>
+      <p:sp>
+        <p:nvSpPr>
+          <p:cNvPr id="59" name="TextBox 58"/>
+          <p:cNvSpPr txBox="1"/>
+          <p:nvPr/>
+        </p:nvSpPr>
+        <p:spPr>
+          <a:xfrm>
+            <a:off x="5394960" y="3776472"/>
+            <a:ext cx="914400" cy="338328"/>
+          </a:xfrm>
+          <a:prstGeom prst="rect">
+            <a:avLst/>
+          </a:prstGeom>
+          <a:noFill/>
+        </p:spPr>
+        <p:txBody>
+          <a:bodyPr wrap="none">
+            <a:spAutoFit/>
+          </a:bodyPr>
+          <a:lstStyle/>
+          <a:p>
+            <a:pPr algn="ctr"/>
+            <a:r>
+              <a:rPr sz="1100" b="1" i="0">
+                <a:solidFill>
+                  <a:srgbClr val="56D3A0"/>
+                </a:solidFill>
+              </a:rPr>
+              <a:t>+0.102</a:t>
+            </a:r>
+          </a:p>
+        </p:txBody>
+      </p:sp>
+      <p:sp>
+        <p:nvSpPr>
+          <p:cNvPr id="60" name="TextBox 59"/>
+          <p:cNvSpPr txBox="1"/>
+          <p:nvPr/>
+        </p:nvSpPr>
+        <p:spPr>
+          <a:xfrm>
+            <a:off x="6355079" y="3776472"/>
+            <a:ext cx="914400" cy="338328"/>
+          </a:xfrm>
+          <a:prstGeom prst="rect">
+            <a:avLst/>
+          </a:prstGeom>
+          <a:noFill/>
+        </p:spPr>
+        <p:txBody>
+          <a:bodyPr wrap="none">
+            <a:spAutoFit/>
+          </a:bodyPr>
+          <a:lstStyle/>
+          <a:p>
+            <a:pPr algn="ctr"/>
+            <a:r>
+              <a:rPr sz="1100" b="1" i="0">
+                <a:solidFill>
+                  <a:srgbClr val="56D3A0"/>
+                </a:solidFill>
+              </a:rPr>
+              <a:t>+0.107</a:t>
+            </a:r>
+          </a:p>
+        </p:txBody>
+      </p:sp>
+      <p:sp>
+        <p:nvSpPr>
+          <p:cNvPr id="61" name="Rectangle 60"/>
+          <p:cNvSpPr/>
+          <p:nvPr/>
+        </p:nvSpPr>
+        <p:spPr>
+          <a:xfrm>
+            <a:off x="3931920" y="4187952"/>
+            <a:ext cx="3520440" cy="429768"/>
+          </a:xfrm>
+          <a:prstGeom prst="rect">
+            <a:avLst/>
+          </a:prstGeom>
+          <a:solidFill>
+            <a:srgbClr val="0F172A"/>
+          </a:solidFill>
+          <a:ln>
+            <a:noFill/>
+          </a:ln>
+        </p:spPr>
+        <p:style>
+          <a:lnRef idx="1">
+            <a:schemeClr val="accent1"/>
+          </a:lnRef>
+          <a:fillRef idx="3">
+            <a:schemeClr val="accent1"/>
+          </a:fillRef>
+          <a:effectRef idx="2">
+            <a:schemeClr val="accent1"/>
+          </a:effectRef>
+          <a:fontRef idx="minor">
+            <a:schemeClr val="lt1"/>
+          </a:fontRef>
+        </p:style>
+        <p:txBody>
+          <a:bodyPr rtlCol="0" anchor="ctr"/>
+          <a:lstStyle/>
+          <a:p>
+            <a:pPr algn="ctr"/>
+          </a:p>
+        </p:txBody>
+      </p:sp>
+      <p:sp>
+        <p:nvSpPr>
+          <p:cNvPr id="62" name="TextBox 61"/>
+          <p:cNvSpPr txBox="1"/>
+          <p:nvPr/>
+        </p:nvSpPr>
+        <p:spPr>
+          <a:xfrm>
+            <a:off x="3977639" y="4233672"/>
+            <a:ext cx="1371600" cy="338328"/>
+          </a:xfrm>
+          <a:prstGeom prst="rect">
+            <a:avLst/>
+          </a:prstGeom>
+          <a:noFill/>
+        </p:spPr>
+        <p:txBody>
+          <a:bodyPr wrap="none">
+            <a:spAutoFit/>
+          </a:bodyPr>
+          <a:lstStyle/>
+          <a:p>
+            <a:pPr algn="l"/>
+            <a:r>
+              <a:rPr sz="1100" b="0" i="0">
+                <a:solidFill>
+                  <a:srgbClr val="CCD6E8"/>
+                </a:solidFill>
+              </a:rPr>
+              <a:t>poly_eval</a:t>
+            </a:r>
+          </a:p>
+        </p:txBody>
+      </p:sp>
+      <p:sp>
+        <p:nvSpPr>
+          <p:cNvPr id="63" name="TextBox 62"/>
+          <p:cNvSpPr txBox="1"/>
+          <p:nvPr/>
+        </p:nvSpPr>
+        <p:spPr>
+          <a:xfrm>
+            <a:off x="5394960" y="4233672"/>
+            <a:ext cx="914400" cy="338328"/>
+          </a:xfrm>
+          <a:prstGeom prst="rect">
+            <a:avLst/>
+          </a:prstGeom>
+          <a:noFill/>
+        </p:spPr>
+        <p:txBody>
+          <a:bodyPr wrap="none">
+            <a:spAutoFit/>
+          </a:bodyPr>
+          <a:lstStyle/>
+          <a:p>
+            <a:pPr algn="ctr"/>
+            <a:r>
+              <a:rPr sz="1100" b="1" i="0">
+                <a:solidFill>
+                  <a:srgbClr val="56D3A0"/>
+                </a:solidFill>
+              </a:rPr>
+              <a:t>+0.118</a:t>
+            </a:r>
+          </a:p>
+        </p:txBody>
+      </p:sp>
+      <p:sp>
+        <p:nvSpPr>
+          <p:cNvPr id="64" name="TextBox 63"/>
+          <p:cNvSpPr txBox="1"/>
+          <p:nvPr/>
+        </p:nvSpPr>
+        <p:spPr>
+          <a:xfrm>
+            <a:off x="6355079" y="4233672"/>
+            <a:ext cx="914400" cy="338328"/>
+          </a:xfrm>
+          <a:prstGeom prst="rect">
+            <a:avLst/>
+          </a:prstGeom>
+          <a:noFill/>
+        </p:spPr>
+        <p:txBody>
+          <a:bodyPr wrap="none">
+            <a:spAutoFit/>
+          </a:bodyPr>
+          <a:lstStyle/>
+          <a:p>
+            <a:pPr algn="ctr"/>
+            <a:r>
+              <a:rPr sz="1100" b="1" i="0">
+                <a:solidFill>
+                  <a:srgbClr val="56D3A0"/>
+                </a:solidFill>
+              </a:rPr>
+              <a:t>+0.133</a:t>
+            </a:r>
+          </a:p>
+        </p:txBody>
+      </p:sp>
+      <p:sp>
+        <p:nvSpPr>
+          <p:cNvPr id="65" name="Rectangle 64"/>
+          <p:cNvSpPr/>
+          <p:nvPr/>
+        </p:nvSpPr>
+        <p:spPr>
+          <a:xfrm>
+            <a:off x="7635240" y="1097280"/>
+            <a:ext cx="4343400" cy="365760"/>
+          </a:xfrm>
+          <a:prstGeom prst="rect">
+            <a:avLst/>
+          </a:prstGeom>
+          <a:solidFill>
+            <a:srgbClr val="FF6B6B"/>
+          </a:solidFill>
+          <a:ln>
+            <a:noFill/>
+          </a:ln>
+        </p:spPr>
+        <p:style>
+          <a:lnRef idx="1">
+            <a:schemeClr val="accent1"/>
+          </a:lnRef>
+          <a:fillRef idx="3">
+            <a:schemeClr val="accent1"/>
+          </a:fillRef>
+          <a:effectRef idx="2">
+            <a:schemeClr val="accent1"/>
+          </a:effectRef>
+          <a:fontRef idx="minor">
+            <a:schemeClr val="lt1"/>
+          </a:fontRef>
+        </p:style>
+        <p:txBody>
+          <a:bodyPr rtlCol="0" anchor="ctr"/>
+          <a:lstStyle/>
+          <a:p>
+            <a:pPr algn="ctr"/>
+          </a:p>
+        </p:txBody>
+      </p:sp>
+      <p:sp>
+        <p:nvSpPr>
+          <p:cNvPr id="66" name="TextBox 65"/>
+          <p:cNvSpPr txBox="1"/>
+          <p:nvPr/>
+        </p:nvSpPr>
+        <p:spPr>
+          <a:xfrm>
+            <a:off x="7671816" y="1133856"/>
+            <a:ext cx="4270248" cy="274320"/>
+          </a:xfrm>
+          <a:prstGeom prst="rect">
+            <a:avLst/>
+          </a:prstGeom>
+          <a:noFill/>
+        </p:spPr>
+        <p:txBody>
+          <a:bodyPr wrap="none">
+            <a:spAutoFit/>
+          </a:bodyPr>
+          <a:lstStyle/>
+          <a:p>
+            <a:pPr algn="ctr"/>
+            <a:r>
+              <a:rPr sz="1300" b="1" i="0">
+                <a:solidFill>
+                  <a:srgbClr val="FFFFFF"/>
+                </a:solidFill>
+              </a:rPr>
+              <a:t>IR Reduction vs Runtime Speedup (ir_corr)</a:t>
+            </a:r>
+          </a:p>
+        </p:txBody>
+      </p:sp>
+      <p:pic>
+        <p:nvPicPr>
+          <p:cNvPr id="67" name="Picture 66" descr="ir_corr.png"/>
+          <p:cNvPicPr>
+            <a:picLocks noChangeAspect="1"/>
+          </p:cNvPicPr>
+          <p:nvPr/>
+        </p:nvPicPr>
+        <p:blipFill>
+          <a:blip r:embed="rId2"/>
+          <a:stretch>
+            <a:fillRect/>
+          </a:stretch>
+        </p:blipFill>
+        <p:spPr>
+          <a:xfrm>
+            <a:off x="7635240" y="1499616"/>
+            <a:ext cx="4343400" cy="2895600"/>
+          </a:xfrm>
+          <a:prstGeom prst="rect">
+            <a:avLst/>
+          </a:prstGeom>
+        </p:spPr>
+      </p:pic>
+      <p:sp>
+        <p:nvSpPr>
+          <p:cNvPr id="68" name="TextBox 67"/>
+          <p:cNvSpPr txBox="1"/>
+          <p:nvPr/>
+        </p:nvSpPr>
+        <p:spPr>
+          <a:xfrm>
+            <a:off x="7635240" y="4919472"/>
+            <a:ext cx="4343400" cy="1645920"/>
           </a:xfrm>
           <a:prstGeom prst="rect">
             <a:avLst/>
@@ -16542,7 +18255,7 @@
               </a:spcAft>
             </a:pPr>
             <a:r>
-              <a:rPr sz="1300">
+              <a:rPr sz="1200">
                 <a:solidFill>
                   <a:srgbClr val="CCD6E8"/>
                 </a:solidFill>
@@ -16550,15 +18263,15 @@
               <a:t>▸ </a:t>
             </a:r>
             <a:r>
-              <a:rPr sz="1300" b="0" i="0">
-                <a:solidFill>
-                  <a:srgbClr val="CCD6E8"/>
-                </a:solidFill>
-              </a:rPr>
-              <a:t>Policy never learns to Stop early — always uses all K=</a:t>
-            </a:r>
-            <a:r>
-              <a:rPr sz="1300" b="0" i="0">
+              <a:rPr sz="1200" b="0" i="0">
+                <a:solidFill>
+                  <a:srgbClr val="CCD6E8"/>
+                </a:solidFill>
+              </a:rPr>
+              <a:t>Top </a:t>
+            </a:r>
+            <a:r>
+              <a:rPr sz="1200" b="0" i="0">
                 <a:solidFill>
                   <a:srgbClr val="FFD75E"/>
                 </a:solidFill>
@@ -16566,12 +18279,12 @@
               <a:t>20</a:t>
             </a:r>
             <a:r>
-              <a:rPr sz="1300" b="0" i="0">
-                <a:solidFill>
-                  <a:srgbClr val="CCD6E8"/>
-                </a:solidFill>
-              </a:rPr>
-              <a:t> steps</a:t>
+              <a:rPr sz="1200" b="0" i="0">
+                <a:solidFill>
+                  <a:srgbClr val="CCD6E8"/>
+                </a:solidFill>
+              </a:rPr>
+              <a:t> IR-step sequences all from fft</a:t>
             </a:r>
           </a:p>
           <a:p>
@@ -16581,7 +18294,7 @@
               </a:spcAft>
             </a:pPr>
             <a:r>
-              <a:rPr sz="1300">
+              <a:rPr sz="1200">
                 <a:solidFill>
                   <a:srgbClr val="CCD6E8"/>
                 </a:solidFill>
@@ -16589,12 +18302,122 @@
               <a:t>▸ </a:t>
             </a:r>
             <a:r>
-              <a:rPr sz="1300" b="0" i="0">
-                <a:solidFill>
-                  <a:srgbClr val="CCD6E8"/>
-                </a:solidFill>
-              </a:rPr>
-              <a:t>Rational given credit-assignment structure:</a:t>
+              <a:rPr sz="1200" b="0" i="0">
+                <a:solidFill>
+                  <a:srgbClr val="CCD6E8"/>
+                </a:solidFill>
+              </a:rPr>
+              <a:t>IR reduction: </a:t>
+            </a:r>
+            <a:r>
+              <a:rPr sz="1200" b="0" i="0">
+                <a:solidFill>
+                  <a:srgbClr val="FFD75E"/>
+                </a:solidFill>
+              </a:rPr>
+              <a:t>65</a:t>
+            </a:r>
+            <a:r>
+              <a:rPr sz="1200" b="0" i="0">
+                <a:solidFill>
+                  <a:srgbClr val="CCD6E8"/>
+                </a:solidFill>
+              </a:rPr>
+              <a:t>–</a:t>
+            </a:r>
+            <a:r>
+              <a:rPr sz="1200" b="0" i="0">
+                <a:solidFill>
+                  <a:srgbClr val="FFD75E"/>
+                </a:solidFill>
+              </a:rPr>
+              <a:t>67%</a:t>
+            </a:r>
+            <a:r>
+              <a:rPr sz="1200" b="0" i="0">
+                <a:solidFill>
+                  <a:srgbClr val="CCD6E8"/>
+                </a:solidFill>
+              </a:rPr>
+              <a:t>  (near-vertical cluster)</a:t>
+            </a:r>
+          </a:p>
+          <a:p>
+            <a:pPr>
+              <a:spcAft>
+                <a:spcPts val="300"/>
+              </a:spcAft>
+            </a:pPr>
+            <a:r>
+              <a:rPr sz="1200">
+                <a:solidFill>
+                  <a:srgbClr val="CCD6E8"/>
+                </a:solidFill>
+              </a:rPr>
+              <a:t>▸ </a:t>
+            </a:r>
+            <a:r>
+              <a:rPr sz="1200" b="0" i="0">
+                <a:solidFill>
+                  <a:srgbClr val="CCD6E8"/>
+                </a:solidFill>
+              </a:rPr>
+              <a:t>Runtime speedup: −</a:t>
+            </a:r>
+            <a:r>
+              <a:rPr sz="1200" b="0" i="0">
+                <a:solidFill>
+                  <a:srgbClr val="FFD75E"/>
+                </a:solidFill>
+              </a:rPr>
+              <a:t>8%</a:t>
+            </a:r>
+            <a:r>
+              <a:rPr sz="1200" b="0" i="0">
+                <a:solidFill>
+                  <a:srgbClr val="CCD6E8"/>
+                </a:solidFill>
+              </a:rPr>
+              <a:t> to −</a:t>
+            </a:r>
+            <a:r>
+              <a:rPr sz="1200" b="0" i="0">
+                <a:solidFill>
+                  <a:srgbClr val="FFD75E"/>
+                </a:solidFill>
+              </a:rPr>
+              <a:t>35%</a:t>
+            </a:r>
+            <a:r>
+              <a:rPr sz="1200" b="0" i="0">
+                <a:solidFill>
+                  <a:srgbClr val="CCD6E8"/>
+                </a:solidFill>
+              </a:rPr>
+              <a:t>  — all negative</a:t>
+            </a:r>
+          </a:p>
+          <a:p>
+            <a:pPr>
+              <a:spcAft>
+                <a:spcPts val="300"/>
+              </a:spcAft>
+            </a:pPr>
+            <a:r>
+              <a:rPr sz="1200">
+                <a:solidFill>
+                  <a:srgbClr val="CCD6E8"/>
+                </a:solidFill>
+              </a:rPr>
+              <a:t>▸ </a:t>
+            </a:r>
+            <a:r>
+              <a:rPr sz="1200" b="0" i="0">
+                <a:solidFill>
+                  <a:srgbClr val="CCD6E8"/>
+                </a:solidFill>
+              </a:rPr>
+              <a:t>Conclusion: IR reduction ≠ runtime improvement</a:t>
             </a:r>
           </a:p>
           <a:p>
@@ -16604,7 +18427,7 @@
               </a:spcAft>
             </a:pPr>
             <a:r>
-              <a:rPr sz="1300">
+              <a:rPr sz="1200">
                 <a:solidFill>
                   <a:srgbClr val="CCD6E8"/>
                 </a:solidFill>
@@ -16612,35 +18435,12 @@
               <a:t>  • </a:t>
             </a:r>
             <a:r>
-              <a:rPr sz="1300" b="0" i="0">
-                <a:solidFill>
-                  <a:srgbClr val="CCD6E8"/>
-                </a:solidFill>
-              </a:rPr>
-              <a:t>Q(Stop) = current speedup</a:t>
-            </a:r>
-          </a:p>
-          <a:p>
-            <a:pPr lvl="1">
-              <a:spcAft>
-                <a:spcPts val="300"/>
-              </a:spcAft>
-            </a:pPr>
-            <a:r>
-              <a:rPr sz="1300">
-                <a:solidFill>
-                  <a:srgbClr val="CCD6E8"/>
-                </a:solidFill>
-              </a:rPr>
-              <a:t>  • </a:t>
-            </a:r>
-            <a:r>
-              <a:rPr sz="1300" b="0" i="0">
-                <a:solidFill>
-                  <a:srgbClr val="CCD6E8"/>
-                </a:solidFill>
-              </a:rPr>
-              <a:t>Q(any pass) = E[future speedup] — uncertain, possibly higher</a:t>
+              <a:rPr sz="1200" b="0" i="0">
+                <a:solidFill>
+                  <a:srgbClr val="CCD6E8"/>
+                </a:solidFill>
+              </a:rPr>
+              <a:t>Stripping fft IR removes vectorization opportunities</a:t>
             </a:r>
           </a:p>
           <a:p>
@@ -16650,7 +18450,7 @@
               </a:spcAft>
             </a:pPr>
             <a:r>
-              <a:rPr sz="1300">
+              <a:rPr sz="1200">
                 <a:solidFill>
                   <a:srgbClr val="CCD6E8"/>
                 </a:solidFill>
@@ -16658,222 +18458,12 @@
               <a:t>▸ </a:t>
             </a:r>
             <a:r>
-              <a:rPr sz="1300" b="0" i="0">
-                <a:solidFill>
-                  <a:srgbClr val="CCD6E8"/>
-                </a:solidFill>
-              </a:rPr>
-              <a:t>No-op penalty helps at the margin but doesn't fix the asymmetry:</a:t>
-            </a:r>
-          </a:p>
-          <a:p>
-            <a:pPr lvl="1">
-              <a:spcAft>
-                <a:spcPts val="300"/>
-              </a:spcAft>
-            </a:pPr>
-            <a:r>
-              <a:rPr sz="1300">
-                <a:solidFill>
-                  <a:srgbClr val="CCD6E8"/>
-                </a:solidFill>
-              </a:rPr>
-              <a:t>  • </a:t>
-            </a:r>
-            <a:r>
-              <a:rPr sz="1300" b="0" i="0">
-                <a:solidFill>
-                  <a:srgbClr val="CCD6E8"/>
-                </a:solidFill>
-              </a:rPr>
-              <a:t>Cost of stopping: unbounded foregone gain</a:t>
-            </a:r>
-          </a:p>
-          <a:p>
-            <a:pPr lvl="1">
-              <a:spcAft>
-                <a:spcPts val="300"/>
-              </a:spcAft>
-            </a:pPr>
-            <a:r>
-              <a:rPr sz="1300">
-                <a:solidFill>
-                  <a:srgbClr val="CCD6E8"/>
-                </a:solidFill>
-              </a:rPr>
-              <a:t>  • </a:t>
-            </a:r>
-            <a:r>
-              <a:rPr sz="1300" b="0" i="0">
-                <a:solidFill>
-                  <a:srgbClr val="CCD6E8"/>
-                </a:solidFill>
-              </a:rPr>
-              <a:t>Cost of one more pass: at most p = </a:t>
-            </a:r>
-            <a:r>
-              <a:rPr sz="1300" b="0" i="0">
-                <a:solidFill>
-                  <a:srgbClr val="FFD75E"/>
-                </a:solidFill>
-              </a:rPr>
-              <a:t>0.025</a:t>
-            </a:r>
-          </a:p>
-          <a:p>
-            <a:pPr>
-              <a:spcAft>
-                <a:spcPts val="300"/>
-              </a:spcAft>
-            </a:pPr>
-            <a:r>
-              <a:rPr sz="1300">
-                <a:solidFill>
-                  <a:srgbClr val="CCD6E8"/>
-                </a:solidFill>
-              </a:rPr>
-              <a:t>▸ </a:t>
-            </a:r>
-            <a:r>
-              <a:rPr sz="1300" b="0" i="0">
-                <a:solidFill>
-                  <a:srgbClr val="CCD6E8"/>
-                </a:solidFill>
-              </a:rPr>
-              <a:t>Many top sequences: </a:t>
-            </a:r>
-            <a:r>
-              <a:rPr sz="1300" b="0" i="0">
-                <a:solidFill>
-                  <a:srgbClr val="FFD75E"/>
-                </a:solidFill>
-              </a:rPr>
-              <a:t>5</a:t>
-            </a:r>
-            <a:r>
-              <a:rPr sz="1300" b="0" i="0">
-                <a:solidFill>
-                  <a:srgbClr val="CCD6E8"/>
-                </a:solidFill>
-              </a:rPr>
-              <a:t>–</a:t>
-            </a:r>
-            <a:r>
-              <a:rPr sz="1300" b="0" i="0">
-                <a:solidFill>
-                  <a:srgbClr val="FFD75E"/>
-                </a:solidFill>
-              </a:rPr>
-              <a:t>7</a:t>
-            </a:r>
-            <a:r>
-              <a:rPr sz="1300" b="0" i="0">
-                <a:solidFill>
-                  <a:srgbClr val="CCD6E8"/>
-                </a:solidFill>
-              </a:rPr>
-              <a:t> repetitions of dominant pass</a:t>
-            </a:r>
-          </a:p>
-          <a:p>
-            <a:pPr lvl="1">
-              <a:spcAft>
-                <a:spcPts val="300"/>
-              </a:spcAft>
-            </a:pPr>
-            <a:r>
-              <a:rPr sz="1300">
-                <a:solidFill>
-                  <a:srgbClr val="CCD6E8"/>
-                </a:solidFill>
-              </a:rPr>
-              <a:t>  • </a:t>
-            </a:r>
-            <a:r>
-              <a:rPr sz="1300" b="0" i="0">
-                <a:solidFill>
-                  <a:srgbClr val="CCD6E8"/>
-                </a:solidFill>
-              </a:rPr>
-              <a:t>Repeating is safe and occasionally lucky</a:t>
-            </a:r>
-          </a:p>
-        </p:txBody>
-      </p:sp>
-      <p:sp>
-        <p:nvSpPr>
-          <p:cNvPr id="9" name="TextBox 8"/>
-          <p:cNvSpPr txBox="1"/>
-          <p:nvPr/>
-        </p:nvSpPr>
-        <p:spPr>
-          <a:xfrm>
-            <a:off x="6035040" y="4937760"/>
-            <a:ext cx="5715000" cy="329184"/>
-          </a:xfrm>
-          <a:prstGeom prst="rect">
-            <a:avLst/>
-          </a:prstGeom>
-          <a:noFill/>
-        </p:spPr>
-        <p:txBody>
-          <a:bodyPr wrap="none">
-            <a:spAutoFit/>
-          </a:bodyPr>
-          <a:lstStyle/>
-          <a:p>
-            <a:pPr algn="l"/>
-            <a:r>
-              <a:rPr sz="1400" b="1" i="0">
-                <a:solidFill>
-                  <a:srgbClr val="56D3A0"/>
-                </a:solidFill>
-              </a:rPr>
-              <a:t>Potential Fix:</a:t>
-            </a:r>
-          </a:p>
-        </p:txBody>
-      </p:sp>
-      <p:sp>
-        <p:nvSpPr>
-          <p:cNvPr id="10" name="TextBox 9"/>
-          <p:cNvSpPr txBox="1"/>
-          <p:nvPr/>
-        </p:nvSpPr>
-        <p:spPr>
-          <a:xfrm>
-            <a:off x="6035040" y="5321808"/>
-            <a:ext cx="5715000" cy="822960"/>
-          </a:xfrm>
-          <a:prstGeom prst="rect">
-            <a:avLst/>
-          </a:prstGeom>
-          <a:noFill/>
-        </p:spPr>
-        <p:txBody>
-          <a:bodyPr wrap="none"/>
-          <a:lstStyle/>
-          <a:p>
-            <a:pPr>
-              <a:spcAft>
-                <a:spcPts val="300"/>
-              </a:spcAft>
-            </a:pPr>
-            <a:r>
-              <a:rPr sz="1300">
-                <a:solidFill>
-                  <a:srgbClr val="CCD6E8"/>
-                </a:solidFill>
-              </a:rPr>
-              <a:t>▸ </a:t>
-            </a:r>
-            <a:r>
-              <a:rPr sz="1300" b="0" i="0">
-                <a:solidFill>
-                  <a:srgbClr val="CCD6E8"/>
-                </a:solidFill>
-              </a:rPr>
-              <a:t>Per-step length cost, or Stop bonus ≥ E[marginal return from one more pass]</a:t>
+              <a:rPr sz="1200" b="0" i="0">
+                <a:solidFill>
+                  <a:srgbClr val="CCD6E8"/>
+                </a:solidFill>
+              </a:rPr>
+              <a:t>Explains why weighted return underperforms episode</a:t>
             </a:r>
           </a:p>
         </p:txBody>
@@ -18496,7 +20086,7 @@
                   <a:srgbClr val="FFFFFF"/>
                 </a:solidFill>
               </a:rPr>
-              <a:t>Limitations &amp; Future Work</a:t>
+              <a:t>Results Summary &amp; Pool-Training Outcome</a:t>
             </a:r>
           </a:p>
         </p:txBody>
@@ -18509,8 +20099,937 @@
         </p:nvSpPr>
         <p:spPr>
           <a:xfrm>
-            <a:off x="411480" y="1143000"/>
-            <a:ext cx="5394960" cy="2560320"/>
+            <a:off x="320040" y="1115568"/>
+            <a:ext cx="7406640" cy="347472"/>
+          </a:xfrm>
+          <a:prstGeom prst="rect">
+            <a:avLst/>
+          </a:prstGeom>
+          <a:noFill/>
+        </p:spPr>
+        <p:txBody>
+          <a:bodyPr wrap="none">
+            <a:spAutoFit/>
+          </a:bodyPr>
+          <a:lstStyle/>
+          <a:p>
+            <a:pPr algn="l"/>
+            <a:r>
+              <a:rPr sz="1700" b="1" i="0">
+                <a:solidFill>
+                  <a:srgbClr val="FFFFFF"/>
+                </a:solidFill>
+              </a:rPr>
+              <a:t>Architecture × Return Summary</a:t>
+            </a:r>
+          </a:p>
+        </p:txBody>
+      </p:sp>
+      <p:sp>
+        <p:nvSpPr>
+          <p:cNvPr id="6" name="Rectangle 5"/>
+          <p:cNvSpPr/>
+          <p:nvPr/>
+        </p:nvSpPr>
+        <p:spPr>
+          <a:xfrm>
+            <a:off x="320040" y="1536192"/>
+            <a:ext cx="7406640" cy="475488"/>
+          </a:xfrm>
+          <a:prstGeom prst="rect">
+            <a:avLst/>
+          </a:prstGeom>
+          <a:solidFill>
+            <a:srgbClr val="4A9EFF"/>
+          </a:solidFill>
+          <a:ln>
+            <a:noFill/>
+          </a:ln>
+        </p:spPr>
+        <p:style>
+          <a:lnRef idx="1">
+            <a:schemeClr val="accent1"/>
+          </a:lnRef>
+          <a:fillRef idx="3">
+            <a:schemeClr val="accent1"/>
+          </a:fillRef>
+          <a:effectRef idx="2">
+            <a:schemeClr val="accent1"/>
+          </a:effectRef>
+          <a:fontRef idx="minor">
+            <a:schemeClr val="lt1"/>
+          </a:fontRef>
+        </p:style>
+        <p:txBody>
+          <a:bodyPr rtlCol="0" anchor="ctr"/>
+          <a:lstStyle/>
+          <a:p>
+            <a:pPr algn="ctr"/>
+          </a:p>
+        </p:txBody>
+      </p:sp>
+      <p:sp>
+        <p:nvSpPr>
+          <p:cNvPr id="7" name="TextBox 6"/>
+          <p:cNvSpPr txBox="1"/>
+          <p:nvPr/>
+        </p:nvSpPr>
+        <p:spPr>
+          <a:xfrm>
+            <a:off x="365759" y="1591056"/>
+            <a:ext cx="2011679" cy="365760"/>
+          </a:xfrm>
+          <a:prstGeom prst="rect">
+            <a:avLst/>
+          </a:prstGeom>
+          <a:noFill/>
+        </p:spPr>
+        <p:txBody>
+          <a:bodyPr wrap="none">
+            <a:spAutoFit/>
+          </a:bodyPr>
+          <a:lstStyle/>
+          <a:p>
+            <a:pPr algn="l"/>
+            <a:r>
+              <a:rPr sz="1400" b="1" i="0">
+                <a:solidFill>
+                  <a:srgbClr val="0F172A"/>
+                </a:solidFill>
+              </a:rPr>
+              <a:t>Architecture</a:t>
+            </a:r>
+          </a:p>
+        </p:txBody>
+      </p:sp>
+      <p:sp>
+        <p:nvSpPr>
+          <p:cNvPr id="8" name="TextBox 7"/>
+          <p:cNvSpPr txBox="1"/>
+          <p:nvPr/>
+        </p:nvSpPr>
+        <p:spPr>
+          <a:xfrm>
+            <a:off x="2514600" y="1591056"/>
+            <a:ext cx="2057400" cy="365760"/>
+          </a:xfrm>
+          <a:prstGeom prst="rect">
+            <a:avLst/>
+          </a:prstGeom>
+          <a:noFill/>
+        </p:spPr>
+        <p:txBody>
+          <a:bodyPr wrap="none">
+            <a:spAutoFit/>
+          </a:bodyPr>
+          <a:lstStyle/>
+          <a:p>
+            <a:pPr algn="ctr"/>
+            <a:r>
+              <a:rPr sz="1400" b="1" i="0">
+                <a:solidFill>
+                  <a:srgbClr val="0F172A"/>
+                </a:solidFill>
+              </a:rPr>
+              <a:t>Return</a:t>
+            </a:r>
+          </a:p>
+        </p:txBody>
+      </p:sp>
+      <p:sp>
+        <p:nvSpPr>
+          <p:cNvPr id="9" name="TextBox 8"/>
+          <p:cNvSpPr txBox="1"/>
+          <p:nvPr/>
+        </p:nvSpPr>
+        <p:spPr>
+          <a:xfrm>
+            <a:off x="4709159" y="1591056"/>
+            <a:ext cx="1645919" cy="365760"/>
+          </a:xfrm>
+          <a:prstGeom prst="rect">
+            <a:avLst/>
+          </a:prstGeom>
+          <a:noFill/>
+        </p:spPr>
+        <p:txBody>
+          <a:bodyPr wrap="none">
+            <a:spAutoFit/>
+          </a:bodyPr>
+          <a:lstStyle/>
+          <a:p>
+            <a:pPr algn="ctr"/>
+            <a:r>
+              <a:rPr sz="1400" b="1" i="0">
+                <a:solidFill>
+                  <a:srgbClr val="0F172A"/>
+                </a:solidFill>
+              </a:rPr>
+              <a:t>Greedy mean</a:t>
+            </a:r>
+          </a:p>
+        </p:txBody>
+      </p:sp>
+      <p:sp>
+        <p:nvSpPr>
+          <p:cNvPr id="10" name="TextBox 9"/>
+          <p:cNvSpPr txBox="1"/>
+          <p:nvPr/>
+        </p:nvSpPr>
+        <p:spPr>
+          <a:xfrm>
+            <a:off x="6492240" y="1591056"/>
+            <a:ext cx="1143000" cy="365760"/>
+          </a:xfrm>
+          <a:prstGeom prst="rect">
+            <a:avLst/>
+          </a:prstGeom>
+          <a:noFill/>
+        </p:spPr>
+        <p:txBody>
+          <a:bodyPr wrap="none">
+            <a:spAutoFit/>
+          </a:bodyPr>
+          <a:lstStyle/>
+          <a:p>
+            <a:pPr algn="ctr"/>
+            <a:r>
+              <a:rPr sz="1400" b="1" i="0">
+                <a:solidFill>
+                  <a:srgbClr val="0F172A"/>
+                </a:solidFill>
+              </a:rPr>
+              <a:t>Train EV</a:t>
+            </a:r>
+          </a:p>
+        </p:txBody>
+      </p:sp>
+      <p:sp>
+        <p:nvSpPr>
+          <p:cNvPr id="11" name="Rectangle 10"/>
+          <p:cNvSpPr/>
+          <p:nvPr/>
+        </p:nvSpPr>
+        <p:spPr>
+          <a:xfrm>
+            <a:off x="320040" y="2039112"/>
+            <a:ext cx="7406640" cy="475488"/>
+          </a:xfrm>
+          <a:prstGeom prst="rect">
+            <a:avLst/>
+          </a:prstGeom>
+          <a:solidFill>
+            <a:srgbClr val="0A2214"/>
+          </a:solidFill>
+          <a:ln>
+            <a:noFill/>
+          </a:ln>
+        </p:spPr>
+        <p:style>
+          <a:lnRef idx="1">
+            <a:schemeClr val="accent1"/>
+          </a:lnRef>
+          <a:fillRef idx="3">
+            <a:schemeClr val="accent1"/>
+          </a:fillRef>
+          <a:effectRef idx="2">
+            <a:schemeClr val="accent1"/>
+          </a:effectRef>
+          <a:fontRef idx="minor">
+            <a:schemeClr val="lt1"/>
+          </a:fontRef>
+        </p:style>
+        <p:txBody>
+          <a:bodyPr rtlCol="0" anchor="ctr"/>
+          <a:lstStyle/>
+          <a:p>
+            <a:pPr algn="ctr"/>
+          </a:p>
+        </p:txBody>
+      </p:sp>
+      <p:sp>
+        <p:nvSpPr>
+          <p:cNvPr id="12" name="TextBox 11"/>
+          <p:cNvSpPr txBox="1"/>
+          <p:nvPr/>
+        </p:nvSpPr>
+        <p:spPr>
+          <a:xfrm>
+            <a:off x="365759" y="2093976"/>
+            <a:ext cx="2011679" cy="365760"/>
+          </a:xfrm>
+          <a:prstGeom prst="rect">
+            <a:avLst/>
+          </a:prstGeom>
+          <a:noFill/>
+        </p:spPr>
+        <p:txBody>
+          <a:bodyPr wrap="none">
+            <a:spAutoFit/>
+          </a:bodyPr>
+          <a:lstStyle/>
+          <a:p>
+            <a:pPr algn="l"/>
+            <a:r>
+              <a:rPr sz="1400" b="0" i="0">
+                <a:solidFill>
+                  <a:srgbClr val="FFFFFF"/>
+                </a:solidFill>
+              </a:rPr>
+              <a:t>Auto-TFX</a:t>
+            </a:r>
+          </a:p>
+        </p:txBody>
+      </p:sp>
+      <p:sp>
+        <p:nvSpPr>
+          <p:cNvPr id="13" name="TextBox 12"/>
+          <p:cNvSpPr txBox="1"/>
+          <p:nvPr/>
+        </p:nvSpPr>
+        <p:spPr>
+          <a:xfrm>
+            <a:off x="2514600" y="2093976"/>
+            <a:ext cx="2057400" cy="365760"/>
+          </a:xfrm>
+          <a:prstGeom prst="rect">
+            <a:avLst/>
+          </a:prstGeom>
+          <a:noFill/>
+        </p:spPr>
+        <p:txBody>
+          <a:bodyPr wrap="none">
+            <a:spAutoFit/>
+          </a:bodyPr>
+          <a:lstStyle/>
+          <a:p>
+            <a:pPr algn="ctr"/>
+            <a:r>
+              <a:rPr sz="1400" b="0" i="0">
+                <a:solidFill>
+                  <a:srgbClr val="FFFFFF"/>
+                </a:solidFill>
+              </a:rPr>
+              <a:t>Episode</a:t>
+            </a:r>
+          </a:p>
+        </p:txBody>
+      </p:sp>
+      <p:sp>
+        <p:nvSpPr>
+          <p:cNvPr id="14" name="TextBox 13"/>
+          <p:cNvSpPr txBox="1"/>
+          <p:nvPr/>
+        </p:nvSpPr>
+        <p:spPr>
+          <a:xfrm>
+            <a:off x="4709159" y="2093976"/>
+            <a:ext cx="1645919" cy="365760"/>
+          </a:xfrm>
+          <a:prstGeom prst="rect">
+            <a:avLst/>
+          </a:prstGeom>
+          <a:noFill/>
+        </p:spPr>
+        <p:txBody>
+          <a:bodyPr wrap="none">
+            <a:spAutoFit/>
+          </a:bodyPr>
+          <a:lstStyle/>
+          <a:p>
+            <a:pPr algn="ctr"/>
+            <a:r>
+              <a:rPr sz="1400" b="1" i="0">
+                <a:solidFill>
+                  <a:srgbClr val="56D3A0"/>
+                </a:solidFill>
+              </a:rPr>
+              <a:t>+10.4%</a:t>
+            </a:r>
+          </a:p>
+        </p:txBody>
+      </p:sp>
+      <p:sp>
+        <p:nvSpPr>
+          <p:cNvPr id="15" name="TextBox 14"/>
+          <p:cNvSpPr txBox="1"/>
+          <p:nvPr/>
+        </p:nvSpPr>
+        <p:spPr>
+          <a:xfrm>
+            <a:off x="6492240" y="2093976"/>
+            <a:ext cx="1143000" cy="365760"/>
+          </a:xfrm>
+          <a:prstGeom prst="rect">
+            <a:avLst/>
+          </a:prstGeom>
+          <a:noFill/>
+        </p:spPr>
+        <p:txBody>
+          <a:bodyPr wrap="none">
+            <a:spAutoFit/>
+          </a:bodyPr>
+          <a:lstStyle/>
+          <a:p>
+            <a:pPr algn="ctr"/>
+            <a:r>
+              <a:rPr sz="1400" b="0" i="0">
+                <a:solidFill>
+                  <a:srgbClr val="FFD75E"/>
+                </a:solidFill>
+              </a:rPr>
+              <a:t>0.69</a:t>
+            </a:r>
+          </a:p>
+        </p:txBody>
+      </p:sp>
+      <p:sp>
+        <p:nvSpPr>
+          <p:cNvPr id="16" name="Rectangle 15"/>
+          <p:cNvSpPr/>
+          <p:nvPr/>
+        </p:nvSpPr>
+        <p:spPr>
+          <a:xfrm>
+            <a:off x="320040" y="2542032"/>
+            <a:ext cx="7406640" cy="475488"/>
+          </a:xfrm>
+          <a:prstGeom prst="rect">
+            <a:avLst/>
+          </a:prstGeom>
+          <a:solidFill>
+            <a:srgbClr val="0A2214"/>
+          </a:solidFill>
+          <a:ln>
+            <a:noFill/>
+          </a:ln>
+        </p:spPr>
+        <p:style>
+          <a:lnRef idx="1">
+            <a:schemeClr val="accent1"/>
+          </a:lnRef>
+          <a:fillRef idx="3">
+            <a:schemeClr val="accent1"/>
+          </a:fillRef>
+          <a:effectRef idx="2">
+            <a:schemeClr val="accent1"/>
+          </a:effectRef>
+          <a:fontRef idx="minor">
+            <a:schemeClr val="lt1"/>
+          </a:fontRef>
+        </p:style>
+        <p:txBody>
+          <a:bodyPr rtlCol="0" anchor="ctr"/>
+          <a:lstStyle/>
+          <a:p>
+            <a:pPr algn="ctr"/>
+          </a:p>
+        </p:txBody>
+      </p:sp>
+      <p:sp>
+        <p:nvSpPr>
+          <p:cNvPr id="17" name="TextBox 16"/>
+          <p:cNvSpPr txBox="1"/>
+          <p:nvPr/>
+        </p:nvSpPr>
+        <p:spPr>
+          <a:xfrm>
+            <a:off x="365759" y="2596896"/>
+            <a:ext cx="2011679" cy="365760"/>
+          </a:xfrm>
+          <a:prstGeom prst="rect">
+            <a:avLst/>
+          </a:prstGeom>
+          <a:noFill/>
+        </p:spPr>
+        <p:txBody>
+          <a:bodyPr wrap="none">
+            <a:spAutoFit/>
+          </a:bodyPr>
+          <a:lstStyle/>
+          <a:p>
+            <a:pPr algn="l"/>
+            <a:r>
+              <a:rPr sz="1400" b="0" i="0">
+                <a:solidFill>
+                  <a:srgbClr val="FFFFFF"/>
+                </a:solidFill>
+              </a:rPr>
+              <a:t>Auto-GRU</a:t>
+            </a:r>
+          </a:p>
+        </p:txBody>
+      </p:sp>
+      <p:sp>
+        <p:nvSpPr>
+          <p:cNvPr id="18" name="TextBox 17"/>
+          <p:cNvSpPr txBox="1"/>
+          <p:nvPr/>
+        </p:nvSpPr>
+        <p:spPr>
+          <a:xfrm>
+            <a:off x="2514600" y="2596896"/>
+            <a:ext cx="2057400" cy="365760"/>
+          </a:xfrm>
+          <a:prstGeom prst="rect">
+            <a:avLst/>
+          </a:prstGeom>
+          <a:noFill/>
+        </p:spPr>
+        <p:txBody>
+          <a:bodyPr wrap="none">
+            <a:spAutoFit/>
+          </a:bodyPr>
+          <a:lstStyle/>
+          <a:p>
+            <a:pPr algn="ctr"/>
+            <a:r>
+              <a:rPr sz="1400" b="0" i="0">
+                <a:solidFill>
+                  <a:srgbClr val="FFFFFF"/>
+                </a:solidFill>
+              </a:rPr>
+              <a:t>Episode</a:t>
+            </a:r>
+          </a:p>
+        </p:txBody>
+      </p:sp>
+      <p:sp>
+        <p:nvSpPr>
+          <p:cNvPr id="19" name="TextBox 18"/>
+          <p:cNvSpPr txBox="1"/>
+          <p:nvPr/>
+        </p:nvSpPr>
+        <p:spPr>
+          <a:xfrm>
+            <a:off x="4709159" y="2596896"/>
+            <a:ext cx="1645919" cy="365760"/>
+          </a:xfrm>
+          <a:prstGeom prst="rect">
+            <a:avLst/>
+          </a:prstGeom>
+          <a:noFill/>
+        </p:spPr>
+        <p:txBody>
+          <a:bodyPr wrap="none">
+            <a:spAutoFit/>
+          </a:bodyPr>
+          <a:lstStyle/>
+          <a:p>
+            <a:pPr algn="ctr"/>
+            <a:r>
+              <a:rPr sz="1400" b="1" i="0">
+                <a:solidFill>
+                  <a:srgbClr val="56D3A0"/>
+                </a:solidFill>
+              </a:rPr>
+              <a:t>+11.4%</a:t>
+            </a:r>
+          </a:p>
+        </p:txBody>
+      </p:sp>
+      <p:sp>
+        <p:nvSpPr>
+          <p:cNvPr id="20" name="TextBox 19"/>
+          <p:cNvSpPr txBox="1"/>
+          <p:nvPr/>
+        </p:nvSpPr>
+        <p:spPr>
+          <a:xfrm>
+            <a:off x="6492240" y="2596896"/>
+            <a:ext cx="1143000" cy="365760"/>
+          </a:xfrm>
+          <a:prstGeom prst="rect">
+            <a:avLst/>
+          </a:prstGeom>
+          <a:noFill/>
+        </p:spPr>
+        <p:txBody>
+          <a:bodyPr wrap="none">
+            <a:spAutoFit/>
+          </a:bodyPr>
+          <a:lstStyle/>
+          <a:p>
+            <a:pPr algn="ctr"/>
+            <a:r>
+              <a:rPr sz="1400" b="0" i="0">
+                <a:solidFill>
+                  <a:srgbClr val="FFD75E"/>
+                </a:solidFill>
+              </a:rPr>
+              <a:t>0.59</a:t>
+            </a:r>
+          </a:p>
+        </p:txBody>
+      </p:sp>
+      <p:sp>
+        <p:nvSpPr>
+          <p:cNvPr id="21" name="Rectangle 20"/>
+          <p:cNvSpPr/>
+          <p:nvPr/>
+        </p:nvSpPr>
+        <p:spPr>
+          <a:xfrm>
+            <a:off x="320040" y="3044952"/>
+            <a:ext cx="7406640" cy="475488"/>
+          </a:xfrm>
+          <a:prstGeom prst="rect">
+            <a:avLst/>
+          </a:prstGeom>
+          <a:solidFill>
+            <a:srgbClr val="22140A"/>
+          </a:solidFill>
+          <a:ln>
+            <a:noFill/>
+          </a:ln>
+        </p:spPr>
+        <p:style>
+          <a:lnRef idx="1">
+            <a:schemeClr val="accent1"/>
+          </a:lnRef>
+          <a:fillRef idx="3">
+            <a:schemeClr val="accent1"/>
+          </a:fillRef>
+          <a:effectRef idx="2">
+            <a:schemeClr val="accent1"/>
+          </a:effectRef>
+          <a:fontRef idx="minor">
+            <a:schemeClr val="lt1"/>
+          </a:fontRef>
+        </p:style>
+        <p:txBody>
+          <a:bodyPr rtlCol="0" anchor="ctr"/>
+          <a:lstStyle/>
+          <a:p>
+            <a:pPr algn="ctr"/>
+          </a:p>
+        </p:txBody>
+      </p:sp>
+      <p:sp>
+        <p:nvSpPr>
+          <p:cNvPr id="22" name="TextBox 21"/>
+          <p:cNvSpPr txBox="1"/>
+          <p:nvPr/>
+        </p:nvSpPr>
+        <p:spPr>
+          <a:xfrm>
+            <a:off x="365759" y="3099816"/>
+            <a:ext cx="2011679" cy="365760"/>
+          </a:xfrm>
+          <a:prstGeom prst="rect">
+            <a:avLst/>
+          </a:prstGeom>
+          <a:noFill/>
+        </p:spPr>
+        <p:txBody>
+          <a:bodyPr wrap="none">
+            <a:spAutoFit/>
+          </a:bodyPr>
+          <a:lstStyle/>
+          <a:p>
+            <a:pPr algn="l"/>
+            <a:r>
+              <a:rPr sz="1400" b="0" i="0">
+                <a:solidFill>
+                  <a:srgbClr val="FFFFFF"/>
+                </a:solidFill>
+              </a:rPr>
+              <a:t>Auto-TFX</a:t>
+            </a:r>
+          </a:p>
+        </p:txBody>
+      </p:sp>
+      <p:sp>
+        <p:nvSpPr>
+          <p:cNvPr id="23" name="TextBox 22"/>
+          <p:cNvSpPr txBox="1"/>
+          <p:nvPr/>
+        </p:nvSpPr>
+        <p:spPr>
+          <a:xfrm>
+            <a:off x="2514600" y="3099816"/>
+            <a:ext cx="2057400" cy="365760"/>
+          </a:xfrm>
+          <a:prstGeom prst="rect">
+            <a:avLst/>
+          </a:prstGeom>
+          <a:noFill/>
+        </p:spPr>
+        <p:txBody>
+          <a:bodyPr wrap="none">
+            <a:spAutoFit/>
+          </a:bodyPr>
+          <a:lstStyle/>
+          <a:p>
+            <a:pPr algn="ctr"/>
+            <a:r>
+              <a:rPr sz="1400" b="0" i="0">
+                <a:solidFill>
+                  <a:srgbClr val="FFFFFF"/>
+                </a:solidFill>
+              </a:rPr>
+              <a:t>Weighted</a:t>
+            </a:r>
+          </a:p>
+        </p:txBody>
+      </p:sp>
+      <p:sp>
+        <p:nvSpPr>
+          <p:cNvPr id="24" name="TextBox 23"/>
+          <p:cNvSpPr txBox="1"/>
+          <p:nvPr/>
+        </p:nvSpPr>
+        <p:spPr>
+          <a:xfrm>
+            <a:off x="4709159" y="3099816"/>
+            <a:ext cx="1645919" cy="365760"/>
+          </a:xfrm>
+          <a:prstGeom prst="rect">
+            <a:avLst/>
+          </a:prstGeom>
+          <a:noFill/>
+        </p:spPr>
+        <p:txBody>
+          <a:bodyPr wrap="none">
+            <a:spAutoFit/>
+          </a:bodyPr>
+          <a:lstStyle/>
+          <a:p>
+            <a:pPr algn="ctr"/>
+            <a:r>
+              <a:rPr sz="1400" b="1" i="0">
+                <a:solidFill>
+                  <a:srgbClr val="FFA040"/>
+                </a:solidFill>
+              </a:rPr>
+              <a:t>+6.5%</a:t>
+            </a:r>
+          </a:p>
+        </p:txBody>
+      </p:sp>
+      <p:sp>
+        <p:nvSpPr>
+          <p:cNvPr id="25" name="TextBox 24"/>
+          <p:cNvSpPr txBox="1"/>
+          <p:nvPr/>
+        </p:nvSpPr>
+        <p:spPr>
+          <a:xfrm>
+            <a:off x="6492240" y="3099816"/>
+            <a:ext cx="1143000" cy="365760"/>
+          </a:xfrm>
+          <a:prstGeom prst="rect">
+            <a:avLst/>
+          </a:prstGeom>
+          <a:noFill/>
+        </p:spPr>
+        <p:txBody>
+          <a:bodyPr wrap="none">
+            <a:spAutoFit/>
+          </a:bodyPr>
+          <a:lstStyle/>
+          <a:p>
+            <a:pPr algn="ctr"/>
+            <a:r>
+              <a:rPr sz="1400" b="0" i="0">
+                <a:solidFill>
+                  <a:srgbClr val="FFD75E"/>
+                </a:solidFill>
+              </a:rPr>
+              <a:t>0.87</a:t>
+            </a:r>
+          </a:p>
+        </p:txBody>
+      </p:sp>
+      <p:sp>
+        <p:nvSpPr>
+          <p:cNvPr id="26" name="Rectangle 25"/>
+          <p:cNvSpPr/>
+          <p:nvPr/>
+        </p:nvSpPr>
+        <p:spPr>
+          <a:xfrm>
+            <a:off x="320040" y="3547872"/>
+            <a:ext cx="7406640" cy="475488"/>
+          </a:xfrm>
+          <a:prstGeom prst="rect">
+            <a:avLst/>
+          </a:prstGeom>
+          <a:solidFill>
+            <a:srgbClr val="22140A"/>
+          </a:solidFill>
+          <a:ln>
+            <a:noFill/>
+          </a:ln>
+        </p:spPr>
+        <p:style>
+          <a:lnRef idx="1">
+            <a:schemeClr val="accent1"/>
+          </a:lnRef>
+          <a:fillRef idx="3">
+            <a:schemeClr val="accent1"/>
+          </a:fillRef>
+          <a:effectRef idx="2">
+            <a:schemeClr val="accent1"/>
+          </a:effectRef>
+          <a:fontRef idx="minor">
+            <a:schemeClr val="lt1"/>
+          </a:fontRef>
+        </p:style>
+        <p:txBody>
+          <a:bodyPr rtlCol="0" anchor="ctr"/>
+          <a:lstStyle/>
+          <a:p>
+            <a:pPr algn="ctr"/>
+          </a:p>
+        </p:txBody>
+      </p:sp>
+      <p:sp>
+        <p:nvSpPr>
+          <p:cNvPr id="27" name="TextBox 26"/>
+          <p:cNvSpPr txBox="1"/>
+          <p:nvPr/>
+        </p:nvSpPr>
+        <p:spPr>
+          <a:xfrm>
+            <a:off x="365759" y="3602736"/>
+            <a:ext cx="2011679" cy="365760"/>
+          </a:xfrm>
+          <a:prstGeom prst="rect">
+            <a:avLst/>
+          </a:prstGeom>
+          <a:noFill/>
+        </p:spPr>
+        <p:txBody>
+          <a:bodyPr wrap="none">
+            <a:spAutoFit/>
+          </a:bodyPr>
+          <a:lstStyle/>
+          <a:p>
+            <a:pPr algn="l"/>
+            <a:r>
+              <a:rPr sz="1400" b="0" i="0">
+                <a:solidFill>
+                  <a:srgbClr val="FFFFFF"/>
+                </a:solidFill>
+              </a:rPr>
+              <a:t>Auto-GRU</a:t>
+            </a:r>
+          </a:p>
+        </p:txBody>
+      </p:sp>
+      <p:sp>
+        <p:nvSpPr>
+          <p:cNvPr id="28" name="TextBox 27"/>
+          <p:cNvSpPr txBox="1"/>
+          <p:nvPr/>
+        </p:nvSpPr>
+        <p:spPr>
+          <a:xfrm>
+            <a:off x="2514600" y="3602736"/>
+            <a:ext cx="2057400" cy="365760"/>
+          </a:xfrm>
+          <a:prstGeom prst="rect">
+            <a:avLst/>
+          </a:prstGeom>
+          <a:noFill/>
+        </p:spPr>
+        <p:txBody>
+          <a:bodyPr wrap="none">
+            <a:spAutoFit/>
+          </a:bodyPr>
+          <a:lstStyle/>
+          <a:p>
+            <a:pPr algn="ctr"/>
+            <a:r>
+              <a:rPr sz="1400" b="0" i="0">
+                <a:solidFill>
+                  <a:srgbClr val="FFFFFF"/>
+                </a:solidFill>
+              </a:rPr>
+              <a:t>Weighted</a:t>
+            </a:r>
+          </a:p>
+        </p:txBody>
+      </p:sp>
+      <p:sp>
+        <p:nvSpPr>
+          <p:cNvPr id="29" name="TextBox 28"/>
+          <p:cNvSpPr txBox="1"/>
+          <p:nvPr/>
+        </p:nvSpPr>
+        <p:spPr>
+          <a:xfrm>
+            <a:off x="4709159" y="3602736"/>
+            <a:ext cx="1645919" cy="365760"/>
+          </a:xfrm>
+          <a:prstGeom prst="rect">
+            <a:avLst/>
+          </a:prstGeom>
+          <a:noFill/>
+        </p:spPr>
+        <p:txBody>
+          <a:bodyPr wrap="none">
+            <a:spAutoFit/>
+          </a:bodyPr>
+          <a:lstStyle/>
+          <a:p>
+            <a:pPr algn="ctr"/>
+            <a:r>
+              <a:rPr sz="1400" b="1" i="0">
+                <a:solidFill>
+                  <a:srgbClr val="FFA040"/>
+                </a:solidFill>
+              </a:rPr>
+              <a:t>+9.2%</a:t>
+            </a:r>
+          </a:p>
+        </p:txBody>
+      </p:sp>
+      <p:sp>
+        <p:nvSpPr>
+          <p:cNvPr id="30" name="TextBox 29"/>
+          <p:cNvSpPr txBox="1"/>
+          <p:nvPr/>
+        </p:nvSpPr>
+        <p:spPr>
+          <a:xfrm>
+            <a:off x="6492240" y="3602736"/>
+            <a:ext cx="1143000" cy="365760"/>
+          </a:xfrm>
+          <a:prstGeom prst="rect">
+            <a:avLst/>
+          </a:prstGeom>
+          <a:noFill/>
+        </p:spPr>
+        <p:txBody>
+          <a:bodyPr wrap="none">
+            <a:spAutoFit/>
+          </a:bodyPr>
+          <a:lstStyle/>
+          <a:p>
+            <a:pPr algn="ctr"/>
+            <a:r>
+              <a:rPr sz="1400" b="0" i="0">
+                <a:solidFill>
+                  <a:srgbClr val="FFD75E"/>
+                </a:solidFill>
+              </a:rPr>
+              <a:t>0.86</a:t>
+            </a:r>
+          </a:p>
+        </p:txBody>
+      </p:sp>
+      <p:sp>
+        <p:nvSpPr>
+          <p:cNvPr id="31" name="TextBox 30"/>
+          <p:cNvSpPr txBox="1"/>
+          <p:nvPr/>
+        </p:nvSpPr>
+        <p:spPr>
+          <a:xfrm>
+            <a:off x="320040" y="4114800"/>
+            <a:ext cx="7406640" cy="1920240"/>
           </a:xfrm>
           <a:prstGeom prst="rect">
             <a:avLst/>
@@ -18527,7 +21046,7 @@
               </a:spcAft>
             </a:pPr>
             <a:r>
-              <a:rPr sz="1600">
+              <a:rPr sz="1400">
                 <a:solidFill>
                   <a:srgbClr val="CCD6E8"/>
                 </a:solidFill>
@@ -18535,12 +21054,12 @@
               <a:t>▸ </a:t>
             </a:r>
             <a:r>
-              <a:rPr sz="1600" b="0" i="0">
-                <a:solidFill>
-                  <a:srgbClr val="CCD6E8"/>
-                </a:solidFill>
-              </a:rPr>
-              <a:t>Limitations</a:t>
+              <a:rPr sz="1400" b="0" i="0">
+                <a:solidFill>
+                  <a:srgbClr val="CCD6E8"/>
+                </a:solidFill>
+              </a:rPr>
+              <a:t>Episode return outperforms weighted for both architectures</a:t>
             </a:r>
           </a:p>
           <a:p>
@@ -18550,7 +21069,7 @@
               </a:spcAft>
             </a:pPr>
             <a:r>
-              <a:rPr sz="1600">
+              <a:rPr sz="1400">
                 <a:solidFill>
                   <a:srgbClr val="CCD6E8"/>
                 </a:solidFill>
@@ -18558,12 +21077,35 @@
               <a:t>  • </a:t>
             </a:r>
             <a:r>
-              <a:rPr sz="1600" b="0" i="0">
-                <a:solidFill>
-                  <a:srgbClr val="CCD6E8"/>
-                </a:solidFill>
-              </a:rPr>
-              <a:t>Benchmark timing noise limits per-episode credit precision</a:t>
+              <a:rPr sz="1400" b="0" i="0">
+                <a:solidFill>
+                  <a:srgbClr val="CCD6E8"/>
+                </a:solidFill>
+              </a:rPr>
+              <a:t>Weighted EV higher but speedup lower — value head learns IR targets, not speedup</a:t>
+            </a:r>
+          </a:p>
+          <a:p>
+            <a:pPr>
+              <a:spcAft>
+                <a:spcPts val="300"/>
+              </a:spcAft>
+            </a:pPr>
+            <a:r>
+              <a:rPr sz="1400">
+                <a:solidFill>
+                  <a:srgbClr val="CCD6E8"/>
+                </a:solidFill>
+              </a:rPr>
+              <a:t>▸ </a:t>
+            </a:r>
+            <a:r>
+              <a:rPr sz="1400" b="0" i="0">
+                <a:solidFill>
+                  <a:srgbClr val="CCD6E8"/>
+                </a:solidFill>
+              </a:rPr>
+              <a:t>GRU slightly ahead of TFX in greedy eval despite lower training mean</a:t>
             </a:r>
           </a:p>
           <a:p>
@@ -18573,7 +21115,7 @@
               </a:spcAft>
             </a:pPr>
             <a:r>
-              <a:rPr sz="1600">
+              <a:rPr sz="1400">
                 <a:solidFill>
                   <a:srgbClr val="CCD6E8"/>
                 </a:solidFill>
@@ -18581,97 +21123,14 @@
               <a:t>  • </a:t>
             </a:r>
             <a:r>
-              <a:rPr sz="1600" b="0" i="0">
-                <a:solidFill>
-                  <a:srgbClr val="CCD6E8"/>
-                </a:solidFill>
-              </a:rPr>
-              <a:t>Training set of </a:t>
-            </a:r>
-            <a:r>
-              <a:rPr sz="1600" b="0" i="0">
-                <a:solidFill>
-                  <a:srgbClr val="FFD75E"/>
-                </a:solidFill>
-              </a:rPr>
-              <a:t>6</a:t>
-            </a:r>
-            <a:r>
-              <a:rPr sz="1600" b="0" i="0">
-                <a:solidFill>
-                  <a:srgbClr val="CCD6E8"/>
-                </a:solidFill>
-              </a:rPr>
-              <a:t> functions is small</a:t>
-            </a:r>
-          </a:p>
-          <a:p>
-            <a:pPr lvl="1">
-              <a:spcAft>
-                <a:spcPts val="300"/>
-              </a:spcAft>
-            </a:pPr>
-            <a:r>
-              <a:rPr sz="1600">
-                <a:solidFill>
-                  <a:srgbClr val="CCD6E8"/>
-                </a:solidFill>
-              </a:rPr>
-              <a:t>  • </a:t>
-            </a:r>
-            <a:r>
-              <a:rPr sz="1600" b="0" i="0">
-                <a:solidFill>
-                  <a:srgbClr val="CCD6E8"/>
-                </a:solidFill>
-              </a:rPr>
-              <a:t>Pass parameters not tuned (loop-unroll count always default)</a:t>
-            </a:r>
-          </a:p>
-          <a:p>
-            <a:pPr lvl="1">
-              <a:spcAft>
-                <a:spcPts val="300"/>
-              </a:spcAft>
-            </a:pPr>
-            <a:r>
-              <a:rPr sz="1600">
-                <a:solidFill>
-                  <a:srgbClr val="CCD6E8"/>
-                </a:solidFill>
-              </a:rPr>
-              <a:t>  • </a:t>
-            </a:r>
-            <a:r>
-              <a:rPr sz="1600" b="0" i="0">
-                <a:solidFill>
-                  <a:srgbClr val="CCD6E8"/>
-                </a:solidFill>
-              </a:rPr>
-              <a:t>Effective horizon = K; Stop token unused</a:t>
-            </a:r>
-          </a:p>
-        </p:txBody>
-      </p:sp>
-      <p:sp>
-        <p:nvSpPr>
-          <p:cNvPr id="6" name="TextBox 5"/>
-          <p:cNvSpPr txBox="1"/>
-          <p:nvPr/>
-        </p:nvSpPr>
-        <p:spPr>
-          <a:xfrm>
-            <a:off x="411480" y="3931920"/>
-            <a:ext cx="5394960" cy="2560320"/>
-          </a:xfrm>
-          <a:prstGeom prst="rect">
-            <a:avLst/>
-          </a:prstGeom>
-          <a:noFill/>
-        </p:spPr>
-        <p:txBody>
-          <a:bodyPr wrap="none"/>
-          <a:lstStyle/>
+              <a:rPr sz="1400" b="0" i="0">
+                <a:solidFill>
+                  <a:srgbClr val="CCD6E8"/>
+                </a:solidFill>
+              </a:rPr>
+              <a:t>Best-checkpoint selection can capture an early peak epoch</a:t>
+            </a:r>
+          </a:p>
           <a:p>
             <a:pPr>
               <a:spcAft>
@@ -18679,7 +21138,7 @@
               </a:spcAft>
             </a:pPr>
             <a:r>
-              <a:rPr sz="1600">
+              <a:rPr sz="1400">
                 <a:solidFill>
                   <a:srgbClr val="CCD6E8"/>
                 </a:solidFill>
@@ -18687,111 +21146,127 @@
               <a:t>▸ </a:t>
             </a:r>
             <a:r>
-              <a:rPr sz="1600" b="0" i="0">
-                <a:solidFill>
-                  <a:srgbClr val="CCD6E8"/>
-                </a:solidFill>
-              </a:rPr>
-              <a:t>Ongoing Work</a:t>
-            </a:r>
-          </a:p>
-          <a:p>
-            <a:pPr lvl="1">
-              <a:spcAft>
-                <a:spcPts val="300"/>
-              </a:spcAft>
-            </a:pPr>
-            <a:r>
-              <a:rPr sz="1600">
-                <a:solidFill>
-                  <a:srgbClr val="CCD6E8"/>
-                </a:solidFill>
-              </a:rPr>
-              <a:t>  • </a:t>
-            </a:r>
-            <a:r>
-              <a:rPr sz="1600" b="0" i="0">
-                <a:solidFill>
-                  <a:srgbClr val="CCD6E8"/>
-                </a:solidFill>
-              </a:rPr>
-              <a:t>Architecture comparison: Auto-GRU vs Auto-TFX</a:t>
-            </a:r>
-          </a:p>
-          <a:p>
-            <a:pPr lvl="1">
-              <a:spcAft>
-                <a:spcPts val="300"/>
-              </a:spcAft>
-            </a:pPr>
-            <a:r>
-              <a:rPr sz="1600">
-                <a:solidFill>
-                  <a:srgbClr val="CCD6E8"/>
-                </a:solidFill>
-              </a:rPr>
-              <a:t>  • </a:t>
-            </a:r>
-            <a:r>
-              <a:rPr sz="1600" b="0" i="0">
-                <a:solidFill>
-                  <a:srgbClr val="CCD6E8"/>
-                </a:solidFill>
-              </a:rPr>
-              <a:t>Return comparison: episode vs instruction-weighted</a:t>
-            </a:r>
-          </a:p>
-          <a:p>
-            <a:pPr lvl="1">
-              <a:spcAft>
-                <a:spcPts val="300"/>
-              </a:spcAft>
-            </a:pPr>
-            <a:r>
-              <a:rPr sz="1600">
-                <a:solidFill>
-                  <a:srgbClr val="CCD6E8"/>
-                </a:solidFill>
-              </a:rPr>
-              <a:t>  • </a:t>
-            </a:r>
-            <a:r>
-              <a:rPr sz="1600" b="0" i="0">
-                <a:solidFill>
-                  <a:srgbClr val="CCD6E8"/>
-                </a:solidFill>
-              </a:rPr>
-              <a:t>Hold-out pool evaluation on all </a:t>
-            </a:r>
-            <a:r>
-              <a:rPr sz="1600" b="0" i="0">
-                <a:solidFill>
-                  <a:srgbClr val="FFD75E"/>
-                </a:solidFill>
-              </a:rPr>
-              <a:t>38</a:t>
-            </a:r>
-            <a:r>
-              <a:rPr sz="1600" b="0" i="0">
-                <a:solidFill>
-                  <a:srgbClr val="CCD6E8"/>
-                </a:solidFill>
-              </a:rPr>
-              <a:t> functions</a:t>
-            </a:r>
-          </a:p>
-        </p:txBody>
-      </p:sp>
-      <p:sp>
-        <p:nvSpPr>
-          <p:cNvPr id="7" name="TextBox 6"/>
-          <p:cNvSpPr txBox="1"/>
-          <p:nvPr/>
-        </p:nvSpPr>
-        <p:spPr>
-          <a:xfrm>
-            <a:off x="5943600" y="1143000"/>
-            <a:ext cx="5897880" cy="5212080"/>
+              <a:rPr sz="1400" b="0" i="0">
+                <a:solidFill>
+                  <a:srgbClr val="CCD6E8"/>
+                </a:solidFill>
+              </a:rPr>
+              <a:t>Architecture gap &lt; return-formulation gap — both arches broadly comparable</a:t>
+            </a:r>
+          </a:p>
+        </p:txBody>
+      </p:sp>
+      <p:sp>
+        <p:nvSpPr>
+          <p:cNvPr id="32" name="Rectangle 31"/>
+          <p:cNvSpPr/>
+          <p:nvPr/>
+        </p:nvSpPr>
+        <p:spPr>
+          <a:xfrm>
+            <a:off x="7909560" y="1115568"/>
+            <a:ext cx="4023360" cy="347472"/>
+          </a:xfrm>
+          <a:prstGeom prst="rect">
+            <a:avLst/>
+          </a:prstGeom>
+          <a:solidFill>
+            <a:srgbClr val="FF6B6B"/>
+          </a:solidFill>
+          <a:ln>
+            <a:noFill/>
+          </a:ln>
+        </p:spPr>
+        <p:style>
+          <a:lnRef idx="1">
+            <a:schemeClr val="accent1"/>
+          </a:lnRef>
+          <a:fillRef idx="3">
+            <a:schemeClr val="accent1"/>
+          </a:fillRef>
+          <a:effectRef idx="2">
+            <a:schemeClr val="accent1"/>
+          </a:effectRef>
+          <a:fontRef idx="minor">
+            <a:schemeClr val="lt1"/>
+          </a:fontRef>
+        </p:style>
+        <p:txBody>
+          <a:bodyPr rtlCol="0" anchor="ctr"/>
+          <a:lstStyle/>
+          <a:p>
+            <a:pPr algn="ctr"/>
+          </a:p>
+        </p:txBody>
+      </p:sp>
+      <p:sp>
+        <p:nvSpPr>
+          <p:cNvPr id="33" name="TextBox 32"/>
+          <p:cNvSpPr txBox="1"/>
+          <p:nvPr/>
+        </p:nvSpPr>
+        <p:spPr>
+          <a:xfrm>
+            <a:off x="7946136" y="1152144"/>
+            <a:ext cx="3950208" cy="256032"/>
+          </a:xfrm>
+          <a:prstGeom prst="rect">
+            <a:avLst/>
+          </a:prstGeom>
+          <a:noFill/>
+        </p:spPr>
+        <p:txBody>
+          <a:bodyPr wrap="none">
+            <a:spAutoFit/>
+          </a:bodyPr>
+          <a:lstStyle/>
+          <a:p>
+            <a:pPr algn="ctr"/>
+            <a:r>
+              <a:rPr sz="1300" b="1" i="0">
+                <a:solidFill>
+                  <a:srgbClr val="FFFFFF"/>
+                </a:solidFill>
+              </a:rPr>
+              <a:t>Pool Training (38 functions) — Failed</a:t>
+            </a:r>
+          </a:p>
+        </p:txBody>
+      </p:sp>
+      <p:pic>
+        <p:nvPicPr>
+          <p:cNvPr id="34" name="Picture 33" descr="auto-tfx-pool.png"/>
+          <p:cNvPicPr>
+            <a:picLocks noChangeAspect="1"/>
+          </p:cNvPicPr>
+          <p:nvPr/>
+        </p:nvPicPr>
+        <p:blipFill>
+          <a:blip r:embed="rId2"/>
+          <a:stretch>
+            <a:fillRect/>
+          </a:stretch>
+        </p:blipFill>
+        <p:spPr>
+          <a:xfrm>
+            <a:off x="7909560" y="1499616"/>
+            <a:ext cx="4023360" cy="2543926"/>
+          </a:xfrm>
+          <a:prstGeom prst="rect">
+            <a:avLst/>
+          </a:prstGeom>
+        </p:spPr>
+      </p:pic>
+      <p:sp>
+        <p:nvSpPr>
+          <p:cNvPr id="35" name="TextBox 34"/>
+          <p:cNvSpPr txBox="1"/>
+          <p:nvPr/>
+        </p:nvSpPr>
+        <p:spPr>
+          <a:xfrm>
+            <a:off x="7909560" y="4919472"/>
+            <a:ext cx="4023360" cy="1645920"/>
           </a:xfrm>
           <a:prstGeom prst="rect">
             <a:avLst/>
@@ -18808,7 +21283,7 @@
               </a:spcAft>
             </a:pPr>
             <a:r>
-              <a:rPr sz="1600">
+              <a:rPr sz="1200">
                 <a:solidFill>
                   <a:srgbClr val="CCD6E8"/>
                 </a:solidFill>
@@ -18816,189 +21291,184 @@
               <a:t>▸ </a:t>
             </a:r>
             <a:r>
-              <a:rPr sz="1600" b="0" i="0">
-                <a:solidFill>
-                  <a:srgbClr val="CCD6E8"/>
-                </a:solidFill>
-              </a:rPr>
-              <a:t>Future Directions</a:t>
-            </a:r>
-          </a:p>
-          <a:p>
-            <a:pPr lvl="1">
+              <a:rPr sz="1200" b="0" i="0">
+                <a:solidFill>
+                  <a:srgbClr val="CCD6E8"/>
+                </a:solidFill>
+              </a:rPr>
+              <a:t>Trained on all </a:t>
+            </a:r>
+            <a:r>
+              <a:rPr sz="1200" b="0" i="0">
+                <a:solidFill>
+                  <a:srgbClr val="FFD75E"/>
+                </a:solidFill>
+              </a:rPr>
+              <a:t>38</a:t>
+            </a:r>
+            <a:r>
+              <a:rPr sz="1200" b="0" i="0">
+                <a:solidFill>
+                  <a:srgbClr val="CCD6E8"/>
+                </a:solidFill>
+              </a:rPr>
+              <a:t> functions simultaneously</a:t>
+            </a:r>
+          </a:p>
+          <a:p>
+            <a:pPr>
               <a:spcAft>
                 <a:spcPts val="300"/>
               </a:spcAft>
             </a:pPr>
             <a:r>
-              <a:rPr sz="1600">
-                <a:solidFill>
-                  <a:srgbClr val="CCD6E8"/>
-                </a:solidFill>
-              </a:rPr>
-              <a:t>  • </a:t>
-            </a:r>
-            <a:r>
-              <a:rPr sz="1600" b="0" i="0">
-                <a:solidFill>
-                  <a:srgbClr val="CCD6E8"/>
-                </a:solidFill>
-              </a:rPr>
-              <a:t>Per-step length cost or Stop bonus</a:t>
-            </a:r>
-          </a:p>
-          <a:p>
-            <a:pPr lvl="1">
+              <a:rPr sz="1200">
+                <a:solidFill>
+                  <a:srgbClr val="CCD6E8"/>
+                </a:solidFill>
+              </a:rPr>
+              <a:t>▸ </a:t>
+            </a:r>
+            <a:r>
+              <a:rPr sz="1200" b="0" i="0">
+                <a:solidFill>
+                  <a:srgbClr val="CCD6E8"/>
+                </a:solidFill>
+              </a:rPr>
+              <a:t>EV = </a:t>
+            </a:r>
+            <a:r>
+              <a:rPr sz="1200" b="0" i="0">
+                <a:solidFill>
+                  <a:srgbClr val="FFD75E"/>
+                </a:solidFill>
+              </a:rPr>
+              <a:t>0.065</a:t>
+            </a:r>
+            <a:r>
+              <a:rPr sz="1200" b="0" i="0">
+                <a:solidFill>
+                  <a:srgbClr val="CCD6E8"/>
+                </a:solidFill>
+              </a:rPr>
+              <a:t> at epoch </a:t>
+            </a:r>
+            <a:r>
+              <a:rPr sz="1200" b="0" i="0">
+                <a:solidFill>
+                  <a:srgbClr val="FFD75E"/>
+                </a:solidFill>
+              </a:rPr>
+              <a:t>100</a:t>
+            </a:r>
+            <a:r>
+              <a:rPr sz="1200" b="0" i="0">
+                <a:solidFill>
+                  <a:srgbClr val="CCD6E8"/>
+                </a:solidFill>
+              </a:rPr>
+              <a:t> — value head never converged</a:t>
+            </a:r>
+          </a:p>
+          <a:p>
+            <a:pPr>
               <a:spcAft>
                 <a:spcPts val="300"/>
               </a:spcAft>
             </a:pPr>
             <a:r>
-              <a:rPr sz="1600">
-                <a:solidFill>
-                  <a:srgbClr val="CCD6E8"/>
-                </a:solidFill>
-              </a:rPr>
-              <a:t>  • </a:t>
-            </a:r>
-            <a:r>
-              <a:rPr sz="1600" b="0" i="0">
-                <a:solidFill>
-                  <a:srgbClr val="CCD6E8"/>
-                </a:solidFill>
-              </a:rPr>
-              <a:t>Extend pass menu to cover more LLVM </a:t>
-            </a:r>
-            <a:r>
-              <a:rPr sz="1600" b="0" i="0">
+              <a:rPr sz="1200">
+                <a:solidFill>
+                  <a:srgbClr val="CCD6E8"/>
+                </a:solidFill>
+              </a:rPr>
+              <a:t>▸ </a:t>
+            </a:r>
+            <a:r>
+              <a:rPr sz="1200" b="0" i="0">
+                <a:solidFill>
+                  <a:srgbClr val="CCD6E8"/>
+                </a:solidFill>
+              </a:rPr>
+              <a:t>Greedy eval: all </a:t>
+            </a:r>
+            <a:r>
+              <a:rPr sz="1200" b="0" i="0">
                 <a:solidFill>
                   <a:srgbClr val="FFD75E"/>
                 </a:solidFill>
               </a:rPr>
-              <a:t>20</a:t>
-            </a:r>
-            <a:r>
-              <a:rPr sz="1600" b="0" i="0">
-                <a:solidFill>
-                  <a:srgbClr val="CCD6E8"/>
-                </a:solidFill>
-              </a:rPr>
-              <a:t> transforms</a:t>
-            </a:r>
-          </a:p>
-          <a:p>
-            <a:pPr lvl="1">
+              <a:t>38</a:t>
+            </a:r>
+            <a:r>
+              <a:rPr sz="1200" b="0" i="0">
+                <a:solidFill>
+                  <a:srgbClr val="CCD6E8"/>
+                </a:solidFill>
+              </a:rPr>
+              <a:t> functions negative (mean −</a:t>
+            </a:r>
+            <a:r>
+              <a:rPr sz="1200" b="0" i="0">
+                <a:solidFill>
+                  <a:srgbClr val="FFD75E"/>
+                </a:solidFill>
+              </a:rPr>
+              <a:t>2.50</a:t>
+            </a:r>
+            <a:r>
+              <a:rPr sz="1200" b="0" i="0">
+                <a:solidFill>
+                  <a:srgbClr val="CCD6E8"/>
+                </a:solidFill>
+              </a:rPr>
+              <a:t>)</a:t>
+            </a:r>
+          </a:p>
+          <a:p>
+            <a:pPr>
               <a:spcAft>
                 <a:spcPts val="300"/>
               </a:spcAft>
             </a:pPr>
             <a:r>
-              <a:rPr sz="1600">
-                <a:solidFill>
-                  <a:srgbClr val="CCD6E8"/>
-                </a:solidFill>
-              </a:rPr>
-              <a:t>  • </a:t>
-            </a:r>
-            <a:r>
-              <a:rPr sz="1600" b="0" i="0">
-                <a:solidFill>
-                  <a:srgbClr val="CCD6E8"/>
-                </a:solidFill>
-              </a:rPr>
-              <a:t>Transfer to larger, real-world C/C++ programs</a:t>
-            </a:r>
-          </a:p>
-          <a:p>
-            <a:pPr lvl="1">
+              <a:rPr sz="1200">
+                <a:solidFill>
+                  <a:srgbClr val="CCD6E8"/>
+                </a:solidFill>
+              </a:rPr>
+              <a:t>▸ </a:t>
+            </a:r>
+            <a:r>
+              <a:rPr sz="1200" b="0" i="0">
+                <a:solidFill>
+                  <a:srgbClr val="CCD6E8"/>
+                </a:solidFill>
+              </a:rPr>
+              <a:t>Cause: too few episodes per function to build reward signal</a:t>
+            </a:r>
+          </a:p>
+          <a:p>
+            <a:pPr>
               <a:spcAft>
                 <a:spcPts val="300"/>
               </a:spcAft>
             </a:pPr>
             <a:r>
-              <a:rPr sz="1600">
-                <a:solidFill>
-                  <a:srgbClr val="CCD6E8"/>
-                </a:solidFill>
-              </a:rPr>
-              <a:t>  • </a:t>
-            </a:r>
-            <a:r>
-              <a:rPr sz="1600" b="0" i="0">
-                <a:solidFill>
-                  <a:srgbClr val="CCD6E8"/>
-                </a:solidFill>
-              </a:rPr>
-              <a:t>Beam search or MCTS at inference time</a:t>
-            </a:r>
-          </a:p>
-          <a:p>
-            <a:pPr lvl="1">
-              <a:spcAft>
-                <a:spcPts val="300"/>
-              </a:spcAft>
-            </a:pPr>
-            <a:r>
-              <a:rPr sz="1600">
-                <a:solidFill>
-                  <a:srgbClr val="CCD6E8"/>
-                </a:solidFill>
-              </a:rPr>
-              <a:t>  • </a:t>
-            </a:r>
-            <a:r>
-              <a:rPr sz="1600" b="0" i="0">
-                <a:solidFill>
-                  <a:srgbClr val="CCD6E8"/>
-                </a:solidFill>
-              </a:rPr>
-              <a:t>Combine offline bench-cache with online RL updates</a:t>
-            </a:r>
-          </a:p>
-          <a:p>
-            <a:pPr lvl="1">
-              <a:spcAft>
-                <a:spcPts val="300"/>
-              </a:spcAft>
-            </a:pPr>
-            <a:r>
-              <a:rPr sz="1600">
-                <a:solidFill>
-                  <a:srgbClr val="CCD6E8"/>
-                </a:solidFill>
-              </a:rPr>
-              <a:t>  • </a:t>
-            </a:r>
-            <a:r>
-              <a:rPr sz="1600" b="0" i="0">
-                <a:solidFill>
-                  <a:srgbClr val="CCD6E8"/>
-                </a:solidFill>
-              </a:rPr>
-              <a:t>Pass hyperparameter tuning as part of the action space</a:t>
-            </a:r>
-          </a:p>
-          <a:p>
-            <a:pPr lvl="1">
-              <a:spcAft>
-                <a:spcPts val="300"/>
-              </a:spcAft>
-            </a:pPr>
-            <a:r>
-              <a:rPr sz="1600">
-                <a:solidFill>
-                  <a:srgbClr val="CCD6E8"/>
-                </a:solidFill>
-              </a:rPr>
-              <a:t>  • </a:t>
-            </a:r>
-            <a:r>
-              <a:rPr sz="1600" b="0" i="0">
-                <a:solidFill>
-                  <a:srgbClr val="CCD6E8"/>
-                </a:solidFill>
-              </a:rPr>
-              <a:t>Cross-architecture generalisation (ARM, RISC-V)</a:t>
+              <a:rPr sz="1200">
+                <a:solidFill>
+                  <a:srgbClr val="CCD6E8"/>
+                </a:solidFill>
+              </a:rPr>
+              <a:t>▸ </a:t>
+            </a:r>
+            <a:r>
+              <a:rPr sz="1200" b="0" i="0">
+                <a:solidFill>
+                  <a:srgbClr val="CCD6E8"/>
+                </a:solidFill>
+              </a:rPr>
+              <a:t>Key constraint: episodes per function, not total epochs</a:t>
             </a:r>
           </a:p>
         </p:txBody>
@@ -19038,7 +21508,50 @@
         <p:spPr>
           <a:xfrm>
             <a:off x="0" y="0"/>
-            <a:ext cx="91440" cy="6858000"/>
+            <a:ext cx="12188952" cy="960120"/>
+          </a:xfrm>
+          <a:prstGeom prst="rect">
+            <a:avLst/>
+          </a:prstGeom>
+          <a:solidFill>
+            <a:srgbClr val="16243E"/>
+          </a:solidFill>
+          <a:ln>
+            <a:noFill/>
+          </a:ln>
+        </p:spPr>
+        <p:style>
+          <a:lnRef idx="1">
+            <a:schemeClr val="accent1"/>
+          </a:lnRef>
+          <a:fillRef idx="3">
+            <a:schemeClr val="accent1"/>
+          </a:fillRef>
+          <a:effectRef idx="2">
+            <a:schemeClr val="accent1"/>
+          </a:effectRef>
+          <a:fontRef idx="minor">
+            <a:schemeClr val="lt1"/>
+          </a:fontRef>
+        </p:style>
+        <p:txBody>
+          <a:bodyPr rtlCol="0" anchor="ctr"/>
+          <a:lstStyle/>
+          <a:p>
+            <a:pPr algn="ctr"/>
+          </a:p>
+        </p:txBody>
+      </p:sp>
+      <p:sp>
+        <p:nvSpPr>
+          <p:cNvPr id="3" name="Rectangle 2"/>
+          <p:cNvSpPr/>
+          <p:nvPr/>
+        </p:nvSpPr>
+        <p:spPr>
+          <a:xfrm>
+            <a:off x="0" y="932688"/>
+            <a:ext cx="12188952" cy="45720"/>
           </a:xfrm>
           <a:prstGeom prst="rect">
             <a:avLst/>
@@ -19074,6 +21587,2564 @@
       </p:sp>
       <p:sp>
         <p:nvSpPr>
+          <p:cNvPr id="4" name="TextBox 3"/>
+          <p:cNvSpPr txBox="1"/>
+          <p:nvPr/>
+        </p:nvSpPr>
+        <p:spPr>
+          <a:xfrm>
+            <a:off x="411480" y="164592"/>
+            <a:ext cx="11338560" cy="685800"/>
+          </a:xfrm>
+          <a:prstGeom prst="rect">
+            <a:avLst/>
+          </a:prstGeom>
+          <a:noFill/>
+        </p:spPr>
+        <p:txBody>
+          <a:bodyPr wrap="none">
+            <a:spAutoFit/>
+          </a:bodyPr>
+          <a:lstStyle/>
+          <a:p>
+            <a:pPr algn="l"/>
+            <a:r>
+              <a:rPr sz="2600" b="1" i="0">
+                <a:solidFill>
+                  <a:srgbClr val="FFFFFF"/>
+                </a:solidFill>
+              </a:rPr>
+              <a:t>Benchmarking Harness Rigor</a:t>
+            </a:r>
+          </a:p>
+        </p:txBody>
+      </p:sp>
+      <p:sp>
+        <p:nvSpPr>
+          <p:cNvPr id="5" name="TextBox 4"/>
+          <p:cNvSpPr txBox="1"/>
+          <p:nvPr/>
+        </p:nvSpPr>
+        <p:spPr>
+          <a:xfrm>
+            <a:off x="411480" y="1143000"/>
+            <a:ext cx="5394960" cy="365760"/>
+          </a:xfrm>
+          <a:prstGeom prst="rect">
+            <a:avLst/>
+          </a:prstGeom>
+          <a:noFill/>
+        </p:spPr>
+        <p:txBody>
+          <a:bodyPr wrap="none">
+            <a:spAutoFit/>
+          </a:bodyPr>
+          <a:lstStyle/>
+          <a:p>
+            <a:pPr algn="l"/>
+            <a:r>
+              <a:rPr sz="1700" b="1" i="0">
+                <a:solidFill>
+                  <a:srgbClr val="4A9EFF"/>
+                </a:solidFill>
+              </a:rPr>
+              <a:t>Benchmarking Harness</a:t>
+            </a:r>
+          </a:p>
+        </p:txBody>
+      </p:sp>
+      <p:sp>
+        <p:nvSpPr>
+          <p:cNvPr id="6" name="TextBox 5"/>
+          <p:cNvSpPr txBox="1"/>
+          <p:nvPr/>
+        </p:nvSpPr>
+        <p:spPr>
+          <a:xfrm>
+            <a:off x="411480" y="1572768"/>
+            <a:ext cx="5394960" cy="2103120"/>
+          </a:xfrm>
+          <a:prstGeom prst="rect">
+            <a:avLst/>
+          </a:prstGeom>
+          <a:noFill/>
+        </p:spPr>
+        <p:txBody>
+          <a:bodyPr wrap="none"/>
+          <a:lstStyle/>
+          <a:p>
+            <a:pPr>
+              <a:spcAft>
+                <a:spcPts val="300"/>
+              </a:spcAft>
+            </a:pPr>
+            <a:r>
+              <a:rPr sz="1400">
+                <a:solidFill>
+                  <a:srgbClr val="CCD6E8"/>
+                </a:solidFill>
+              </a:rPr>
+              <a:t>▸ </a:t>
+            </a:r>
+            <a:r>
+              <a:rPr sz="1400" b="0" i="0">
+                <a:solidFill>
+                  <a:srgbClr val="FFD75E"/>
+                </a:solidFill>
+              </a:rPr>
+              <a:t>201</a:t>
+            </a:r>
+            <a:r>
+              <a:rPr sz="1400" b="0" i="0">
+                <a:solidFill>
+                  <a:srgbClr val="CCD6E8"/>
+                </a:solidFill>
+              </a:rPr>
+              <a:t> timed iterations per measurement</a:t>
+            </a:r>
+          </a:p>
+          <a:p>
+            <a:pPr lvl="1">
+              <a:spcAft>
+                <a:spcPts val="300"/>
+              </a:spcAft>
+            </a:pPr>
+            <a:r>
+              <a:rPr sz="1400">
+                <a:solidFill>
+                  <a:srgbClr val="CCD6E8"/>
+                </a:solidFill>
+              </a:rPr>
+              <a:t>  • </a:t>
+            </a:r>
+            <a:r>
+              <a:rPr sz="1400" b="0" i="0">
+                <a:solidFill>
+                  <a:srgbClr val="FFD75E"/>
+                </a:solidFill>
+              </a:rPr>
+              <a:t>10%</a:t>
+            </a:r>
+            <a:r>
+              <a:rPr sz="1400" b="0" i="0">
+                <a:solidFill>
+                  <a:srgbClr val="CCD6E8"/>
+                </a:solidFill>
+              </a:rPr>
+              <a:t> trimmed mean — removes </a:t>
+            </a:r>
+            <a:r>
+              <a:rPr sz="1400" b="0" i="0">
+                <a:solidFill>
+                  <a:srgbClr val="FFD75E"/>
+                </a:solidFill>
+              </a:rPr>
+              <a:t>10</a:t>
+            </a:r>
+            <a:r>
+              <a:rPr sz="1400" b="0" i="0">
+                <a:solidFill>
+                  <a:srgbClr val="CCD6E8"/>
+                </a:solidFill>
+              </a:rPr>
+              <a:t> outliers each tail</a:t>
+            </a:r>
+          </a:p>
+          <a:p>
+            <a:pPr lvl="1">
+              <a:spcAft>
+                <a:spcPts val="300"/>
+              </a:spcAft>
+            </a:pPr>
+            <a:r>
+              <a:rPr sz="1400">
+                <a:solidFill>
+                  <a:srgbClr val="CCD6E8"/>
+                </a:solidFill>
+              </a:rPr>
+              <a:t>  • </a:t>
+            </a:r>
+            <a:r>
+              <a:rPr sz="1400" b="0" i="0">
+                <a:solidFill>
+                  <a:srgbClr val="FFD75E"/>
+                </a:solidFill>
+              </a:rPr>
+              <a:t>5</a:t>
+            </a:r>
+            <a:r>
+              <a:rPr sz="1400" b="0" i="0">
+                <a:solidFill>
+                  <a:srgbClr val="CCD6E8"/>
+                </a:solidFill>
+              </a:rPr>
+              <a:t> warm-up runs before timing begins</a:t>
+            </a:r>
+          </a:p>
+          <a:p>
+            <a:pPr>
+              <a:spcAft>
+                <a:spcPts val="300"/>
+              </a:spcAft>
+            </a:pPr>
+            <a:r>
+              <a:rPr sz="1400">
+                <a:solidFill>
+                  <a:srgbClr val="CCD6E8"/>
+                </a:solidFill>
+              </a:rPr>
+              <a:t>▸ </a:t>
+            </a:r>
+            <a:r>
+              <a:rPr sz="1400" b="0" i="0">
+                <a:solidFill>
+                  <a:srgbClr val="CCD6E8"/>
+                </a:solidFill>
+              </a:rPr>
+              <a:t>CLOCK_MONOTONIC — monotonic wall-clock, nanosecond resolution</a:t>
+            </a:r>
+          </a:p>
+          <a:p>
+            <a:pPr>
+              <a:spcAft>
+                <a:spcPts val="300"/>
+              </a:spcAft>
+            </a:pPr>
+            <a:r>
+              <a:rPr sz="1400">
+                <a:solidFill>
+                  <a:srgbClr val="CCD6E8"/>
+                </a:solidFill>
+              </a:rPr>
+              <a:t>▸ </a:t>
+            </a:r>
+            <a:r>
+              <a:rPr sz="1400" b="0" i="0">
+                <a:solidFill>
+                  <a:srgbClr val="CCD6E8"/>
+                </a:solidFill>
+              </a:rPr>
+              <a:t>Serial baselines collected once under stable single-threaded conditions</a:t>
+            </a:r>
+          </a:p>
+          <a:p>
+            <a:pPr>
+              <a:spcAft>
+                <a:spcPts val="300"/>
+              </a:spcAft>
+            </a:pPr>
+            <a:r>
+              <a:rPr sz="1400">
+                <a:solidFill>
+                  <a:srgbClr val="CCD6E8"/>
+                </a:solidFill>
+              </a:rPr>
+              <a:t>▸ </a:t>
+            </a:r>
+            <a:r>
+              <a:rPr sz="1400" b="0" i="0">
+                <a:solidFill>
+                  <a:srgbClr val="CCD6E8"/>
+                </a:solidFill>
+              </a:rPr>
+              <a:t>Episode collection: parallelised across all CPU cores via Rayon</a:t>
+            </a:r>
+          </a:p>
+        </p:txBody>
+      </p:sp>
+      <p:sp>
+        <p:nvSpPr>
+          <p:cNvPr id="7" name="Rectangle 6"/>
+          <p:cNvSpPr/>
+          <p:nvPr/>
+        </p:nvSpPr>
+        <p:spPr>
+          <a:xfrm>
+            <a:off x="411480" y="3749039"/>
+            <a:ext cx="5394960" cy="2423160"/>
+          </a:xfrm>
+          <a:prstGeom prst="rect">
+            <a:avLst/>
+          </a:prstGeom>
+          <a:solidFill>
+            <a:srgbClr val="16243E"/>
+          </a:solidFill>
+          <a:ln>
+            <a:noFill/>
+          </a:ln>
+        </p:spPr>
+        <p:style>
+          <a:lnRef idx="1">
+            <a:schemeClr val="accent1"/>
+          </a:lnRef>
+          <a:fillRef idx="3">
+            <a:schemeClr val="accent1"/>
+          </a:fillRef>
+          <a:effectRef idx="2">
+            <a:schemeClr val="accent1"/>
+          </a:effectRef>
+          <a:fontRef idx="minor">
+            <a:schemeClr val="lt1"/>
+          </a:fontRef>
+        </p:style>
+        <p:txBody>
+          <a:bodyPr rtlCol="0" anchor="ctr"/>
+          <a:lstStyle/>
+          <a:p>
+            <a:pPr algn="ctr"/>
+          </a:p>
+        </p:txBody>
+      </p:sp>
+      <p:sp>
+        <p:nvSpPr>
+          <p:cNvPr id="8" name="TextBox 7"/>
+          <p:cNvSpPr txBox="1"/>
+          <p:nvPr/>
+        </p:nvSpPr>
+        <p:spPr>
+          <a:xfrm>
+            <a:off x="502920" y="3803904"/>
+            <a:ext cx="5212080" cy="329184"/>
+          </a:xfrm>
+          <a:prstGeom prst="rect">
+            <a:avLst/>
+          </a:prstGeom>
+          <a:noFill/>
+        </p:spPr>
+        <p:txBody>
+          <a:bodyPr wrap="none">
+            <a:spAutoFit/>
+          </a:bodyPr>
+          <a:lstStyle/>
+          <a:p>
+            <a:pPr algn="l"/>
+            <a:r>
+              <a:rPr sz="1500" b="1" i="0">
+                <a:solidFill>
+                  <a:srgbClr val="56D3A0"/>
+                </a:solidFill>
+              </a:rPr>
+              <a:t>Parallel Noise Characterisation</a:t>
+            </a:r>
+          </a:p>
+        </p:txBody>
+      </p:sp>
+      <p:sp>
+        <p:nvSpPr>
+          <p:cNvPr id="9" name="TextBox 8"/>
+          <p:cNvSpPr txBox="1"/>
+          <p:nvPr/>
+        </p:nvSpPr>
+        <p:spPr>
+          <a:xfrm>
+            <a:off x="502920" y="4187952"/>
+            <a:ext cx="5212080" cy="1828800"/>
+          </a:xfrm>
+          <a:prstGeom prst="rect">
+            <a:avLst/>
+          </a:prstGeom>
+          <a:noFill/>
+        </p:spPr>
+        <p:txBody>
+          <a:bodyPr wrap="none"/>
+          <a:lstStyle/>
+          <a:p>
+            <a:pPr>
+              <a:spcAft>
+                <a:spcPts val="300"/>
+              </a:spcAft>
+            </a:pPr>
+            <a:r>
+              <a:rPr sz="1300">
+                <a:solidFill>
+                  <a:srgbClr val="CCD6E8"/>
+                </a:solidFill>
+              </a:rPr>
+              <a:t>▸ </a:t>
+            </a:r>
+            <a:r>
+              <a:rPr sz="1300" b="0" i="0">
+                <a:solidFill>
+                  <a:srgbClr val="CCD6E8"/>
+                </a:solidFill>
+              </a:rPr>
+              <a:t>bench-noise: run each binary solo then across </a:t>
+            </a:r>
+            <a:r>
+              <a:rPr sz="1300" b="0" i="0">
+                <a:solidFill>
+                  <a:srgbClr val="FFD75E"/>
+                </a:solidFill>
+              </a:rPr>
+              <a:t>16</a:t>
+            </a:r>
+            <a:r>
+              <a:rPr sz="1300" b="0" i="0">
+                <a:solidFill>
+                  <a:srgbClr val="CCD6E8"/>
+                </a:solidFill>
+              </a:rPr>
+              <a:t> Rayon workers simultaneously</a:t>
+            </a:r>
+          </a:p>
+          <a:p>
+            <a:pPr>
+              <a:spcAft>
+                <a:spcPts val="300"/>
+              </a:spcAft>
+            </a:pPr>
+            <a:r>
+              <a:rPr sz="1300">
+                <a:solidFill>
+                  <a:srgbClr val="CCD6E8"/>
+                </a:solidFill>
+              </a:rPr>
+              <a:t>▸ </a:t>
+            </a:r>
+            <a:r>
+              <a:rPr sz="1300" b="0" i="0">
+                <a:solidFill>
+                  <a:srgbClr val="CCD6E8"/>
+                </a:solidFill>
+              </a:rPr>
+              <a:t>Parallel overhead: small and consistent across all </a:t>
+            </a:r>
+            <a:r>
+              <a:rPr sz="1300" b="0" i="0">
+                <a:solidFill>
+                  <a:srgbClr val="FFD75E"/>
+                </a:solidFill>
+              </a:rPr>
+              <a:t>6</a:t>
+            </a:r>
+            <a:r>
+              <a:rPr sz="1300" b="0" i="0">
+                <a:solidFill>
+                  <a:srgbClr val="CCD6E8"/>
+                </a:solidFill>
+              </a:rPr>
+              <a:t> benchmarks</a:t>
+            </a:r>
+          </a:p>
+          <a:p>
+            <a:pPr>
+              <a:spcAft>
+                <a:spcPts val="300"/>
+              </a:spcAft>
+            </a:pPr>
+            <a:r>
+              <a:rPr sz="1300">
+                <a:solidFill>
+                  <a:srgbClr val="CCD6E8"/>
+                </a:solidFill>
+              </a:rPr>
+              <a:t>▸ </a:t>
+            </a:r>
+            <a:r>
+              <a:rPr sz="1300" b="0" i="0">
+                <a:solidFill>
+                  <a:srgbClr val="CCD6E8"/>
+                </a:solidFill>
+              </a:rPr>
+              <a:t>Noise margin </a:t>
+            </a:r>
+            <a:r>
+              <a:rPr sz="1300" b="0" i="0">
+                <a:solidFill>
+                  <a:srgbClr val="FFD75E"/>
+                </a:solidFill>
+              </a:rPr>
+              <a:t>1.01</a:t>
+            </a:r>
+            <a:r>
+              <a:rPr sz="1300" b="0" i="0">
+                <a:solidFill>
+                  <a:srgbClr val="CCD6E8"/>
+                </a:solidFill>
+              </a:rPr>
+              <a:t> on -O</a:t>
+            </a:r>
+            <a:r>
+              <a:rPr sz="1300" b="0" i="0">
+                <a:solidFill>
+                  <a:srgbClr val="FFD75E"/>
+                </a:solidFill>
+              </a:rPr>
+              <a:t>3</a:t>
+            </a:r>
+            <a:r>
+              <a:rPr sz="1300" b="0" i="0">
+                <a:solidFill>
+                  <a:srgbClr val="CCD6E8"/>
+                </a:solidFill>
+              </a:rPr>
+              <a:t> baseline during training:</a:t>
+            </a:r>
+          </a:p>
+          <a:p>
+            <a:pPr lvl="1">
+              <a:spcAft>
+                <a:spcPts val="300"/>
+              </a:spcAft>
+            </a:pPr>
+            <a:r>
+              <a:rPr sz="1300">
+                <a:solidFill>
+                  <a:srgbClr val="CCD6E8"/>
+                </a:solidFill>
+              </a:rPr>
+              <a:t>  • </a:t>
+            </a:r>
+            <a:r>
+              <a:rPr sz="1300" b="0" i="0">
+                <a:solidFill>
+                  <a:srgbClr val="CCD6E8"/>
+                </a:solidFill>
+              </a:rPr>
+              <a:t>Policy must beat -O</a:t>
+            </a:r>
+            <a:r>
+              <a:rPr sz="1300" b="0" i="0">
+                <a:solidFill>
+                  <a:srgbClr val="FFD75E"/>
+                </a:solidFill>
+              </a:rPr>
+              <a:t>3</a:t>
+            </a:r>
+            <a:r>
+              <a:rPr sz="1300" b="0" i="0">
+                <a:solidFill>
+                  <a:srgbClr val="CCD6E8"/>
+                </a:solidFill>
+              </a:rPr>
+              <a:t> by &gt; noise floor to receive positive reward</a:t>
+            </a:r>
+          </a:p>
+          <a:p>
+            <a:pPr>
+              <a:spcAft>
+                <a:spcPts val="300"/>
+              </a:spcAft>
+            </a:pPr>
+            <a:r>
+              <a:rPr sz="1300">
+                <a:solidFill>
+                  <a:srgbClr val="CCD6E8"/>
+                </a:solidFill>
+              </a:rPr>
+              <a:t>▸ </a:t>
+            </a:r>
+            <a:r>
+              <a:rPr sz="1300" b="0" i="0">
+                <a:solidFill>
+                  <a:srgbClr val="CCD6E8"/>
+                </a:solidFill>
+              </a:rPr>
+              <a:t>Prevents noise-driven false positives in the reward signal</a:t>
+            </a:r>
+          </a:p>
+        </p:txBody>
+      </p:sp>
+      <p:sp>
+        <p:nvSpPr>
+          <p:cNvPr id="10" name="TextBox 9"/>
+          <p:cNvSpPr txBox="1"/>
+          <p:nvPr/>
+        </p:nvSpPr>
+        <p:spPr>
+          <a:xfrm>
+            <a:off x="6126480" y="1143000"/>
+            <a:ext cx="5669280" cy="365760"/>
+          </a:xfrm>
+          <a:prstGeom prst="rect">
+            <a:avLst/>
+          </a:prstGeom>
+          <a:noFill/>
+        </p:spPr>
+        <p:txBody>
+          <a:bodyPr wrap="none">
+            <a:spAutoFit/>
+          </a:bodyPr>
+          <a:lstStyle/>
+          <a:p>
+            <a:pPr algn="l"/>
+            <a:r>
+              <a:rPr sz="1700" b="1" i="0">
+                <a:solidFill>
+                  <a:srgbClr val="4A9EFF"/>
+                </a:solidFill>
+              </a:rPr>
+              <a:t>Reproducibility Verification  (diagnose)</a:t>
+            </a:r>
+          </a:p>
+        </p:txBody>
+      </p:sp>
+      <p:sp>
+        <p:nvSpPr>
+          <p:cNvPr id="11" name="TextBox 10"/>
+          <p:cNvSpPr txBox="1"/>
+          <p:nvPr/>
+        </p:nvSpPr>
+        <p:spPr>
+          <a:xfrm>
+            <a:off x="6126480" y="1572768"/>
+            <a:ext cx="5669280" cy="2606040"/>
+          </a:xfrm>
+          <a:prstGeom prst="rect">
+            <a:avLst/>
+          </a:prstGeom>
+          <a:noFill/>
+        </p:spPr>
+        <p:txBody>
+          <a:bodyPr wrap="none"/>
+          <a:lstStyle/>
+          <a:p>
+            <a:pPr>
+              <a:spcAft>
+                <a:spcPts val="300"/>
+              </a:spcAft>
+            </a:pPr>
+            <a:r>
+              <a:rPr sz="1400">
+                <a:solidFill>
+                  <a:srgbClr val="CCD6E8"/>
+                </a:solidFill>
+              </a:rPr>
+              <a:t>▸ </a:t>
+            </a:r>
+            <a:r>
+              <a:rPr sz="1400" b="0" i="0">
+                <a:solidFill>
+                  <a:srgbClr val="CCD6E8"/>
+                </a:solidFill>
+              </a:rPr>
+              <a:t>Problem: training speedups collected under parallel timing noise</a:t>
+            </a:r>
+          </a:p>
+          <a:p>
+            <a:pPr>
+              <a:spcAft>
+                <a:spcPts val="300"/>
+              </a:spcAft>
+            </a:pPr>
+            <a:r>
+              <a:rPr sz="1400">
+                <a:solidFill>
+                  <a:srgbClr val="CCD6E8"/>
+                </a:solidFill>
+              </a:rPr>
+              <a:t>▸ </a:t>
+            </a:r>
+            <a:r>
+              <a:rPr sz="1400" b="0" i="0">
+                <a:solidFill>
+                  <a:srgbClr val="CCD6E8"/>
+                </a:solidFill>
+              </a:rPr>
+              <a:t>diagnose re-benchmarks top sequences serially under controlled conditions</a:t>
+            </a:r>
+          </a:p>
+          <a:p>
+            <a:pPr lvl="1">
+              <a:spcAft>
+                <a:spcPts val="300"/>
+              </a:spcAft>
+            </a:pPr>
+            <a:r>
+              <a:rPr sz="1400">
+                <a:solidFill>
+                  <a:srgbClr val="CCD6E8"/>
+                </a:solidFill>
+              </a:rPr>
+              <a:t>  • </a:t>
+            </a:r>
+            <a:r>
+              <a:rPr sz="1400" b="0" i="0">
+                <a:solidFill>
+                  <a:srgbClr val="FFD75E"/>
+                </a:solidFill>
+              </a:rPr>
+              <a:t>20</a:t>
+            </a:r>
+            <a:r>
+              <a:rPr sz="1400" b="0" i="0">
+                <a:solidFill>
+                  <a:srgbClr val="CCD6E8"/>
+                </a:solidFill>
+              </a:rPr>
+              <a:t> independent serial benchmark runs per sequence</a:t>
+            </a:r>
+          </a:p>
+          <a:p>
+            <a:pPr lvl="1">
+              <a:spcAft>
+                <a:spcPts val="300"/>
+              </a:spcAft>
+            </a:pPr>
+            <a:r>
+              <a:rPr sz="1400">
+                <a:solidFill>
+                  <a:srgbClr val="CCD6E8"/>
+                </a:solidFill>
+              </a:rPr>
+              <a:t>  • </a:t>
+            </a:r>
+            <a:r>
+              <a:rPr sz="1400" b="0" i="0">
+                <a:solidFill>
+                  <a:srgbClr val="CCD6E8"/>
+                </a:solidFill>
+              </a:rPr>
+              <a:t>Reports mean, std, and full distribution</a:t>
+            </a:r>
+          </a:p>
+          <a:p>
+            <a:pPr>
+              <a:spcAft>
+                <a:spcPts val="300"/>
+              </a:spcAft>
+            </a:pPr>
+            <a:r>
+              <a:rPr sz="1400">
+                <a:solidFill>
+                  <a:srgbClr val="CCD6E8"/>
+                </a:solidFill>
+              </a:rPr>
+              <a:t>▸ </a:t>
+            </a:r>
+            <a:r>
+              <a:rPr sz="1400" b="0" i="0">
+                <a:solidFill>
+                  <a:srgbClr val="CCD6E8"/>
+                </a:solidFill>
+              </a:rPr>
+              <a:t>Result: cached training speedups correlate strongly with re-measured values</a:t>
+            </a:r>
+          </a:p>
+          <a:p>
+            <a:pPr>
+              <a:spcAft>
+                <a:spcPts val="300"/>
+              </a:spcAft>
+            </a:pPr>
+            <a:r>
+              <a:rPr sz="1400">
+                <a:solidFill>
+                  <a:srgbClr val="CCD6E8"/>
+                </a:solidFill>
+              </a:rPr>
+              <a:t>▸ </a:t>
+            </a:r>
+            <a:r>
+              <a:rPr sz="1400" b="0" i="0">
+                <a:solidFill>
+                  <a:srgbClr val="CCD6E8"/>
+                </a:solidFill>
+              </a:rPr>
+              <a:t>Per-sequence distributions are tight → reward signal is reproducible</a:t>
+            </a:r>
+          </a:p>
+          <a:p>
+            <a:pPr>
+              <a:spcAft>
+                <a:spcPts val="300"/>
+              </a:spcAft>
+            </a:pPr>
+            <a:r>
+              <a:rPr sz="1400">
+                <a:solidFill>
+                  <a:srgbClr val="CCD6E8"/>
+                </a:solidFill>
+              </a:rPr>
+              <a:t>▸ </a:t>
+            </a:r>
+            <a:r>
+              <a:rPr sz="1400" b="0" i="0">
+                <a:solidFill>
+                  <a:srgbClr val="CCD6E8"/>
+                </a:solidFill>
+              </a:rPr>
+              <a:t>Dominant sequences from interpreter and kmp_search — consistent with EDA ceiling</a:t>
+            </a:r>
+          </a:p>
+        </p:txBody>
+      </p:sp>
+      <p:sp>
+        <p:nvSpPr>
+          <p:cNvPr id="12" name="Rectangle 11"/>
+          <p:cNvSpPr/>
+          <p:nvPr/>
+        </p:nvSpPr>
+        <p:spPr>
+          <a:xfrm>
+            <a:off x="6126480" y="4315968"/>
+            <a:ext cx="5669280" cy="2331720"/>
+          </a:xfrm>
+          <a:prstGeom prst="rect">
+            <a:avLst/>
+          </a:prstGeom>
+          <a:solidFill>
+            <a:srgbClr val="0A101C"/>
+          </a:solidFill>
+          <a:ln>
+            <a:noFill/>
+          </a:ln>
+        </p:spPr>
+        <p:style>
+          <a:lnRef idx="1">
+            <a:schemeClr val="accent1"/>
+          </a:lnRef>
+          <a:fillRef idx="3">
+            <a:schemeClr val="accent1"/>
+          </a:fillRef>
+          <a:effectRef idx="2">
+            <a:schemeClr val="accent1"/>
+          </a:effectRef>
+          <a:fontRef idx="minor">
+            <a:schemeClr val="lt1"/>
+          </a:fontRef>
+        </p:style>
+        <p:txBody>
+          <a:bodyPr rtlCol="0" anchor="ctr"/>
+          <a:lstStyle/>
+          <a:p>
+            <a:pPr algn="ctr"/>
+          </a:p>
+        </p:txBody>
+      </p:sp>
+      <p:sp>
+        <p:nvSpPr>
+          <p:cNvPr id="13" name="TextBox 12"/>
+          <p:cNvSpPr txBox="1"/>
+          <p:nvPr/>
+        </p:nvSpPr>
+        <p:spPr>
+          <a:xfrm>
+            <a:off x="6126480" y="5074920"/>
+            <a:ext cx="5669280" cy="731520"/>
+          </a:xfrm>
+          <a:prstGeom prst="rect">
+            <a:avLst/>
+          </a:prstGeom>
+          <a:noFill/>
+        </p:spPr>
+        <p:txBody>
+          <a:bodyPr wrap="none">
+            <a:spAutoFit/>
+          </a:bodyPr>
+          <a:lstStyle/>
+          <a:p>
+            <a:pPr algn="ctr"/>
+            <a:r>
+              <a:rPr sz="1200" b="0" i="1">
+                <a:solidFill>
+                  <a:srgbClr val="555577"/>
+                </a:solidFill>
+              </a:rPr>
+              <a:t>bench_noise-{fft,kmp}.png · diagnose.png
+[cargo run -- bench-noise  /  cargo run -- plot-diagnose
+ --results checkpoints/auto-tfx-episode-diagnose.json]</a:t>
+            </a:r>
+          </a:p>
+        </p:txBody>
+      </p:sp>
+    </p:spTree>
+  </p:cSld>
+  <p:clrMapOvr>
+    <a:masterClrMapping/>
+  </p:clrMapOvr>
+</p:sld>
+</file>
+
+<file path=ppt/slides/slide22.xml><?xml version="1.0" encoding="utf-8"?>
+<p:sld xmlns:a="http://schemas.openxmlformats.org/drawingml/2006/main" xmlns:p="http://schemas.openxmlformats.org/presentationml/2006/main" xmlns:r="http://schemas.openxmlformats.org/officeDocument/2006/relationships">
+  <p:cSld>
+    <p:bg>
+      <p:bgPr>
+        <a:solidFill>
+          <a:srgbClr val="0F172A"/>
+        </a:solidFill>
+        <a:effectLst/>
+      </p:bgPr>
+    </p:bg>
+    <p:spTree>
+      <p:nvGrpSpPr>
+        <p:cNvPr id="1" name=""/>
+        <p:cNvGrpSpPr/>
+        <p:nvPr/>
+      </p:nvGrpSpPr>
+      <p:grpSpPr/>
+      <p:sp>
+        <p:nvSpPr>
+          <p:cNvPr id="2" name="Rectangle 1"/>
+          <p:cNvSpPr/>
+          <p:nvPr/>
+        </p:nvSpPr>
+        <p:spPr>
+          <a:xfrm>
+            <a:off x="0" y="0"/>
+            <a:ext cx="12188952" cy="960120"/>
+          </a:xfrm>
+          <a:prstGeom prst="rect">
+            <a:avLst/>
+          </a:prstGeom>
+          <a:solidFill>
+            <a:srgbClr val="16243E"/>
+          </a:solidFill>
+          <a:ln>
+            <a:noFill/>
+          </a:ln>
+        </p:spPr>
+        <p:style>
+          <a:lnRef idx="1">
+            <a:schemeClr val="accent1"/>
+          </a:lnRef>
+          <a:fillRef idx="3">
+            <a:schemeClr val="accent1"/>
+          </a:fillRef>
+          <a:effectRef idx="2">
+            <a:schemeClr val="accent1"/>
+          </a:effectRef>
+          <a:fontRef idx="minor">
+            <a:schemeClr val="lt1"/>
+          </a:fontRef>
+        </p:style>
+        <p:txBody>
+          <a:bodyPr rtlCol="0" anchor="ctr"/>
+          <a:lstStyle/>
+          <a:p>
+            <a:pPr algn="ctr"/>
+          </a:p>
+        </p:txBody>
+      </p:sp>
+      <p:sp>
+        <p:nvSpPr>
+          <p:cNvPr id="3" name="Rectangle 2"/>
+          <p:cNvSpPr/>
+          <p:nvPr/>
+        </p:nvSpPr>
+        <p:spPr>
+          <a:xfrm>
+            <a:off x="0" y="932688"/>
+            <a:ext cx="12188952" cy="45720"/>
+          </a:xfrm>
+          <a:prstGeom prst="rect">
+            <a:avLst/>
+          </a:prstGeom>
+          <a:solidFill>
+            <a:srgbClr val="4A9EFF"/>
+          </a:solidFill>
+          <a:ln>
+            <a:noFill/>
+          </a:ln>
+        </p:spPr>
+        <p:style>
+          <a:lnRef idx="1">
+            <a:schemeClr val="accent1"/>
+          </a:lnRef>
+          <a:fillRef idx="3">
+            <a:schemeClr val="accent1"/>
+          </a:fillRef>
+          <a:effectRef idx="2">
+            <a:schemeClr val="accent1"/>
+          </a:effectRef>
+          <a:fontRef idx="minor">
+            <a:schemeClr val="lt1"/>
+          </a:fontRef>
+        </p:style>
+        <p:txBody>
+          <a:bodyPr rtlCol="0" anchor="ctr"/>
+          <a:lstStyle/>
+          <a:p>
+            <a:pPr algn="ctr"/>
+          </a:p>
+        </p:txBody>
+      </p:sp>
+      <p:sp>
+        <p:nvSpPr>
+          <p:cNvPr id="4" name="TextBox 3"/>
+          <p:cNvSpPr txBox="1"/>
+          <p:nvPr/>
+        </p:nvSpPr>
+        <p:spPr>
+          <a:xfrm>
+            <a:off x="411480" y="164592"/>
+            <a:ext cx="11338560" cy="685800"/>
+          </a:xfrm>
+          <a:prstGeom prst="rect">
+            <a:avLst/>
+          </a:prstGeom>
+          <a:noFill/>
+        </p:spPr>
+        <p:txBody>
+          <a:bodyPr wrap="none">
+            <a:spAutoFit/>
+          </a:bodyPr>
+          <a:lstStyle/>
+          <a:p>
+            <a:pPr algn="l"/>
+            <a:r>
+              <a:rPr sz="2600" b="1" i="0">
+                <a:solidFill>
+                  <a:srgbClr val="FFFFFF"/>
+                </a:solidFill>
+              </a:rPr>
+              <a:t>Discussion</a:t>
+            </a:r>
+          </a:p>
+        </p:txBody>
+      </p:sp>
+      <p:sp>
+        <p:nvSpPr>
+          <p:cNvPr id="5" name="TextBox 4"/>
+          <p:cNvSpPr txBox="1"/>
+          <p:nvPr/>
+        </p:nvSpPr>
+        <p:spPr>
+          <a:xfrm>
+            <a:off x="411480" y="1143000"/>
+            <a:ext cx="5394960" cy="5303520"/>
+          </a:xfrm>
+          <a:prstGeom prst="rect">
+            <a:avLst/>
+          </a:prstGeom>
+          <a:noFill/>
+        </p:spPr>
+        <p:txBody>
+          <a:bodyPr wrap="none"/>
+          <a:lstStyle/>
+          <a:p>
+            <a:pPr>
+              <a:spcAft>
+                <a:spcPts val="300"/>
+              </a:spcAft>
+            </a:pPr>
+            <a:r>
+              <a:rPr sz="1500">
+                <a:solidFill>
+                  <a:srgbClr val="CCD6E8"/>
+                </a:solidFill>
+              </a:rPr>
+              <a:t>▸ </a:t>
+            </a:r>
+            <a:r>
+              <a:rPr sz="1500" b="0" i="0">
+                <a:solidFill>
+                  <a:srgbClr val="CCD6E8"/>
+                </a:solidFill>
+              </a:rPr>
+              <a:t>Episode return uses the true runtime signal directly</a:t>
+            </a:r>
+          </a:p>
+          <a:p>
+            <a:pPr lvl="1">
+              <a:spcAft>
+                <a:spcPts val="300"/>
+              </a:spcAft>
+            </a:pPr>
+            <a:r>
+              <a:rPr sz="1500">
+                <a:solidFill>
+                  <a:srgbClr val="CCD6E8"/>
+                </a:solidFill>
+              </a:rPr>
+              <a:t>  • </a:t>
+            </a:r>
+            <a:r>
+              <a:rPr sz="1500" b="0" i="0">
+                <a:solidFill>
+                  <a:srgbClr val="CCD6E8"/>
+                </a:solidFill>
+              </a:rPr>
+              <a:t>Every step in a winning sequence reinforced, even modest ones</a:t>
+            </a:r>
+          </a:p>
+          <a:p>
+            <a:pPr lvl="1">
+              <a:spcAft>
+                <a:spcPts val="300"/>
+              </a:spcAft>
+            </a:pPr>
+            <a:r>
+              <a:rPr sz="1500">
+                <a:solidFill>
+                  <a:srgbClr val="CCD6E8"/>
+                </a:solidFill>
+              </a:rPr>
+              <a:t>  • </a:t>
+            </a:r>
+            <a:r>
+              <a:rPr sz="1500" b="0" i="0">
+                <a:solidFill>
+                  <a:srgbClr val="CCD6E8"/>
+                </a:solidFill>
+              </a:rPr>
+              <a:t>No proxy metric — policy cannot be misled by IR statistics</a:t>
+            </a:r>
+          </a:p>
+          <a:p>
+            <a:pPr lvl="1">
+              <a:spcAft>
+                <a:spcPts val="300"/>
+              </a:spcAft>
+            </a:pPr>
+            <a:r>
+              <a:rPr sz="1500">
+                <a:solidFill>
+                  <a:srgbClr val="CCD6E8"/>
+                </a:solidFill>
+              </a:rPr>
+              <a:t>  • </a:t>
+            </a:r>
+            <a:r>
+              <a:rPr sz="1500" b="0" i="0">
+                <a:solidFill>
+                  <a:srgbClr val="CCD6E8"/>
+                </a:solidFill>
+              </a:rPr>
+              <a:t>Consistently steers toward faster binaries</a:t>
+            </a:r>
+          </a:p>
+          <a:p>
+            <a:pPr>
+              <a:spcAft>
+                <a:spcPts val="300"/>
+              </a:spcAft>
+            </a:pPr>
+            <a:r>
+              <a:rPr sz="1500">
+                <a:solidFill>
+                  <a:srgbClr val="CCD6E8"/>
+                </a:solidFill>
+              </a:rPr>
+              <a:t>▸ </a:t>
+            </a:r>
+            <a:r>
+              <a:rPr sz="1500" b="0" i="0">
+                <a:solidFill>
+                  <a:srgbClr val="CCD6E8"/>
+                </a:solidFill>
+              </a:rPr>
+              <a:t>Weighted return: proxy misalignment kills runtime gains</a:t>
+            </a:r>
+          </a:p>
+          <a:p>
+            <a:pPr lvl="1">
+              <a:spcAft>
+                <a:spcPts val="300"/>
+              </a:spcAft>
+            </a:pPr>
+            <a:r>
+              <a:rPr sz="1500">
+                <a:solidFill>
+                  <a:srgbClr val="CCD6E8"/>
+                </a:solidFill>
+              </a:rPr>
+              <a:t>  • </a:t>
+            </a:r>
+            <a:r>
+              <a:rPr sz="1500" b="0" i="0">
+                <a:solidFill>
+                  <a:srgbClr val="CCD6E8"/>
+                </a:solidFill>
+              </a:rPr>
+              <a:t>IR reduction rewarded; no gradient signal for actual speedup</a:t>
+            </a:r>
+          </a:p>
+          <a:p>
+            <a:pPr lvl="1">
+              <a:spcAft>
+                <a:spcPts val="300"/>
+              </a:spcAft>
+            </a:pPr>
+            <a:r>
+              <a:rPr sz="1500">
+                <a:solidFill>
+                  <a:srgbClr val="CCD6E8"/>
+                </a:solidFill>
+              </a:rPr>
+              <a:t>  • </a:t>
+            </a:r>
+            <a:r>
+              <a:rPr sz="1500" b="0" i="0">
+                <a:solidFill>
+                  <a:srgbClr val="CCD6E8"/>
+                </a:solidFill>
+              </a:rPr>
+              <a:t>Higher EV (</a:t>
+            </a:r>
+            <a:r>
+              <a:rPr sz="1500" b="0" i="0">
+                <a:solidFill>
+                  <a:srgbClr val="FFD75E"/>
+                </a:solidFill>
+              </a:rPr>
+              <a:t>0.87</a:t>
+            </a:r>
+            <a:r>
+              <a:rPr sz="1500" b="0" i="0">
+                <a:solidFill>
+                  <a:srgbClr val="CCD6E8"/>
+                </a:solidFill>
+              </a:rPr>
+              <a:t>/</a:t>
+            </a:r>
+            <a:r>
+              <a:rPr sz="1500" b="0" i="0">
+                <a:solidFill>
+                  <a:srgbClr val="FFD75E"/>
+                </a:solidFill>
+              </a:rPr>
+              <a:t>0.86</a:t>
+            </a:r>
+            <a:r>
+              <a:rPr sz="1500" b="0" i="0">
+                <a:solidFill>
+                  <a:srgbClr val="CCD6E8"/>
+                </a:solidFill>
+              </a:rPr>
+              <a:t>) but lower speedup (</a:t>
+            </a:r>
+            <a:r>
+              <a:rPr sz="1500" b="0" i="0">
+                <a:solidFill>
+                  <a:srgbClr val="FFD75E"/>
+                </a:solidFill>
+              </a:rPr>
+              <a:t>+6.5%</a:t>
+            </a:r>
+            <a:r>
+              <a:rPr sz="1500" b="0" i="0">
+                <a:solidFill>
+                  <a:srgbClr val="CCD6E8"/>
+                </a:solidFill>
+              </a:rPr>
+              <a:t>/</a:t>
+            </a:r>
+            <a:r>
+              <a:rPr sz="1500" b="0" i="0">
+                <a:solidFill>
+                  <a:srgbClr val="FFD75E"/>
+                </a:solidFill>
+              </a:rPr>
+              <a:t>+9.2%</a:t>
+            </a:r>
+            <a:r>
+              <a:rPr sz="1500" b="0" i="0">
+                <a:solidFill>
+                  <a:srgbClr val="CCD6E8"/>
+                </a:solidFill>
+              </a:rPr>
+              <a:t>) vs episode</a:t>
+            </a:r>
+          </a:p>
+          <a:p>
+            <a:pPr lvl="1">
+              <a:spcAft>
+                <a:spcPts val="300"/>
+              </a:spcAft>
+            </a:pPr>
+            <a:r>
+              <a:rPr sz="1500">
+                <a:solidFill>
+                  <a:srgbClr val="CCD6E8"/>
+                </a:solidFill>
+              </a:rPr>
+              <a:t>  • </a:t>
+            </a:r>
+            <a:r>
+              <a:rPr sz="1500" b="0" i="0">
+                <a:solidFill>
+                  <a:srgbClr val="CCD6E8"/>
+                </a:solidFill>
+              </a:rPr>
+              <a:t>ir_corr confirms: top IR-reducing fft sequences all −</a:t>
+            </a:r>
+            <a:r>
+              <a:rPr sz="1500" b="0" i="0">
+                <a:solidFill>
+                  <a:srgbClr val="FFD75E"/>
+                </a:solidFill>
+              </a:rPr>
+              <a:t>8%</a:t>
+            </a:r>
+            <a:r>
+              <a:rPr sz="1500" b="0" i="0">
+                <a:solidFill>
+                  <a:srgbClr val="CCD6E8"/>
+                </a:solidFill>
+              </a:rPr>
+              <a:t> to −</a:t>
+            </a:r>
+            <a:r>
+              <a:rPr sz="1500" b="0" i="0">
+                <a:solidFill>
+                  <a:srgbClr val="FFD75E"/>
+                </a:solidFill>
+              </a:rPr>
+              <a:t>35%</a:t>
+            </a:r>
+            <a:r>
+              <a:rPr sz="1500" b="0" i="0">
+                <a:solidFill>
+                  <a:srgbClr val="CCD6E8"/>
+                </a:solidFill>
+              </a:rPr>
+              <a:t> runtime</a:t>
+            </a:r>
+          </a:p>
+          <a:p>
+            <a:pPr>
+              <a:spcAft>
+                <a:spcPts val="300"/>
+              </a:spcAft>
+            </a:pPr>
+            <a:r>
+              <a:rPr sz="1500">
+                <a:solidFill>
+                  <a:srgbClr val="CCD6E8"/>
+                </a:solidFill>
+              </a:rPr>
+              <a:t>▸ </a:t>
+            </a:r>
+            <a:r>
+              <a:rPr sz="1500" b="0" i="0">
+                <a:solidFill>
+                  <a:srgbClr val="CCD6E8"/>
+                </a:solidFill>
+              </a:rPr>
+              <a:t>Transformer vs GRU: both architectures comparable</a:t>
+            </a:r>
+          </a:p>
+          <a:p>
+            <a:pPr lvl="1">
+              <a:spcAft>
+                <a:spcPts val="300"/>
+              </a:spcAft>
+            </a:pPr>
+            <a:r>
+              <a:rPr sz="1500">
+                <a:solidFill>
+                  <a:srgbClr val="CCD6E8"/>
+                </a:solidFill>
+              </a:rPr>
+              <a:t>  • </a:t>
+            </a:r>
+            <a:r>
+              <a:rPr sz="1500" b="0" i="0">
+                <a:solidFill>
+                  <a:srgbClr val="CCD6E8"/>
+                </a:solidFill>
+              </a:rPr>
+              <a:t>GRU: recency bias — free inductive prior, lower training convergence</a:t>
+            </a:r>
+          </a:p>
+          <a:p>
+            <a:pPr lvl="1">
+              <a:spcAft>
+                <a:spcPts val="300"/>
+              </a:spcAft>
+            </a:pPr>
+            <a:r>
+              <a:rPr sz="1500">
+                <a:solidFill>
+                  <a:srgbClr val="CCD6E8"/>
+                </a:solidFill>
+              </a:rPr>
+              <a:t>  • </a:t>
+            </a:r>
+            <a:r>
+              <a:rPr sz="1500" b="0" i="0">
+                <a:solidFill>
+                  <a:srgbClr val="CCD6E8"/>
+                </a:solidFill>
+              </a:rPr>
+              <a:t>TFX: non-local attention — slower training but similar final eval</a:t>
+            </a:r>
+          </a:p>
+          <a:p>
+            <a:pPr lvl="1">
+              <a:spcAft>
+                <a:spcPts val="300"/>
+              </a:spcAft>
+            </a:pPr>
+            <a:r>
+              <a:rPr sz="1500">
+                <a:solidFill>
+                  <a:srgbClr val="CCD6E8"/>
+                </a:solidFill>
+              </a:rPr>
+              <a:t>  • </a:t>
+            </a:r>
+            <a:r>
+              <a:rPr sz="1500" b="0" i="0">
+                <a:solidFill>
+                  <a:srgbClr val="CCD6E8"/>
+                </a:solidFill>
+              </a:rPr>
+              <a:t>Architecture gap &lt; return-formulation gap</a:t>
+            </a:r>
+          </a:p>
+        </p:txBody>
+      </p:sp>
+      <p:sp>
+        <p:nvSpPr>
+          <p:cNvPr id="6" name="Rectangle 5"/>
+          <p:cNvSpPr/>
+          <p:nvPr/>
+        </p:nvSpPr>
+        <p:spPr>
+          <a:xfrm>
+            <a:off x="5943600" y="1143000"/>
+            <a:ext cx="5897880" cy="5303520"/>
+          </a:xfrm>
+          <a:prstGeom prst="rect">
+            <a:avLst/>
+          </a:prstGeom>
+          <a:solidFill>
+            <a:srgbClr val="16243E"/>
+          </a:solidFill>
+          <a:ln>
+            <a:noFill/>
+          </a:ln>
+        </p:spPr>
+        <p:style>
+          <a:lnRef idx="1">
+            <a:schemeClr val="accent1"/>
+          </a:lnRef>
+          <a:fillRef idx="3">
+            <a:schemeClr val="accent1"/>
+          </a:fillRef>
+          <a:effectRef idx="2">
+            <a:schemeClr val="accent1"/>
+          </a:effectRef>
+          <a:fontRef idx="minor">
+            <a:schemeClr val="lt1"/>
+          </a:fontRef>
+        </p:style>
+        <p:txBody>
+          <a:bodyPr rtlCol="0" anchor="ctr"/>
+          <a:lstStyle/>
+          <a:p>
+            <a:pPr algn="ctr"/>
+          </a:p>
+        </p:txBody>
+      </p:sp>
+      <p:sp>
+        <p:nvSpPr>
+          <p:cNvPr id="7" name="TextBox 6"/>
+          <p:cNvSpPr txBox="1"/>
+          <p:nvPr/>
+        </p:nvSpPr>
+        <p:spPr>
+          <a:xfrm>
+            <a:off x="6035040" y="1188720"/>
+            <a:ext cx="5715000" cy="365760"/>
+          </a:xfrm>
+          <a:prstGeom prst="rect">
+            <a:avLst/>
+          </a:prstGeom>
+          <a:noFill/>
+        </p:spPr>
+        <p:txBody>
+          <a:bodyPr wrap="none">
+            <a:spAutoFit/>
+          </a:bodyPr>
+          <a:lstStyle/>
+          <a:p>
+            <a:pPr algn="l"/>
+            <a:r>
+              <a:rPr sz="1700" b="1" i="0">
+                <a:solidFill>
+                  <a:srgbClr val="FFD75E"/>
+                </a:solidFill>
+              </a:rPr>
+              <a:t>Stop-Token Behaviour</a:t>
+            </a:r>
+          </a:p>
+        </p:txBody>
+      </p:sp>
+      <p:sp>
+        <p:nvSpPr>
+          <p:cNvPr id="8" name="TextBox 7"/>
+          <p:cNvSpPr txBox="1"/>
+          <p:nvPr/>
+        </p:nvSpPr>
+        <p:spPr>
+          <a:xfrm>
+            <a:off x="6035040" y="1627632"/>
+            <a:ext cx="5715000" cy="3200400"/>
+          </a:xfrm>
+          <a:prstGeom prst="rect">
+            <a:avLst/>
+          </a:prstGeom>
+          <a:noFill/>
+        </p:spPr>
+        <p:txBody>
+          <a:bodyPr wrap="none"/>
+          <a:lstStyle/>
+          <a:p>
+            <a:pPr>
+              <a:spcAft>
+                <a:spcPts val="300"/>
+              </a:spcAft>
+            </a:pPr>
+            <a:r>
+              <a:rPr sz="1300">
+                <a:solidFill>
+                  <a:srgbClr val="CCD6E8"/>
+                </a:solidFill>
+              </a:rPr>
+              <a:t>▸ </a:t>
+            </a:r>
+            <a:r>
+              <a:rPr sz="1300" b="0" i="0">
+                <a:solidFill>
+                  <a:srgbClr val="CCD6E8"/>
+                </a:solidFill>
+              </a:rPr>
+              <a:t>Policy never learns to Stop early — always uses all K=</a:t>
+            </a:r>
+            <a:r>
+              <a:rPr sz="1300" b="0" i="0">
+                <a:solidFill>
+                  <a:srgbClr val="FFD75E"/>
+                </a:solidFill>
+              </a:rPr>
+              <a:t>20</a:t>
+            </a:r>
+            <a:r>
+              <a:rPr sz="1300" b="0" i="0">
+                <a:solidFill>
+                  <a:srgbClr val="CCD6E8"/>
+                </a:solidFill>
+              </a:rPr>
+              <a:t> steps</a:t>
+            </a:r>
+          </a:p>
+          <a:p>
+            <a:pPr>
+              <a:spcAft>
+                <a:spcPts val="300"/>
+              </a:spcAft>
+            </a:pPr>
+            <a:r>
+              <a:rPr sz="1300">
+                <a:solidFill>
+                  <a:srgbClr val="CCD6E8"/>
+                </a:solidFill>
+              </a:rPr>
+              <a:t>▸ </a:t>
+            </a:r>
+            <a:r>
+              <a:rPr sz="1300" b="0" i="0">
+                <a:solidFill>
+                  <a:srgbClr val="CCD6E8"/>
+                </a:solidFill>
+              </a:rPr>
+              <a:t>Rational given credit-assignment structure:</a:t>
+            </a:r>
+          </a:p>
+          <a:p>
+            <a:pPr lvl="1">
+              <a:spcAft>
+                <a:spcPts val="300"/>
+              </a:spcAft>
+            </a:pPr>
+            <a:r>
+              <a:rPr sz="1300">
+                <a:solidFill>
+                  <a:srgbClr val="CCD6E8"/>
+                </a:solidFill>
+              </a:rPr>
+              <a:t>  • </a:t>
+            </a:r>
+            <a:r>
+              <a:rPr sz="1300" b="0" i="0">
+                <a:solidFill>
+                  <a:srgbClr val="CCD6E8"/>
+                </a:solidFill>
+              </a:rPr>
+              <a:t>Q(Stop) = current speedup</a:t>
+            </a:r>
+          </a:p>
+          <a:p>
+            <a:pPr lvl="1">
+              <a:spcAft>
+                <a:spcPts val="300"/>
+              </a:spcAft>
+            </a:pPr>
+            <a:r>
+              <a:rPr sz="1300">
+                <a:solidFill>
+                  <a:srgbClr val="CCD6E8"/>
+                </a:solidFill>
+              </a:rPr>
+              <a:t>  • </a:t>
+            </a:r>
+            <a:r>
+              <a:rPr sz="1300" b="0" i="0">
+                <a:solidFill>
+                  <a:srgbClr val="CCD6E8"/>
+                </a:solidFill>
+              </a:rPr>
+              <a:t>Q(any pass) = E[future speedup] — uncertain, possibly higher</a:t>
+            </a:r>
+          </a:p>
+          <a:p>
+            <a:pPr>
+              <a:spcAft>
+                <a:spcPts val="300"/>
+              </a:spcAft>
+            </a:pPr>
+            <a:r>
+              <a:rPr sz="1300">
+                <a:solidFill>
+                  <a:srgbClr val="CCD6E8"/>
+                </a:solidFill>
+              </a:rPr>
+              <a:t>▸ </a:t>
+            </a:r>
+            <a:r>
+              <a:rPr sz="1300" b="0" i="0">
+                <a:solidFill>
+                  <a:srgbClr val="CCD6E8"/>
+                </a:solidFill>
+              </a:rPr>
+              <a:t>No-op penalty helps at the margin but doesn't fix the asymmetry:</a:t>
+            </a:r>
+          </a:p>
+          <a:p>
+            <a:pPr lvl="1">
+              <a:spcAft>
+                <a:spcPts val="300"/>
+              </a:spcAft>
+            </a:pPr>
+            <a:r>
+              <a:rPr sz="1300">
+                <a:solidFill>
+                  <a:srgbClr val="CCD6E8"/>
+                </a:solidFill>
+              </a:rPr>
+              <a:t>  • </a:t>
+            </a:r>
+            <a:r>
+              <a:rPr sz="1300" b="0" i="0">
+                <a:solidFill>
+                  <a:srgbClr val="CCD6E8"/>
+                </a:solidFill>
+              </a:rPr>
+              <a:t>Cost of stopping: unbounded foregone gain</a:t>
+            </a:r>
+          </a:p>
+          <a:p>
+            <a:pPr lvl="1">
+              <a:spcAft>
+                <a:spcPts val="300"/>
+              </a:spcAft>
+            </a:pPr>
+            <a:r>
+              <a:rPr sz="1300">
+                <a:solidFill>
+                  <a:srgbClr val="CCD6E8"/>
+                </a:solidFill>
+              </a:rPr>
+              <a:t>  • </a:t>
+            </a:r>
+            <a:r>
+              <a:rPr sz="1300" b="0" i="0">
+                <a:solidFill>
+                  <a:srgbClr val="CCD6E8"/>
+                </a:solidFill>
+              </a:rPr>
+              <a:t>Cost of one more pass: at most p = </a:t>
+            </a:r>
+            <a:r>
+              <a:rPr sz="1300" b="0" i="0">
+                <a:solidFill>
+                  <a:srgbClr val="FFD75E"/>
+                </a:solidFill>
+              </a:rPr>
+              <a:t>0.025</a:t>
+            </a:r>
+          </a:p>
+          <a:p>
+            <a:pPr>
+              <a:spcAft>
+                <a:spcPts val="300"/>
+              </a:spcAft>
+            </a:pPr>
+            <a:r>
+              <a:rPr sz="1300">
+                <a:solidFill>
+                  <a:srgbClr val="CCD6E8"/>
+                </a:solidFill>
+              </a:rPr>
+              <a:t>▸ </a:t>
+            </a:r>
+            <a:r>
+              <a:rPr sz="1300" b="0" i="0">
+                <a:solidFill>
+                  <a:srgbClr val="CCD6E8"/>
+                </a:solidFill>
+              </a:rPr>
+              <a:t>Many top sequences: </a:t>
+            </a:r>
+            <a:r>
+              <a:rPr sz="1300" b="0" i="0">
+                <a:solidFill>
+                  <a:srgbClr val="FFD75E"/>
+                </a:solidFill>
+              </a:rPr>
+              <a:t>5</a:t>
+            </a:r>
+            <a:r>
+              <a:rPr sz="1300" b="0" i="0">
+                <a:solidFill>
+                  <a:srgbClr val="CCD6E8"/>
+                </a:solidFill>
+              </a:rPr>
+              <a:t>–</a:t>
+            </a:r>
+            <a:r>
+              <a:rPr sz="1300" b="0" i="0">
+                <a:solidFill>
+                  <a:srgbClr val="FFD75E"/>
+                </a:solidFill>
+              </a:rPr>
+              <a:t>7</a:t>
+            </a:r>
+            <a:r>
+              <a:rPr sz="1300" b="0" i="0">
+                <a:solidFill>
+                  <a:srgbClr val="CCD6E8"/>
+                </a:solidFill>
+              </a:rPr>
+              <a:t> repetitions of dominant pass</a:t>
+            </a:r>
+          </a:p>
+          <a:p>
+            <a:pPr lvl="1">
+              <a:spcAft>
+                <a:spcPts val="300"/>
+              </a:spcAft>
+            </a:pPr>
+            <a:r>
+              <a:rPr sz="1300">
+                <a:solidFill>
+                  <a:srgbClr val="CCD6E8"/>
+                </a:solidFill>
+              </a:rPr>
+              <a:t>  • </a:t>
+            </a:r>
+            <a:r>
+              <a:rPr sz="1300" b="0" i="0">
+                <a:solidFill>
+                  <a:srgbClr val="CCD6E8"/>
+                </a:solidFill>
+              </a:rPr>
+              <a:t>Repeating is safe and occasionally lucky</a:t>
+            </a:r>
+          </a:p>
+        </p:txBody>
+      </p:sp>
+      <p:sp>
+        <p:nvSpPr>
+          <p:cNvPr id="9" name="TextBox 8"/>
+          <p:cNvSpPr txBox="1"/>
+          <p:nvPr/>
+        </p:nvSpPr>
+        <p:spPr>
+          <a:xfrm>
+            <a:off x="6035040" y="4937760"/>
+            <a:ext cx="5715000" cy="329184"/>
+          </a:xfrm>
+          <a:prstGeom prst="rect">
+            <a:avLst/>
+          </a:prstGeom>
+          <a:noFill/>
+        </p:spPr>
+        <p:txBody>
+          <a:bodyPr wrap="none">
+            <a:spAutoFit/>
+          </a:bodyPr>
+          <a:lstStyle/>
+          <a:p>
+            <a:pPr algn="l"/>
+            <a:r>
+              <a:rPr sz="1400" b="1" i="0">
+                <a:solidFill>
+                  <a:srgbClr val="56D3A0"/>
+                </a:solidFill>
+              </a:rPr>
+              <a:t>Potential Fix:</a:t>
+            </a:r>
+          </a:p>
+        </p:txBody>
+      </p:sp>
+      <p:sp>
+        <p:nvSpPr>
+          <p:cNvPr id="10" name="TextBox 9"/>
+          <p:cNvSpPr txBox="1"/>
+          <p:nvPr/>
+        </p:nvSpPr>
+        <p:spPr>
+          <a:xfrm>
+            <a:off x="6035040" y="5321808"/>
+            <a:ext cx="5715000" cy="822960"/>
+          </a:xfrm>
+          <a:prstGeom prst="rect">
+            <a:avLst/>
+          </a:prstGeom>
+          <a:noFill/>
+        </p:spPr>
+        <p:txBody>
+          <a:bodyPr wrap="none"/>
+          <a:lstStyle/>
+          <a:p>
+            <a:pPr>
+              <a:spcAft>
+                <a:spcPts val="300"/>
+              </a:spcAft>
+            </a:pPr>
+            <a:r>
+              <a:rPr sz="1300">
+                <a:solidFill>
+                  <a:srgbClr val="CCD6E8"/>
+                </a:solidFill>
+              </a:rPr>
+              <a:t>▸ </a:t>
+            </a:r>
+            <a:r>
+              <a:rPr sz="1300" b="0" i="0">
+                <a:solidFill>
+                  <a:srgbClr val="CCD6E8"/>
+                </a:solidFill>
+              </a:rPr>
+              <a:t>Per-step length cost, or Stop bonus ≥ E[marginal return from one more pass]</a:t>
+            </a:r>
+          </a:p>
+        </p:txBody>
+      </p:sp>
+    </p:spTree>
+  </p:cSld>
+  <p:clrMapOvr>
+    <a:masterClrMapping/>
+  </p:clrMapOvr>
+</p:sld>
+</file>
+
+<file path=ppt/slides/slide23.xml><?xml version="1.0" encoding="utf-8"?>
+<p:sld xmlns:a="http://schemas.openxmlformats.org/drawingml/2006/main" xmlns:p="http://schemas.openxmlformats.org/presentationml/2006/main" xmlns:r="http://schemas.openxmlformats.org/officeDocument/2006/relationships">
+  <p:cSld>
+    <p:bg>
+      <p:bgPr>
+        <a:solidFill>
+          <a:srgbClr val="0F172A"/>
+        </a:solidFill>
+        <a:effectLst/>
+      </p:bgPr>
+    </p:bg>
+    <p:spTree>
+      <p:nvGrpSpPr>
+        <p:cNvPr id="1" name=""/>
+        <p:cNvGrpSpPr/>
+        <p:nvPr/>
+      </p:nvGrpSpPr>
+      <p:grpSpPr/>
+      <p:sp>
+        <p:nvSpPr>
+          <p:cNvPr id="2" name="Rectangle 1"/>
+          <p:cNvSpPr/>
+          <p:nvPr/>
+        </p:nvSpPr>
+        <p:spPr>
+          <a:xfrm>
+            <a:off x="0" y="0"/>
+            <a:ext cx="12188952" cy="960120"/>
+          </a:xfrm>
+          <a:prstGeom prst="rect">
+            <a:avLst/>
+          </a:prstGeom>
+          <a:solidFill>
+            <a:srgbClr val="16243E"/>
+          </a:solidFill>
+          <a:ln>
+            <a:noFill/>
+          </a:ln>
+        </p:spPr>
+        <p:style>
+          <a:lnRef idx="1">
+            <a:schemeClr val="accent1"/>
+          </a:lnRef>
+          <a:fillRef idx="3">
+            <a:schemeClr val="accent1"/>
+          </a:fillRef>
+          <a:effectRef idx="2">
+            <a:schemeClr val="accent1"/>
+          </a:effectRef>
+          <a:fontRef idx="minor">
+            <a:schemeClr val="lt1"/>
+          </a:fontRef>
+        </p:style>
+        <p:txBody>
+          <a:bodyPr rtlCol="0" anchor="ctr"/>
+          <a:lstStyle/>
+          <a:p>
+            <a:pPr algn="ctr"/>
+          </a:p>
+        </p:txBody>
+      </p:sp>
+      <p:sp>
+        <p:nvSpPr>
+          <p:cNvPr id="3" name="Rectangle 2"/>
+          <p:cNvSpPr/>
+          <p:nvPr/>
+        </p:nvSpPr>
+        <p:spPr>
+          <a:xfrm>
+            <a:off x="0" y="932688"/>
+            <a:ext cx="12188952" cy="45720"/>
+          </a:xfrm>
+          <a:prstGeom prst="rect">
+            <a:avLst/>
+          </a:prstGeom>
+          <a:solidFill>
+            <a:srgbClr val="4A9EFF"/>
+          </a:solidFill>
+          <a:ln>
+            <a:noFill/>
+          </a:ln>
+        </p:spPr>
+        <p:style>
+          <a:lnRef idx="1">
+            <a:schemeClr val="accent1"/>
+          </a:lnRef>
+          <a:fillRef idx="3">
+            <a:schemeClr val="accent1"/>
+          </a:fillRef>
+          <a:effectRef idx="2">
+            <a:schemeClr val="accent1"/>
+          </a:effectRef>
+          <a:fontRef idx="minor">
+            <a:schemeClr val="lt1"/>
+          </a:fontRef>
+        </p:style>
+        <p:txBody>
+          <a:bodyPr rtlCol="0" anchor="ctr"/>
+          <a:lstStyle/>
+          <a:p>
+            <a:pPr algn="ctr"/>
+          </a:p>
+        </p:txBody>
+      </p:sp>
+      <p:sp>
+        <p:nvSpPr>
+          <p:cNvPr id="4" name="TextBox 3"/>
+          <p:cNvSpPr txBox="1"/>
+          <p:nvPr/>
+        </p:nvSpPr>
+        <p:spPr>
+          <a:xfrm>
+            <a:off x="411480" y="164592"/>
+            <a:ext cx="11338560" cy="685800"/>
+          </a:xfrm>
+          <a:prstGeom prst="rect">
+            <a:avLst/>
+          </a:prstGeom>
+          <a:noFill/>
+        </p:spPr>
+        <p:txBody>
+          <a:bodyPr wrap="none">
+            <a:spAutoFit/>
+          </a:bodyPr>
+          <a:lstStyle/>
+          <a:p>
+            <a:pPr algn="l"/>
+            <a:r>
+              <a:rPr sz="2600" b="1" i="0">
+                <a:solidFill>
+                  <a:srgbClr val="FFFFFF"/>
+                </a:solidFill>
+              </a:rPr>
+              <a:t>Limitations &amp; Future Work</a:t>
+            </a:r>
+          </a:p>
+        </p:txBody>
+      </p:sp>
+      <p:sp>
+        <p:nvSpPr>
+          <p:cNvPr id="5" name="TextBox 4"/>
+          <p:cNvSpPr txBox="1"/>
+          <p:nvPr/>
+        </p:nvSpPr>
+        <p:spPr>
+          <a:xfrm>
+            <a:off x="411480" y="1143000"/>
+            <a:ext cx="5394960" cy="2560320"/>
+          </a:xfrm>
+          <a:prstGeom prst="rect">
+            <a:avLst/>
+          </a:prstGeom>
+          <a:noFill/>
+        </p:spPr>
+        <p:txBody>
+          <a:bodyPr wrap="none"/>
+          <a:lstStyle/>
+          <a:p>
+            <a:pPr>
+              <a:spcAft>
+                <a:spcPts val="300"/>
+              </a:spcAft>
+            </a:pPr>
+            <a:r>
+              <a:rPr sz="1600">
+                <a:solidFill>
+                  <a:srgbClr val="CCD6E8"/>
+                </a:solidFill>
+              </a:rPr>
+              <a:t>▸ </a:t>
+            </a:r>
+            <a:r>
+              <a:rPr sz="1600" b="0" i="0">
+                <a:solidFill>
+                  <a:srgbClr val="CCD6E8"/>
+                </a:solidFill>
+              </a:rPr>
+              <a:t>Limitations</a:t>
+            </a:r>
+          </a:p>
+          <a:p>
+            <a:pPr lvl="1">
+              <a:spcAft>
+                <a:spcPts val="300"/>
+              </a:spcAft>
+            </a:pPr>
+            <a:r>
+              <a:rPr sz="1600">
+                <a:solidFill>
+                  <a:srgbClr val="CCD6E8"/>
+                </a:solidFill>
+              </a:rPr>
+              <a:t>  • </a:t>
+            </a:r>
+            <a:r>
+              <a:rPr sz="1600" b="0" i="0">
+                <a:solidFill>
+                  <a:srgbClr val="CCD6E8"/>
+                </a:solidFill>
+              </a:rPr>
+              <a:t>Benchmark timing noise limits per-episode credit precision</a:t>
+            </a:r>
+          </a:p>
+          <a:p>
+            <a:pPr lvl="1">
+              <a:spcAft>
+                <a:spcPts val="300"/>
+              </a:spcAft>
+            </a:pPr>
+            <a:r>
+              <a:rPr sz="1600">
+                <a:solidFill>
+                  <a:srgbClr val="CCD6E8"/>
+                </a:solidFill>
+              </a:rPr>
+              <a:t>  • </a:t>
+            </a:r>
+            <a:r>
+              <a:rPr sz="1600" b="0" i="0">
+                <a:solidFill>
+                  <a:srgbClr val="CCD6E8"/>
+                </a:solidFill>
+              </a:rPr>
+              <a:t>Training set of </a:t>
+            </a:r>
+            <a:r>
+              <a:rPr sz="1600" b="0" i="0">
+                <a:solidFill>
+                  <a:srgbClr val="FFD75E"/>
+                </a:solidFill>
+              </a:rPr>
+              <a:t>6</a:t>
+            </a:r>
+            <a:r>
+              <a:rPr sz="1600" b="0" i="0">
+                <a:solidFill>
+                  <a:srgbClr val="CCD6E8"/>
+                </a:solidFill>
+              </a:rPr>
+              <a:t> functions is small</a:t>
+            </a:r>
+          </a:p>
+          <a:p>
+            <a:pPr lvl="1">
+              <a:spcAft>
+                <a:spcPts val="300"/>
+              </a:spcAft>
+            </a:pPr>
+            <a:r>
+              <a:rPr sz="1600">
+                <a:solidFill>
+                  <a:srgbClr val="CCD6E8"/>
+                </a:solidFill>
+              </a:rPr>
+              <a:t>  • </a:t>
+            </a:r>
+            <a:r>
+              <a:rPr sz="1600" b="0" i="0">
+                <a:solidFill>
+                  <a:srgbClr val="CCD6E8"/>
+                </a:solidFill>
+              </a:rPr>
+              <a:t>Pass parameters not tuned (loop-unroll count always default)</a:t>
+            </a:r>
+          </a:p>
+          <a:p>
+            <a:pPr lvl="1">
+              <a:spcAft>
+                <a:spcPts val="300"/>
+              </a:spcAft>
+            </a:pPr>
+            <a:r>
+              <a:rPr sz="1600">
+                <a:solidFill>
+                  <a:srgbClr val="CCD6E8"/>
+                </a:solidFill>
+              </a:rPr>
+              <a:t>  • </a:t>
+            </a:r>
+            <a:r>
+              <a:rPr sz="1600" b="0" i="0">
+                <a:solidFill>
+                  <a:srgbClr val="CCD6E8"/>
+                </a:solidFill>
+              </a:rPr>
+              <a:t>Effective horizon = K; Stop token unused</a:t>
+            </a:r>
+          </a:p>
+        </p:txBody>
+      </p:sp>
+      <p:sp>
+        <p:nvSpPr>
+          <p:cNvPr id="6" name="TextBox 5"/>
+          <p:cNvSpPr txBox="1"/>
+          <p:nvPr/>
+        </p:nvSpPr>
+        <p:spPr>
+          <a:xfrm>
+            <a:off x="411480" y="3931920"/>
+            <a:ext cx="5394960" cy="2560320"/>
+          </a:xfrm>
+          <a:prstGeom prst="rect">
+            <a:avLst/>
+          </a:prstGeom>
+          <a:noFill/>
+        </p:spPr>
+        <p:txBody>
+          <a:bodyPr wrap="none"/>
+          <a:lstStyle/>
+          <a:p>
+            <a:pPr>
+              <a:spcAft>
+                <a:spcPts val="300"/>
+              </a:spcAft>
+            </a:pPr>
+            <a:r>
+              <a:rPr sz="1600">
+                <a:solidFill>
+                  <a:srgbClr val="CCD6E8"/>
+                </a:solidFill>
+              </a:rPr>
+              <a:t>▸ </a:t>
+            </a:r>
+            <a:r>
+              <a:rPr sz="1600" b="0" i="0">
+                <a:solidFill>
+                  <a:srgbClr val="CCD6E8"/>
+                </a:solidFill>
+              </a:rPr>
+              <a:t>Key Findings</a:t>
+            </a:r>
+          </a:p>
+          <a:p>
+            <a:pPr lvl="1">
+              <a:spcAft>
+                <a:spcPts val="300"/>
+              </a:spcAft>
+            </a:pPr>
+            <a:r>
+              <a:rPr sz="1600">
+                <a:solidFill>
+                  <a:srgbClr val="CCD6E8"/>
+                </a:solidFill>
+              </a:rPr>
+              <a:t>  • </a:t>
+            </a:r>
+            <a:r>
+              <a:rPr sz="1600" b="0" i="0">
+                <a:solidFill>
+                  <a:srgbClr val="CCD6E8"/>
+                </a:solidFill>
+              </a:rPr>
+              <a:t>Episode return &gt; weighted: IR reduction is a poor runtime proxy</a:t>
+            </a:r>
+          </a:p>
+          <a:p>
+            <a:pPr lvl="1">
+              <a:spcAft>
+                <a:spcPts val="300"/>
+              </a:spcAft>
+            </a:pPr>
+            <a:r>
+              <a:rPr sz="1600">
+                <a:solidFill>
+                  <a:srgbClr val="CCD6E8"/>
+                </a:solidFill>
+              </a:rPr>
+              <a:t>  • </a:t>
+            </a:r>
+            <a:r>
+              <a:rPr sz="1600" b="0" i="0">
+                <a:solidFill>
+                  <a:srgbClr val="CCD6E8"/>
+                </a:solidFill>
+              </a:rPr>
+              <a:t>Pool (</a:t>
+            </a:r>
+            <a:r>
+              <a:rPr sz="1600" b="0" i="0">
+                <a:solidFill>
+                  <a:srgbClr val="FFD75E"/>
+                </a:solidFill>
+              </a:rPr>
+              <a:t>38</a:t>
+            </a:r>
+            <a:r>
+              <a:rPr sz="1600" b="0" i="0">
+                <a:solidFill>
+                  <a:srgbClr val="CCD6E8"/>
+                </a:solidFill>
+              </a:rPr>
+              <a:t> fn) failed to converge — episodes per function is the constraint</a:t>
+            </a:r>
+          </a:p>
+          <a:p>
+            <a:pPr lvl="1">
+              <a:spcAft>
+                <a:spcPts val="300"/>
+              </a:spcAft>
+            </a:pPr>
+            <a:r>
+              <a:rPr sz="1600">
+                <a:solidFill>
+                  <a:srgbClr val="CCD6E8"/>
+                </a:solidFill>
+              </a:rPr>
+              <a:t>  • </a:t>
+            </a:r>
+            <a:r>
+              <a:rPr sz="1600" b="0" i="0">
+                <a:solidFill>
+                  <a:srgbClr val="CCD6E8"/>
+                </a:solidFill>
+              </a:rPr>
+              <a:t>Architecture gap smaller than return-formulation gap</a:t>
+            </a:r>
+          </a:p>
+        </p:txBody>
+      </p:sp>
+      <p:sp>
+        <p:nvSpPr>
+          <p:cNvPr id="7" name="TextBox 6"/>
+          <p:cNvSpPr txBox="1"/>
+          <p:nvPr/>
+        </p:nvSpPr>
+        <p:spPr>
+          <a:xfrm>
+            <a:off x="5943600" y="1143000"/>
+            <a:ext cx="5897880" cy="5212080"/>
+          </a:xfrm>
+          <a:prstGeom prst="rect">
+            <a:avLst/>
+          </a:prstGeom>
+          <a:noFill/>
+        </p:spPr>
+        <p:txBody>
+          <a:bodyPr wrap="none"/>
+          <a:lstStyle/>
+          <a:p>
+            <a:pPr>
+              <a:spcAft>
+                <a:spcPts val="300"/>
+              </a:spcAft>
+            </a:pPr>
+            <a:r>
+              <a:rPr sz="1600">
+                <a:solidFill>
+                  <a:srgbClr val="CCD6E8"/>
+                </a:solidFill>
+              </a:rPr>
+              <a:t>▸ </a:t>
+            </a:r>
+            <a:r>
+              <a:rPr sz="1600" b="0" i="0">
+                <a:solidFill>
+                  <a:srgbClr val="CCD6E8"/>
+                </a:solidFill>
+              </a:rPr>
+              <a:t>Future Directions</a:t>
+            </a:r>
+          </a:p>
+          <a:p>
+            <a:pPr lvl="1">
+              <a:spcAft>
+                <a:spcPts val="300"/>
+              </a:spcAft>
+            </a:pPr>
+            <a:r>
+              <a:rPr sz="1600">
+                <a:solidFill>
+                  <a:srgbClr val="CCD6E8"/>
+                </a:solidFill>
+              </a:rPr>
+              <a:t>  • </a:t>
+            </a:r>
+            <a:r>
+              <a:rPr sz="1600" b="0" i="0">
+                <a:solidFill>
+                  <a:srgbClr val="CCD6E8"/>
+                </a:solidFill>
+              </a:rPr>
+              <a:t>Per-step length cost or Stop bonus</a:t>
+            </a:r>
+          </a:p>
+          <a:p>
+            <a:pPr lvl="1">
+              <a:spcAft>
+                <a:spcPts val="300"/>
+              </a:spcAft>
+            </a:pPr>
+            <a:r>
+              <a:rPr sz="1600">
+                <a:solidFill>
+                  <a:srgbClr val="CCD6E8"/>
+                </a:solidFill>
+              </a:rPr>
+              <a:t>  • </a:t>
+            </a:r>
+            <a:r>
+              <a:rPr sz="1600" b="0" i="0">
+                <a:solidFill>
+                  <a:srgbClr val="CCD6E8"/>
+                </a:solidFill>
+              </a:rPr>
+              <a:t>Extend pass menu to cover more LLVM </a:t>
+            </a:r>
+            <a:r>
+              <a:rPr sz="1600" b="0" i="0">
+                <a:solidFill>
+                  <a:srgbClr val="FFD75E"/>
+                </a:solidFill>
+              </a:rPr>
+              <a:t>20</a:t>
+            </a:r>
+            <a:r>
+              <a:rPr sz="1600" b="0" i="0">
+                <a:solidFill>
+                  <a:srgbClr val="CCD6E8"/>
+                </a:solidFill>
+              </a:rPr>
+              <a:t> transforms</a:t>
+            </a:r>
+          </a:p>
+          <a:p>
+            <a:pPr lvl="1">
+              <a:spcAft>
+                <a:spcPts val="300"/>
+              </a:spcAft>
+            </a:pPr>
+            <a:r>
+              <a:rPr sz="1600">
+                <a:solidFill>
+                  <a:srgbClr val="CCD6E8"/>
+                </a:solidFill>
+              </a:rPr>
+              <a:t>  • </a:t>
+            </a:r>
+            <a:r>
+              <a:rPr sz="1600" b="0" i="0">
+                <a:solidFill>
+                  <a:srgbClr val="CCD6E8"/>
+                </a:solidFill>
+              </a:rPr>
+              <a:t>Transfer to larger, real-world C/C++ programs</a:t>
+            </a:r>
+          </a:p>
+          <a:p>
+            <a:pPr lvl="1">
+              <a:spcAft>
+                <a:spcPts val="300"/>
+              </a:spcAft>
+            </a:pPr>
+            <a:r>
+              <a:rPr sz="1600">
+                <a:solidFill>
+                  <a:srgbClr val="CCD6E8"/>
+                </a:solidFill>
+              </a:rPr>
+              <a:t>  • </a:t>
+            </a:r>
+            <a:r>
+              <a:rPr sz="1600" b="0" i="0">
+                <a:solidFill>
+                  <a:srgbClr val="CCD6E8"/>
+                </a:solidFill>
+              </a:rPr>
+              <a:t>Beam search or MCTS at inference time</a:t>
+            </a:r>
+          </a:p>
+          <a:p>
+            <a:pPr lvl="1">
+              <a:spcAft>
+                <a:spcPts val="300"/>
+              </a:spcAft>
+            </a:pPr>
+            <a:r>
+              <a:rPr sz="1600">
+                <a:solidFill>
+                  <a:srgbClr val="CCD6E8"/>
+                </a:solidFill>
+              </a:rPr>
+              <a:t>  • </a:t>
+            </a:r>
+            <a:r>
+              <a:rPr sz="1600" b="0" i="0">
+                <a:solidFill>
+                  <a:srgbClr val="CCD6E8"/>
+                </a:solidFill>
+              </a:rPr>
+              <a:t>Combine offline bench-cache with online RL updates</a:t>
+            </a:r>
+          </a:p>
+          <a:p>
+            <a:pPr lvl="1">
+              <a:spcAft>
+                <a:spcPts val="300"/>
+              </a:spcAft>
+            </a:pPr>
+            <a:r>
+              <a:rPr sz="1600">
+                <a:solidFill>
+                  <a:srgbClr val="CCD6E8"/>
+                </a:solidFill>
+              </a:rPr>
+              <a:t>  • </a:t>
+            </a:r>
+            <a:r>
+              <a:rPr sz="1600" b="0" i="0">
+                <a:solidFill>
+                  <a:srgbClr val="CCD6E8"/>
+                </a:solidFill>
+              </a:rPr>
+              <a:t>Pass hyperparameter tuning as part of the action space</a:t>
+            </a:r>
+          </a:p>
+          <a:p>
+            <a:pPr lvl="1">
+              <a:spcAft>
+                <a:spcPts val="300"/>
+              </a:spcAft>
+            </a:pPr>
+            <a:r>
+              <a:rPr sz="1600">
+                <a:solidFill>
+                  <a:srgbClr val="CCD6E8"/>
+                </a:solidFill>
+              </a:rPr>
+              <a:t>  • </a:t>
+            </a:r>
+            <a:r>
+              <a:rPr sz="1600" b="0" i="0">
+                <a:solidFill>
+                  <a:srgbClr val="CCD6E8"/>
+                </a:solidFill>
+              </a:rPr>
+              <a:t>Cross-architecture generalisation (ARM, RISC-V)</a:t>
+            </a:r>
+          </a:p>
+        </p:txBody>
+      </p:sp>
+    </p:spTree>
+  </p:cSld>
+  <p:clrMapOvr>
+    <a:masterClrMapping/>
+  </p:clrMapOvr>
+</p:sld>
+</file>
+
+<file path=ppt/slides/slide24.xml><?xml version="1.0" encoding="utf-8"?>
+<p:sld xmlns:a="http://schemas.openxmlformats.org/drawingml/2006/main" xmlns:p="http://schemas.openxmlformats.org/presentationml/2006/main" xmlns:r="http://schemas.openxmlformats.org/officeDocument/2006/relationships">
+  <p:cSld>
+    <p:bg>
+      <p:bgPr>
+        <a:solidFill>
+          <a:srgbClr val="0F172A"/>
+        </a:solidFill>
+        <a:effectLst/>
+      </p:bgPr>
+    </p:bg>
+    <p:spTree>
+      <p:nvGrpSpPr>
+        <p:cNvPr id="1" name=""/>
+        <p:cNvGrpSpPr/>
+        <p:nvPr/>
+      </p:nvGrpSpPr>
+      <p:grpSpPr/>
+      <p:sp>
+        <p:nvSpPr>
+          <p:cNvPr id="2" name="Rectangle 1"/>
+          <p:cNvSpPr/>
+          <p:nvPr/>
+        </p:nvSpPr>
+        <p:spPr>
+          <a:xfrm>
+            <a:off x="0" y="0"/>
+            <a:ext cx="91440" cy="6858000"/>
+          </a:xfrm>
+          <a:prstGeom prst="rect">
+            <a:avLst/>
+          </a:prstGeom>
+          <a:solidFill>
+            <a:srgbClr val="4A9EFF"/>
+          </a:solidFill>
+          <a:ln>
+            <a:noFill/>
+          </a:ln>
+        </p:spPr>
+        <p:style>
+          <a:lnRef idx="1">
+            <a:schemeClr val="accent1"/>
+          </a:lnRef>
+          <a:fillRef idx="3">
+            <a:schemeClr val="accent1"/>
+          </a:fillRef>
+          <a:effectRef idx="2">
+            <a:schemeClr val="accent1"/>
+          </a:effectRef>
+          <a:fontRef idx="minor">
+            <a:schemeClr val="lt1"/>
+          </a:fontRef>
+        </p:style>
+        <p:txBody>
+          <a:bodyPr rtlCol="0" anchor="ctr"/>
+          <a:lstStyle/>
+          <a:p>
+            <a:pPr algn="ctr"/>
+          </a:p>
+        </p:txBody>
+      </p:sp>
+      <p:sp>
+        <p:nvSpPr>
           <p:cNvPr id="3" name="TextBox 2"/>
           <p:cNvSpPr txBox="1"/>
           <p:nvPr/>
@@ -19180,23 +24251,7 @@
                   <a:srgbClr val="FFFFFF"/>
                 </a:solidFill>
               </a:rPr>
-              <a:t>Autoregressive RL policies learn to beat -O</a:t>
-            </a:r>
-            <a:r>
-              <a:rPr sz="1700" b="0" i="0">
-                <a:solidFill>
-                  <a:srgbClr val="FFD75E"/>
-                </a:solidFill>
-              </a:rPr>
-              <a:t>3</a:t>
-            </a:r>
-            <a:r>
-              <a:rPr sz="1700" b="0" i="0">
-                <a:solidFill>
-                  <a:srgbClr val="FFFFFF"/>
-                </a:solidFill>
-              </a:rPr>
-              <a:t> on every training benchmark</a:t>
+              <a:t>Episode return beats instruction-weighted for both architectures</a:t>
             </a:r>
           </a:p>
           <a:p>
@@ -19219,7 +24274,7 @@
                   <a:srgbClr val="FFFFFF"/>
                 </a:solidFill>
               </a:rPr>
-              <a:t>Auto-TFX + episode return: </a:t>
+              <a:t>TFX episode: greedy mean </a:t>
             </a:r>
             <a:r>
               <a:rPr sz="1700" b="0" i="0">
@@ -19227,6 +24282,38 @@
                   <a:srgbClr val="FFD75E"/>
                 </a:solidFill>
               </a:rPr>
+              <a:t>+10.4%</a:t>
+            </a:r>
+            <a:r>
+              <a:rPr sz="1700" b="0" i="0">
+                <a:solidFill>
+                  <a:srgbClr val="FFFFFF"/>
+                </a:solidFill>
+              </a:rPr>
+              <a:t>, </a:t>
+            </a:r>
+            <a:r>
+              <a:rPr sz="1700" b="0" i="0">
+                <a:solidFill>
+                  <a:srgbClr val="FFD75E"/>
+                </a:solidFill>
+              </a:rPr>
+              <a:t>5</a:t>
+            </a:r>
+            <a:r>
+              <a:rPr sz="1700" b="0" i="0">
+                <a:solidFill>
+                  <a:srgbClr val="FFFFFF"/>
+                </a:solidFill>
+              </a:rPr>
+              <a:t>/</a:t>
+            </a:r>
+            <a:r>
+              <a:rPr sz="1700" b="0" i="0">
+                <a:solidFill>
+                  <a:srgbClr val="FFD75E"/>
+                </a:solidFill>
+              </a:rPr>
               <a:t>6</a:t>
             </a:r>
             <a:r>
@@ -19235,6 +24322,38 @@
                   <a:srgbClr val="FFFFFF"/>
                 </a:solidFill>
               </a:rPr>
+              <a:t> functions · sample-best all </a:t>
+            </a:r>
+            <a:r>
+              <a:rPr sz="1700" b="0" i="0">
+                <a:solidFill>
+                  <a:srgbClr val="FFD75E"/>
+                </a:solidFill>
+              </a:rPr>
+              <a:t>6</a:t>
+            </a:r>
+            <a:r>
+              <a:rPr sz="1700" b="0" i="0">
+                <a:solidFill>
+                  <a:srgbClr val="FFFFFF"/>
+                </a:solidFill>
+              </a:rPr>
+              <a:t> (</a:t>
+            </a:r>
+            <a:r>
+              <a:rPr sz="1700" b="0" i="0">
+                <a:solidFill>
+                  <a:srgbClr val="FFD75E"/>
+                </a:solidFill>
+              </a:rPr>
+              <a:t>2</a:t>
+            </a:r>
+            <a:r>
+              <a:rPr sz="1700" b="0" i="0">
+                <a:solidFill>
+                  <a:srgbClr val="FFFFFF"/>
+                </a:solidFill>
+              </a:rPr>
               <a:t>–</a:t>
             </a:r>
             <a:r>
@@ -19243,7 +24362,7 @@
                   <a:srgbClr val="FFD75E"/>
                 </a:solidFill>
               </a:rPr>
-              <a:t>28%</a:t>
+              <a:t>27%</a:t>
             </a:r>
             <a:r>
               <a:rPr sz="1700" b="0" i="0">
@@ -19251,15 +24370,38 @@
                   <a:srgbClr val="FFFFFF"/>
                 </a:solidFill>
               </a:rPr>
-              <a:t> speedup, mean </a:t>
+              <a:t>)</a:t>
+            </a:r>
+          </a:p>
+          <a:p>
+            <a:pPr lvl="1">
+              <a:spcAft>
+                <a:spcPts val="300"/>
+              </a:spcAft>
+            </a:pPr>
+            <a:r>
+              <a:rPr sz="1700">
+                <a:solidFill>
+                  <a:srgbClr val="FFFFFF"/>
+                </a:solidFill>
+              </a:rPr>
+              <a:t>  • </a:t>
             </a:r>
             <a:r>
               <a:rPr sz="1700" b="0" i="0">
                 <a:solidFill>
+                  <a:srgbClr val="FFFFFF"/>
+                </a:solidFill>
+              </a:rPr>
+              <a:t>GRU episode: greedy mean </a:t>
+            </a:r>
+            <a:r>
+              <a:rPr sz="1700" b="0" i="0">
+                <a:solidFill>
                   <a:srgbClr val="FFD75E"/>
                 </a:solidFill>
               </a:rPr>
-              <a:t>15.5%</a:t>
+              <a:t>+11.4%</a:t>
             </a:r>
             <a:r>
               <a:rPr sz="1700" b="0" i="0">
@@ -19267,15 +24409,38 @@
                   <a:srgbClr val="FFFFFF"/>
                 </a:solidFill>
               </a:rPr>
-              <a:t> across </a:t>
+              <a:t> — comparable to TFX despite slower training</a:t>
+            </a:r>
+          </a:p>
+          <a:p>
+            <a:pPr lvl="1">
+              <a:spcAft>
+                <a:spcPts val="300"/>
+              </a:spcAft>
+            </a:pPr>
+            <a:r>
+              <a:rPr sz="1700">
+                <a:solidFill>
+                  <a:srgbClr val="FFFFFF"/>
+                </a:solidFill>
+              </a:rPr>
+              <a:t>  • </a:t>
             </a:r>
             <a:r>
               <a:rPr sz="1700" b="0" i="0">
                 <a:solidFill>
+                  <a:srgbClr val="FFFFFF"/>
+                </a:solidFill>
+              </a:rPr>
+              <a:t>Weighted: </a:t>
+            </a:r>
+            <a:r>
+              <a:rPr sz="1700" b="0" i="0">
+                <a:solidFill>
                   <a:srgbClr val="FFD75E"/>
                 </a:solidFill>
               </a:rPr>
-              <a:t>6</a:t>
+              <a:t>+6.5%</a:t>
             </a:r>
             <a:r>
               <a:rPr sz="1700" b="0" i="0">
@@ -19283,7 +24448,23 @@
                   <a:srgbClr val="FFFFFF"/>
                 </a:solidFill>
               </a:rPr>
-              <a:t> functions</a:t>
+              <a:t> (TFX) / </a:t>
+            </a:r>
+            <a:r>
+              <a:rPr sz="1700" b="0" i="0">
+                <a:solidFill>
+                  <a:srgbClr val="FFD75E"/>
+                </a:solidFill>
+              </a:rPr>
+              <a:t>+9.2%</a:t>
+            </a:r>
+            <a:r>
+              <a:rPr sz="1700" b="0" i="0">
+                <a:solidFill>
+                  <a:srgbClr val="FFFFFF"/>
+                </a:solidFill>
+              </a:rPr>
+              <a:t> (GRU) — IR-reduction proxy diverges from speedup</a:t>
             </a:r>
           </a:p>
           <a:p>
@@ -19306,23 +24487,7 @@
                   <a:srgbClr val="FFFFFF"/>
                 </a:solidFill>
               </a:rPr>
-              <a:t>Explained Variance ≈ </a:t>
-            </a:r>
-            <a:r>
-              <a:rPr sz="1700" b="0" i="0">
-                <a:solidFill>
-                  <a:srgbClr val="FFD75E"/>
-                </a:solidFill>
-              </a:rPr>
-              <a:t>1</a:t>
-            </a:r>
-            <a:r>
-              <a:rPr sz="1700" b="0" i="0">
-                <a:solidFill>
-                  <a:srgbClr val="FFFFFF"/>
-                </a:solidFill>
-              </a:rPr>
-              <a:t> confirms the IR delta representation and learned value baseline</a:t>
+              <a:t>ir_corr confirms IR reduction is not a reliable speedup predictor</a:t>
             </a:r>
           </a:p>
           <a:p>
@@ -19342,10 +24507,18 @@
             <a:r>
               <a:rPr sz="1700" b="0" i="0">
                 <a:solidFill>
+                  <a:srgbClr val="FFFFFF"/>
+                </a:solidFill>
+              </a:rPr>
+              <a:t>Top IR-reducing fft sequences achieve −</a:t>
+            </a:r>
+            <a:r>
+              <a:rPr sz="1700" b="0" i="0">
+                <a:solidFill>
                   <a:srgbClr val="FFD75E"/>
                 </a:solidFill>
               </a:rPr>
-              <a:t>48</a:t>
+              <a:t>8%</a:t>
             </a:r>
             <a:r>
               <a:rPr sz="1700" b="0" i="0">
@@ -19353,7 +24526,31 @@
                   <a:srgbClr val="FFFFFF"/>
                 </a:solidFill>
               </a:rPr>
-              <a:t>-dim delta features + action history are sufficient to predict terminal speedup per-step</a:t>
+              <a:t> to −</a:t>
+            </a:r>
+            <a:r>
+              <a:rPr sz="1700" b="0" i="0">
+                <a:solidFill>
+                  <a:srgbClr val="FFD75E"/>
+                </a:solidFill>
+              </a:rPr>
+              <a:t>35%</a:t>
+            </a:r>
+            <a:r>
+              <a:rPr sz="1700" b="0" i="0">
+                <a:solidFill>
+                  <a:srgbClr val="FFFFFF"/>
+                </a:solidFill>
+              </a:rPr>
+              <a:t> runtime — all slower than -O</a:t>
+            </a:r>
+            <a:r>
+              <a:rPr sz="1700" b="0" i="0">
+                <a:solidFill>
+                  <a:srgbClr val="FFD75E"/>
+                </a:solidFill>
+              </a:rPr>
+              <a:t>3</a:t>
             </a:r>
           </a:p>
           <a:p>
@@ -19376,7 +24573,38 @@
                   <a:srgbClr val="FFFFFF"/>
                 </a:solidFill>
               </a:rPr>
-              <a:t>Two architectures (Auto-GRU, Auto-TFX) × two return formulations provide systematic comparison</a:t>
+              <a:t>Stop-token analysis: policy always exhausts horizon K=</a:t>
+            </a:r>
+            <a:r>
+              <a:rPr sz="1700" b="0" i="0">
+                <a:solidFill>
+                  <a:srgbClr val="FFD75E"/>
+                </a:solidFill>
+              </a:rPr>
+              <a:t>20</a:t>
+            </a:r>
+          </a:p>
+          <a:p>
+            <a:pPr lvl="1">
+              <a:spcAft>
+                <a:spcPts val="300"/>
+              </a:spcAft>
+            </a:pPr>
+            <a:r>
+              <a:rPr sz="1700">
+                <a:solidFill>
+                  <a:srgbClr val="FFFFFF"/>
+                </a:solidFill>
+              </a:rPr>
+              <a:t>  • </a:t>
+            </a:r>
+            <a:r>
+              <a:rPr sz="1700" b="0" i="0">
+                <a:solidFill>
+                  <a:srgbClr val="FFFFFF"/>
+                </a:solidFill>
+              </a:rPr>
+              <a:t>Rational under terminal reward; fix requires per-step length cost or Stop bonus</a:t>
             </a:r>
           </a:p>
           <a:p>
@@ -19399,7 +24627,46 @@
                   <a:srgbClr val="FFFFFF"/>
                 </a:solidFill>
               </a:rPr>
-              <a:t>Stop-token analysis reveals a structural incentive to exhaust the horizon</a:t>
+              <a:t>Pool-wide training (</a:t>
+            </a:r>
+            <a:r>
+              <a:rPr sz="1700" b="0" i="0">
+                <a:solidFill>
+                  <a:srgbClr val="FFD75E"/>
+                </a:solidFill>
+              </a:rPr>
+              <a:t>38</a:t>
+            </a:r>
+            <a:r>
+              <a:rPr sz="1700" b="0" i="0">
+                <a:solidFill>
+                  <a:srgbClr val="FFFFFF"/>
+                </a:solidFill>
+              </a:rPr>
+              <a:t> fn) failed to converge — episodes/function is the binding constraint</a:t>
+            </a:r>
+          </a:p>
+          <a:p>
+            <a:pPr>
+              <a:spcAft>
+                <a:spcPts val="300"/>
+              </a:spcAft>
+            </a:pPr>
+            <a:r>
+              <a:rPr sz="1700">
+                <a:solidFill>
+                  <a:srgbClr val="FFFFFF"/>
+                </a:solidFill>
+              </a:rPr>
+              <a:t>▸ </a:t>
+            </a:r>
+            <a:r>
+              <a:rPr sz="1700" b="0" i="0">
+                <a:solidFill>
+                  <a:srgbClr val="FFFFFF"/>
+                </a:solidFill>
+              </a:rPr>
+              <a:t>Key insight: IR delta features must capture structural position, not global counts</a:t>
             </a:r>
           </a:p>
           <a:p>
@@ -19422,99 +24689,7 @@
                   <a:srgbClr val="FFFFFF"/>
                 </a:solidFill>
               </a:rPr>
-              <a:t>Rational response to terminal reward + unbounded expected future gain</a:t>
-            </a:r>
-          </a:p>
-          <a:p>
-            <a:pPr lvl="1">
-              <a:spcAft>
-                <a:spcPts val="300"/>
-              </a:spcAft>
-            </a:pPr>
-            <a:r>
-              <a:rPr sz="1700">
-                <a:solidFill>
-                  <a:srgbClr val="FFFFFF"/>
-                </a:solidFill>
-              </a:rPr>
-              <a:t>  • </a:t>
-            </a:r>
-            <a:r>
-              <a:rPr sz="1700" b="0" i="0">
-                <a:solidFill>
-                  <a:srgbClr val="FFFFFF"/>
-                </a:solidFill>
-              </a:rPr>
-              <a:t>Design fix: per-step length cost or Stop bonus calibrated to marginal return</a:t>
-            </a:r>
-          </a:p>
-          <a:p>
-            <a:pPr>
-              <a:spcAft>
-                <a:spcPts val="300"/>
-              </a:spcAft>
-            </a:pPr>
-            <a:r>
-              <a:rPr sz="1700">
-                <a:solidFill>
-                  <a:srgbClr val="FFFFFF"/>
-                </a:solidFill>
-              </a:rPr>
-              <a:t>▸ </a:t>
-            </a:r>
-            <a:r>
-              <a:rPr sz="1700" b="0" i="0">
-                <a:solidFill>
-                  <a:srgbClr val="FFFFFF"/>
-                </a:solidFill>
-              </a:rPr>
-              <a:t>Key insight: IR state must capture structural position within the function body</a:t>
-            </a:r>
-          </a:p>
-          <a:p>
-            <a:pPr lvl="1">
-              <a:spcAft>
-                <a:spcPts val="300"/>
-              </a:spcAft>
-            </a:pPr>
-            <a:r>
-              <a:rPr sz="1700">
-                <a:solidFill>
-                  <a:srgbClr val="FFFFFF"/>
-                </a:solidFill>
-              </a:rPr>
-              <a:t>  • </a:t>
-            </a:r>
-            <a:r>
-              <a:rPr sz="1700" b="0" i="0">
-                <a:solidFill>
-                  <a:srgbClr val="FFFFFF"/>
-                </a:solidFill>
-              </a:rPr>
-              <a:t>Delta representation encodes how instruction composition shifts across positional chunks</a:t>
-            </a:r>
-          </a:p>
-          <a:p>
-            <a:pPr lvl="1">
-              <a:spcAft>
-                <a:spcPts val="300"/>
-              </a:spcAft>
-            </a:pPr>
-            <a:r>
-              <a:rPr sz="1700">
-                <a:solidFill>
-                  <a:srgbClr val="FFFFFF"/>
-                </a:solidFill>
-              </a:rPr>
-              <a:t>  • </a:t>
-            </a:r>
-            <a:r>
-              <a:rPr sz="1700" b="0" i="0">
-                <a:solidFill>
-                  <a:srgbClr val="FFFFFF"/>
-                </a:solidFill>
-              </a:rPr>
-              <a:t>Structural changes like loop-rotate and licm are invisible to global count vectors</a:t>
+              <a:t>loop-rotate, licm, sroa shifts invisible to global count vectors; visible to deltas</a:t>
             </a:r>
           </a:p>
         </p:txBody>
@@ -23486,43 +28661,9 @@
           </a:p>
         </p:txBody>
       </p:sp>
-      <p:sp>
-        <p:nvSpPr>
-          <p:cNvPr id="31" name="TextBox 30"/>
-          <p:cNvSpPr txBox="1"/>
-          <p:nvPr/>
-        </p:nvSpPr>
-        <p:spPr>
-          <a:xfrm>
-            <a:off x="411480" y="6053328"/>
-            <a:ext cx="3749039" cy="347472"/>
-          </a:xfrm>
-          <a:prstGeom prst="rect">
-            <a:avLst/>
-          </a:prstGeom>
-          <a:noFill/>
-        </p:spPr>
-        <p:txBody>
-          <a:bodyPr wrap="none">
-            <a:spAutoFit/>
-          </a:bodyPr>
-          <a:lstStyle/>
-          <a:p>
-            <a:pPr algn="l"/>
-            <a:r>
-              <a:rPr sz="1000" b="0" i="1">
-                <a:solidFill>
-                  <a:srgbClr val="555577"/>
-                </a:solidFill>
-              </a:rPr>
-              <a:t>★ placeholder — update once dataset.jsonl regenerated</a:t>
-            </a:r>
-          </a:p>
-        </p:txBody>
-      </p:sp>
       <p:pic>
         <p:nvPicPr>
-          <p:cNvPr id="32" name="Picture 31" descr="dataset.png"/>
+          <p:cNvPr id="31" name="Picture 30" descr="ceiling_gaps.png"/>
           <p:cNvPicPr>
             <a:picLocks noChangeAspect="1"/>
           </p:cNvPicPr>
@@ -23536,8 +28677,32 @@
         </p:blipFill>
         <p:spPr>
           <a:xfrm>
-            <a:off x="4389120" y="1097280"/>
-            <a:ext cx="7498079" cy="2230283"/>
+            <a:off x="4343400" y="1097280"/>
+            <a:ext cx="3931920" cy="6186718"/>
+          </a:xfrm>
+          <a:prstGeom prst="rect">
+            <a:avLst/>
+          </a:prstGeom>
+        </p:spPr>
+      </p:pic>
+      <p:pic>
+        <p:nvPicPr>
+          <p:cNvPr id="32" name="Picture 31" descr="seq_length_by_tier.png"/>
+          <p:cNvPicPr>
+            <a:picLocks noChangeAspect="1"/>
+          </p:cNvPicPr>
+          <p:nvPr/>
+        </p:nvPicPr>
+        <p:blipFill>
+          <a:blip r:embed="rId3"/>
+          <a:stretch>
+            <a:fillRect/>
+          </a:stretch>
+        </p:blipFill>
+        <p:spPr>
+          <a:xfrm>
+            <a:off x="8366760" y="1097280"/>
+            <a:ext cx="3657600" cy="2253454"/>
           </a:xfrm>
           <a:prstGeom prst="rect">
             <a:avLst/>
